--- a/space_templates.pptx
+++ b/space_templates.pptx
@@ -1980,11 +1980,11 @@
 
 <file path=ppt/slides/slide1.xml><?xml version="1.0" encoding="utf-8"?>
 <p:sld xmlns:a="http://schemas.openxmlformats.org/drawingml/2006/main" xmlns:r="http://schemas.openxmlformats.org/officeDocument/2006/relationships" xmlns:p="http://schemas.openxmlformats.org/presentationml/2006/main">
-  <p:cSld name="Slide 21">
+  <p:cSld name="Slide 25">
     <p:bg>
       <p:bgPr>
         <a:solidFill>
-          <a:srgbClr val="17365D"/>
+          <a:srgbClr val="F5F6F8"/>
         </a:solidFill>
         <a:effectLst/>
       </p:bgPr>
@@ -2012,13 +2012,162 @@
         <p:spPr>
           <a:xfrm>
             <a:off x="0" y="0"/>
-            <a:ext cx="256032" cy="10689336"/>
-          </a:xfrm>
-          <a:prstGeom prst="rect">
-            <a:avLst/>
-          </a:prstGeom>
-          <a:solidFill>
-            <a:srgbClr val="5B9BD5"/>
+            <a:ext cx="15124176" cy="1170432"/>
+          </a:xfrm>
+          <a:prstGeom prst="rect">
+            <a:avLst/>
+          </a:prstGeom>
+          <a:solidFill>
+            <a:srgbClr val="17365D"/>
+          </a:solidFill>
+          <a:ln w="12700">
+            <a:solidFill>
+              <a:srgbClr val="17365D"/>
+            </a:solidFill>
+            <a:prstDash val="solid"/>
+          </a:ln>
+        </p:spPr>
+        <p:txBody>
+          <a:bodyPr/>
+          <a:lstStyle/>
+          <a:p>
+            <a:endParaRPr/>
+          </a:p>
+        </p:txBody>
+      </p:sp>
+      <p:sp>
+        <p:nvSpPr>
+          <p:cNvPr id="3" name="Text 1"/>
+          <p:cNvSpPr/>
+          <p:nvPr/>
+        </p:nvSpPr>
+        <p:spPr>
+          <a:xfrm>
+            <a:off x="658368" y="237744"/>
+            <a:ext cx="10515600" cy="457200"/>
+          </a:xfrm>
+          <a:prstGeom prst="rect">
+            <a:avLst/>
+          </a:prstGeom>
+          <a:noFill/>
+          <a:ln/>
+        </p:spPr>
+        <p:txBody>
+          <a:bodyPr wrap="square" lIns="0" tIns="0" rIns="0" bIns="0" rtlCol="0" anchor="ctr"/>
+          <a:lstStyle/>
+          <a:p>
+            <a:pPr marL="0" indent="0">
+              <a:buNone/>
+            </a:pPr>
+            <a:r>
+              <a:rPr lang="en-US" sz="2600" b="1" dirty="0">
+                <a:solidFill>
+                  <a:srgbClr val="FFFFFF"/>
+                </a:solidFill>
+                <a:latin typeface="Arial" pitchFamily="34" charset="0"/>
+                <a:ea typeface="Arial" pitchFamily="34" charset="-122"/>
+                <a:cs typeface="Arial" pitchFamily="34" charset="-120"/>
+              </a:rPr>
+              <a:t>04 · Building façade &amp; main porch</a:t>
+            </a:r>
+            <a:endParaRPr lang="en-US" sz="2600" dirty="0"/>
+          </a:p>
+        </p:txBody>
+      </p:sp>
+      <p:sp>
+        <p:nvSpPr>
+          <p:cNvPr id="4" name="Text 2"/>
+          <p:cNvSpPr/>
+          <p:nvPr/>
+        </p:nvSpPr>
+        <p:spPr>
+          <a:xfrm>
+            <a:off x="658368" y="694944"/>
+            <a:ext cx="10515600" cy="292608"/>
+          </a:xfrm>
+          <a:prstGeom prst="rect">
+            <a:avLst/>
+          </a:prstGeom>
+          <a:noFill/>
+          <a:ln/>
+        </p:spPr>
+        <p:txBody>
+          <a:bodyPr wrap="square" lIns="0" tIns="0" rIns="0" bIns="0" rtlCol="0" anchor="ctr"/>
+          <a:lstStyle/>
+          <a:p>
+            <a:pPr marL="0" indent="0">
+              <a:buNone/>
+            </a:pPr>
+            <a:r>
+              <a:rPr lang="en-US" sz="1200" dirty="0">
+                <a:solidFill>
+                  <a:srgbClr val="AFC3DC"/>
+                </a:solidFill>
+                <a:latin typeface="Arial" pitchFamily="34" charset="0"/>
+                <a:ea typeface="Arial" pitchFamily="34" charset="-122"/>
+                <a:cs typeface="Arial" pitchFamily="34" charset="-120"/>
+              </a:rPr>
+              <a:t>Arrival experience — façade, porch, driveway, signage   ·   Regenta, Jamshedpur</a:t>
+            </a:r>
+            <a:endParaRPr lang="en-US" sz="1200" dirty="0"/>
+          </a:p>
+        </p:txBody>
+      </p:sp>
+      <p:sp>
+        <p:nvSpPr>
+          <p:cNvPr id="5" name="Text 3"/>
+          <p:cNvSpPr/>
+          <p:nvPr/>
+        </p:nvSpPr>
+        <p:spPr>
+          <a:xfrm>
+            <a:off x="11265408" y="329184"/>
+            <a:ext cx="3200400" cy="502920"/>
+          </a:xfrm>
+          <a:prstGeom prst="rect">
+            <a:avLst/>
+          </a:prstGeom>
+          <a:noFill/>
+          <a:ln/>
+        </p:spPr>
+        <p:txBody>
+          <a:bodyPr wrap="square" lIns="0" tIns="0" rIns="0" bIns="0" rtlCol="0" anchor="ctr"/>
+          <a:lstStyle/>
+          <a:p>
+            <a:pPr marL="0" indent="0" algn="r">
+              <a:buNone/>
+            </a:pPr>
+            <a:r>
+              <a:rPr lang="en-US" sz="1200" b="1" dirty="0">
+                <a:solidFill>
+                  <a:srgbClr val="FFFFFF"/>
+                </a:solidFill>
+                <a:latin typeface="Arial" pitchFamily="34" charset="0"/>
+                <a:ea typeface="Arial" pitchFamily="34" charset="-122"/>
+                <a:cs typeface="Arial" pitchFamily="34" charset="-120"/>
+              </a:rPr>
+              <a:t>ROHL-0002</a:t>
+            </a:r>
+            <a:endParaRPr lang="en-US" sz="1200" dirty="0"/>
+          </a:p>
+        </p:txBody>
+      </p:sp>
+      <p:sp>
+        <p:nvSpPr>
+          <p:cNvPr id="6" name="Shape 4"/>
+          <p:cNvSpPr/>
+          <p:nvPr/>
+        </p:nvSpPr>
+        <p:spPr>
+          <a:xfrm>
+            <a:off x="658368" y="1645920"/>
+            <a:ext cx="4419600" cy="475488"/>
+          </a:xfrm>
+          <a:prstGeom prst="rect">
+            <a:avLst/>
+          </a:prstGeom>
+          <a:solidFill>
+            <a:srgbClr val="C3C7CD"/>
           </a:solidFill>
           <a:ln w="12700">
             <a:solidFill>
@@ -2037,69 +2186,30 @@
       </p:sp>
       <p:sp>
         <p:nvSpPr>
-          <p:cNvPr id="3" name="Text 1"/>
-          <p:cNvSpPr/>
-          <p:nvPr/>
-        </p:nvSpPr>
-        <p:spPr>
-          <a:xfrm>
-            <a:off x="1097280" y="3017520"/>
-            <a:ext cx="12380976" cy="365760"/>
-          </a:xfrm>
-          <a:prstGeom prst="rect">
-            <a:avLst/>
-          </a:prstGeom>
-          <a:noFill/>
-          <a:ln/>
-        </p:spPr>
-        <p:txBody>
-          <a:bodyPr wrap="square" lIns="0" tIns="0" rIns="0" bIns="0" rtlCol="0" anchor="ctr"/>
-          <a:lstStyle/>
-          <a:p>
-            <a:pPr marL="0" indent="0">
-              <a:buNone/>
-            </a:pPr>
-            <a:r>
-              <a:rPr lang="en-US" sz="1250" b="1" kern="0" spc="140" dirty="0">
-                <a:solidFill>
-                  <a:srgbClr val="5B9BD5"/>
-                </a:solidFill>
-                <a:latin typeface="Arial" pitchFamily="34" charset="0"/>
-                <a:ea typeface="Arial" pitchFamily="34" charset="-122"/>
-                <a:cs typeface="Arial" pitchFamily="34" charset="-120"/>
-              </a:rPr>
-              <a:t>PROJECT 02  ·  ROHL-0002</a:t>
-            </a:r>
-            <a:endParaRPr lang="en-US" sz="1250" dirty="0"/>
-          </a:p>
-        </p:txBody>
-      </p:sp>
-      <p:sp>
-        <p:nvSpPr>
-          <p:cNvPr id="4" name="Text 2"/>
-          <p:cNvSpPr/>
-          <p:nvPr/>
-        </p:nvSpPr>
-        <p:spPr>
-          <a:xfrm>
-            <a:off x="1097280" y="3456432"/>
-            <a:ext cx="12380976" cy="1463040"/>
-          </a:xfrm>
-          <a:prstGeom prst="rect">
-            <a:avLst/>
-          </a:prstGeom>
-          <a:noFill/>
-          <a:ln/>
-        </p:spPr>
-        <p:txBody>
-          <a:bodyPr wrap="square" lIns="0" tIns="0" rIns="0" bIns="0" rtlCol="0" anchor="t"/>
-          <a:lstStyle/>
-          <a:p>
-            <a:pPr marL="0" indent="0">
-              <a:buNone/>
-            </a:pPr>
-            <a:r>
-              <a:rPr lang="en-US" sz="4400" b="1" dirty="0">
+          <p:cNvPr id="7" name="Text 5"/>
+          <p:cNvSpPr/>
+          <p:nvPr/>
+        </p:nvSpPr>
+        <p:spPr>
+          <a:xfrm>
+            <a:off x="822960" y="1645920"/>
+            <a:ext cx="4090416" cy="475488"/>
+          </a:xfrm>
+          <a:prstGeom prst="rect">
+            <a:avLst/>
+          </a:prstGeom>
+          <a:noFill/>
+          <a:ln/>
+        </p:spPr>
+        <p:txBody>
+          <a:bodyPr wrap="square" lIns="0" tIns="0" rIns="0" bIns="0" rtlCol="0" anchor="ctr"/>
+          <a:lstStyle/>
+          <a:p>
+            <a:pPr marL="0" indent="0">
+              <a:buNone/>
+            </a:pPr>
+            <a:r>
+              <a:rPr lang="en-US" sz="1100" b="1" kern="0" spc="60" dirty="0">
                 <a:solidFill>
                   <a:srgbClr val="FFFFFF"/>
                 </a:solidFill>
@@ -2107,67 +2217,101 @@
                 <a:ea typeface="Arial" pitchFamily="34" charset="-122"/>
                 <a:cs typeface="Arial" pitchFamily="34" charset="-120"/>
               </a:rPr>
-              <a:t>REGENTA</a:t>
-            </a:r>
-            <a:endParaRPr lang="en-US" sz="4400" dirty="0"/>
-          </a:p>
-        </p:txBody>
-      </p:sp>
-      <p:sp>
-        <p:nvSpPr>
-          <p:cNvPr id="5" name="Text 3"/>
-          <p:cNvSpPr/>
-          <p:nvPr/>
-        </p:nvSpPr>
-        <p:spPr>
-          <a:xfrm>
-            <a:off x="1097280" y="4983480"/>
-            <a:ext cx="12380976" cy="502920"/>
-          </a:xfrm>
-          <a:prstGeom prst="rect">
-            <a:avLst/>
-          </a:prstGeom>
-          <a:noFill/>
-          <a:ln/>
-        </p:spPr>
-        <p:txBody>
-          <a:bodyPr wrap="square" lIns="0" tIns="0" rIns="0" bIns="0" rtlCol="0" anchor="ctr"/>
-          <a:lstStyle/>
-          <a:p>
-            <a:pPr marL="0" indent="0">
-              <a:buNone/>
-            </a:pPr>
-            <a:r>
-              <a:rPr lang="en-US" sz="2200" dirty="0">
-                <a:solidFill>
-                  <a:srgbClr val="CFE0F2"/>
-                </a:solidFill>
-                <a:latin typeface="Arial" pitchFamily="34" charset="0"/>
-                <a:ea typeface="Arial" pitchFamily="34" charset="-122"/>
-                <a:cs typeface="Arial" pitchFamily="34" charset="-120"/>
-              </a:rPr>
-              <a:t>Jamshedpur, Jharkhand</a:t>
-            </a:r>
-            <a:endParaRPr lang="en-US" sz="2200" dirty="0"/>
-          </a:p>
-        </p:txBody>
-      </p:sp>
-      <p:sp>
-        <p:nvSpPr>
-          <p:cNvPr id="6" name="Shape 4"/>
-          <p:cNvSpPr/>
-          <p:nvPr/>
-        </p:nvSpPr>
-        <p:spPr>
-          <a:xfrm>
-            <a:off x="1097280" y="5623560"/>
-            <a:ext cx="2926080" cy="36576"/>
-          </a:xfrm>
-          <a:prstGeom prst="rect">
-            <a:avLst/>
-          </a:prstGeom>
-          <a:solidFill>
-            <a:srgbClr val="5B9BD5"/>
+              <a:t>RENDERED — DESIGN INTENT</a:t>
+            </a:r>
+            <a:endParaRPr lang="en-US" sz="1100" dirty="0"/>
+          </a:p>
+        </p:txBody>
+      </p:sp>
+      <p:sp>
+        <p:nvSpPr>
+          <p:cNvPr id="8" name="Shape 6"/>
+          <p:cNvSpPr/>
+          <p:nvPr/>
+        </p:nvSpPr>
+        <p:spPr>
+          <a:xfrm>
+            <a:off x="658368" y="2212848"/>
+            <a:ext cx="4419600" cy="5605272"/>
+          </a:xfrm>
+          <a:prstGeom prst="roundRect">
+            <a:avLst>
+              <a:gd name="adj" fmla="val 1034"/>
+            </a:avLst>
+          </a:prstGeom>
+          <a:solidFill>
+            <a:srgbClr val="F0F1F3"/>
+          </a:solidFill>
+          <a:ln w="12700">
+            <a:solidFill>
+              <a:srgbClr val="D6DBE2"/>
+            </a:solidFill>
+            <a:prstDash val="solid"/>
+          </a:ln>
+        </p:spPr>
+        <p:txBody>
+          <a:bodyPr/>
+          <a:lstStyle/>
+          <a:p>
+            <a:endParaRPr/>
+          </a:p>
+        </p:txBody>
+      </p:sp>
+      <p:sp>
+        <p:nvSpPr>
+          <p:cNvPr id="9" name="Text 7"/>
+          <p:cNvSpPr/>
+          <p:nvPr/>
+        </p:nvSpPr>
+        <p:spPr>
+          <a:xfrm>
+            <a:off x="932688" y="4709160"/>
+            <a:ext cx="3870960" cy="457200"/>
+          </a:xfrm>
+          <a:prstGeom prst="rect">
+            <a:avLst/>
+          </a:prstGeom>
+          <a:noFill/>
+          <a:ln/>
+        </p:spPr>
+        <p:txBody>
+          <a:bodyPr wrap="square" lIns="0" tIns="0" rIns="0" bIns="0" rtlCol="0" anchor="ctr"/>
+          <a:lstStyle/>
+          <a:p>
+            <a:pPr marL="0" indent="0" algn="ctr">
+              <a:buNone/>
+            </a:pPr>
+            <a:r>
+              <a:rPr lang="en-US" sz="1200" i="1" dirty="0">
+                <a:solidFill>
+                  <a:srgbClr val="9AA0A6"/>
+                </a:solidFill>
+                <a:latin typeface="Arial" pitchFamily="34" charset="0"/>
+                <a:ea typeface="Arial" pitchFamily="34" charset="-122"/>
+                <a:cs typeface="Arial" pitchFamily="34" charset="-120"/>
+              </a:rPr>
+              <a:t>Photograph awaited</a:t>
+            </a:r>
+            <a:endParaRPr lang="en-US" sz="1200" dirty="0"/>
+          </a:p>
+        </p:txBody>
+      </p:sp>
+      <p:sp>
+        <p:nvSpPr>
+          <p:cNvPr id="10" name="Shape 8"/>
+          <p:cNvSpPr/>
+          <p:nvPr/>
+        </p:nvSpPr>
+        <p:spPr>
+          <a:xfrm>
+            <a:off x="5352288" y="1645920"/>
+            <a:ext cx="4419600" cy="475488"/>
+          </a:xfrm>
+          <a:prstGeom prst="rect">
+            <a:avLst/>
+          </a:prstGeom>
+          <a:solidFill>
+            <a:srgbClr val="C3C7CD"/>
           </a:solidFill>
           <a:ln w="12700">
             <a:solidFill>
@@ -2186,69 +2330,975 @@
       </p:sp>
       <p:sp>
         <p:nvSpPr>
+          <p:cNvPr id="11" name="Text 9"/>
+          <p:cNvSpPr/>
+          <p:nvPr/>
+        </p:nvSpPr>
+        <p:spPr>
+          <a:xfrm>
+            <a:off x="5516880" y="1645920"/>
+            <a:ext cx="4090416" cy="475488"/>
+          </a:xfrm>
+          <a:prstGeom prst="rect">
+            <a:avLst/>
+          </a:prstGeom>
+          <a:noFill/>
+          <a:ln/>
+        </p:spPr>
+        <p:txBody>
+          <a:bodyPr wrap="square" lIns="0" tIns="0" rIns="0" bIns="0" rtlCol="0" anchor="ctr"/>
+          <a:lstStyle/>
+          <a:p>
+            <a:pPr marL="0" indent="0">
+              <a:buNone/>
+            </a:pPr>
+            <a:r>
+              <a:rPr lang="en-US" sz="1100" b="1" kern="0" spc="60" dirty="0">
+                <a:solidFill>
+                  <a:srgbClr val="FFFFFF"/>
+                </a:solidFill>
+                <a:latin typeface="Arial" pitchFamily="34" charset="0"/>
+                <a:ea typeface="Arial" pitchFamily="34" charset="-122"/>
+                <a:cs typeface="Arial" pitchFamily="34" charset="-120"/>
+              </a:rPr>
+              <a:t>PREVIOUS MONTH</a:t>
+            </a:r>
+            <a:endParaRPr lang="en-US" sz="1100" dirty="0"/>
+          </a:p>
+        </p:txBody>
+      </p:sp>
+      <p:sp>
+        <p:nvSpPr>
+          <p:cNvPr id="12" name="Shape 10"/>
+          <p:cNvSpPr/>
+          <p:nvPr/>
+        </p:nvSpPr>
+        <p:spPr>
+          <a:xfrm>
+            <a:off x="5352288" y="2212848"/>
+            <a:ext cx="4419600" cy="5605272"/>
+          </a:xfrm>
+          <a:prstGeom prst="roundRect">
+            <a:avLst>
+              <a:gd name="adj" fmla="val 1034"/>
+            </a:avLst>
+          </a:prstGeom>
+          <a:solidFill>
+            <a:srgbClr val="F0F1F3"/>
+          </a:solidFill>
+          <a:ln w="12700">
+            <a:solidFill>
+              <a:srgbClr val="D6DBE2"/>
+            </a:solidFill>
+            <a:prstDash val="solid"/>
+          </a:ln>
+        </p:spPr>
+        <p:txBody>
+          <a:bodyPr/>
+          <a:lstStyle/>
+          <a:p>
+            <a:endParaRPr/>
+          </a:p>
+        </p:txBody>
+      </p:sp>
+      <p:sp>
+        <p:nvSpPr>
+          <p:cNvPr id="13" name="Text 11"/>
+          <p:cNvSpPr/>
+          <p:nvPr/>
+        </p:nvSpPr>
+        <p:spPr>
+          <a:xfrm>
+            <a:off x="5626608" y="4709160"/>
+            <a:ext cx="3870960" cy="457200"/>
+          </a:xfrm>
+          <a:prstGeom prst="rect">
+            <a:avLst/>
+          </a:prstGeom>
+          <a:noFill/>
+          <a:ln/>
+        </p:spPr>
+        <p:txBody>
+          <a:bodyPr wrap="square" lIns="0" tIns="0" rIns="0" bIns="0" rtlCol="0" anchor="ctr"/>
+          <a:lstStyle/>
+          <a:p>
+            <a:pPr marL="0" indent="0" algn="ctr">
+              <a:buNone/>
+            </a:pPr>
+            <a:r>
+              <a:rPr lang="en-US" sz="1200" i="1" dirty="0">
+                <a:solidFill>
+                  <a:srgbClr val="9AA0A6"/>
+                </a:solidFill>
+                <a:latin typeface="Arial" pitchFamily="34" charset="0"/>
+                <a:ea typeface="Arial" pitchFamily="34" charset="-122"/>
+                <a:cs typeface="Arial" pitchFamily="34" charset="-120"/>
+              </a:rPr>
+              <a:t>Photograph awaited</a:t>
+            </a:r>
+            <a:endParaRPr lang="en-US" sz="1200" dirty="0"/>
+          </a:p>
+        </p:txBody>
+      </p:sp>
+      <p:sp>
+        <p:nvSpPr>
+          <p:cNvPr id="14" name="Shape 12"/>
+          <p:cNvSpPr/>
+          <p:nvPr/>
+        </p:nvSpPr>
+        <p:spPr>
+          <a:xfrm>
+            <a:off x="10046208" y="1645920"/>
+            <a:ext cx="4419600" cy="475488"/>
+          </a:xfrm>
+          <a:prstGeom prst="rect">
+            <a:avLst/>
+          </a:prstGeom>
+          <a:solidFill>
+            <a:srgbClr val="C3C7CD"/>
+          </a:solidFill>
+          <a:ln w="12700">
+            <a:solidFill>
+              <a:srgbClr val="333333"/>
+            </a:solidFill>
+            <a:prstDash val="solid"/>
+          </a:ln>
+        </p:spPr>
+        <p:txBody>
+          <a:bodyPr/>
+          <a:lstStyle/>
+          <a:p>
+            <a:endParaRPr/>
+          </a:p>
+        </p:txBody>
+      </p:sp>
+      <p:sp>
+        <p:nvSpPr>
+          <p:cNvPr id="15" name="Text 13"/>
+          <p:cNvSpPr/>
+          <p:nvPr/>
+        </p:nvSpPr>
+        <p:spPr>
+          <a:xfrm>
+            <a:off x="10210800" y="1645920"/>
+            <a:ext cx="4090416" cy="475488"/>
+          </a:xfrm>
+          <a:prstGeom prst="rect">
+            <a:avLst/>
+          </a:prstGeom>
+          <a:noFill/>
+          <a:ln/>
+        </p:spPr>
+        <p:txBody>
+          <a:bodyPr wrap="square" lIns="0" tIns="0" rIns="0" bIns="0" rtlCol="0" anchor="ctr"/>
+          <a:lstStyle/>
+          <a:p>
+            <a:pPr marL="0" indent="0">
+              <a:buNone/>
+            </a:pPr>
+            <a:r>
+              <a:rPr lang="en-US" sz="1100" b="1" kern="0" spc="60" dirty="0">
+                <a:solidFill>
+                  <a:srgbClr val="FFFFFF"/>
+                </a:solidFill>
+                <a:latin typeface="Arial" pitchFamily="34" charset="0"/>
+                <a:ea typeface="Arial" pitchFamily="34" charset="-122"/>
+                <a:cs typeface="Arial" pitchFamily="34" charset="-120"/>
+              </a:rPr>
+              <a:t>CURRENT MONTH</a:t>
+            </a:r>
+            <a:endParaRPr lang="en-US" sz="1100" dirty="0"/>
+          </a:p>
+        </p:txBody>
+      </p:sp>
+      <p:sp>
+        <p:nvSpPr>
+          <p:cNvPr id="16" name="Shape 14"/>
+          <p:cNvSpPr/>
+          <p:nvPr/>
+        </p:nvSpPr>
+        <p:spPr>
+          <a:xfrm>
+            <a:off x="10046208" y="2212848"/>
+            <a:ext cx="4419600" cy="5605272"/>
+          </a:xfrm>
+          <a:prstGeom prst="roundRect">
+            <a:avLst>
+              <a:gd name="adj" fmla="val 1034"/>
+            </a:avLst>
+          </a:prstGeom>
+          <a:solidFill>
+            <a:srgbClr val="F0F1F3"/>
+          </a:solidFill>
+          <a:ln w="12700">
+            <a:solidFill>
+              <a:srgbClr val="D6DBE2"/>
+            </a:solidFill>
+            <a:prstDash val="solid"/>
+          </a:ln>
+        </p:spPr>
+        <p:txBody>
+          <a:bodyPr/>
+          <a:lstStyle/>
+          <a:p>
+            <a:endParaRPr/>
+          </a:p>
+        </p:txBody>
+      </p:sp>
+      <p:sp>
+        <p:nvSpPr>
+          <p:cNvPr id="17" name="Text 15"/>
+          <p:cNvSpPr/>
+          <p:nvPr/>
+        </p:nvSpPr>
+        <p:spPr>
+          <a:xfrm>
+            <a:off x="10320528" y="4709160"/>
+            <a:ext cx="3870960" cy="457200"/>
+          </a:xfrm>
+          <a:prstGeom prst="rect">
+            <a:avLst/>
+          </a:prstGeom>
+          <a:noFill/>
+          <a:ln/>
+        </p:spPr>
+        <p:txBody>
+          <a:bodyPr wrap="square" lIns="0" tIns="0" rIns="0" bIns="0" rtlCol="0" anchor="ctr"/>
+          <a:lstStyle/>
+          <a:p>
+            <a:pPr marL="0" indent="0" algn="ctr">
+              <a:buNone/>
+            </a:pPr>
+            <a:r>
+              <a:rPr lang="en-US" sz="1200" i="1" dirty="0">
+                <a:solidFill>
+                  <a:srgbClr val="9AA0A6"/>
+                </a:solidFill>
+                <a:latin typeface="Arial" pitchFamily="34" charset="0"/>
+                <a:ea typeface="Arial" pitchFamily="34" charset="-122"/>
+                <a:cs typeface="Arial" pitchFamily="34" charset="-120"/>
+              </a:rPr>
+              <a:t>Photograph awaited</a:t>
+            </a:r>
+            <a:endParaRPr lang="en-US" sz="1200" dirty="0"/>
+          </a:p>
+        </p:txBody>
+      </p:sp>
+      <p:sp>
+        <p:nvSpPr>
+          <p:cNvPr id="18" name="Shape 16"/>
+          <p:cNvSpPr/>
+          <p:nvPr/>
+        </p:nvSpPr>
+        <p:spPr>
+          <a:xfrm>
+            <a:off x="658368" y="7973568"/>
+            <a:ext cx="4694530" cy="1463040"/>
+          </a:xfrm>
+          <a:prstGeom prst="roundRect">
+            <a:avLst>
+              <a:gd name="adj" fmla="val 2439"/>
+            </a:avLst>
+          </a:prstGeom>
+          <a:solidFill>
+            <a:srgbClr val="FFFFFF"/>
+          </a:solidFill>
+          <a:ln w="12700">
+            <a:solidFill>
+              <a:srgbClr val="D6DBE2"/>
+            </a:solidFill>
+            <a:prstDash val="solid"/>
+          </a:ln>
+        </p:spPr>
+        <p:txBody>
+          <a:bodyPr/>
+          <a:lstStyle/>
+          <a:p>
+            <a:endParaRPr/>
+          </a:p>
+        </p:txBody>
+      </p:sp>
+      <p:sp>
+        <p:nvSpPr>
+          <p:cNvPr id="19" name="Shape 17"/>
+          <p:cNvSpPr/>
+          <p:nvPr/>
+        </p:nvSpPr>
+        <p:spPr>
+          <a:xfrm>
+            <a:off x="658368" y="7973568"/>
+            <a:ext cx="4694530" cy="402336"/>
+          </a:xfrm>
+          <a:prstGeom prst="rect">
+            <a:avLst/>
+          </a:prstGeom>
+          <a:solidFill>
+            <a:srgbClr val="2F75B5"/>
+          </a:solidFill>
+          <a:ln w="12700">
+            <a:solidFill>
+              <a:srgbClr val="333333"/>
+            </a:solidFill>
+            <a:prstDash val="solid"/>
+          </a:ln>
+        </p:spPr>
+        <p:txBody>
+          <a:bodyPr/>
+          <a:lstStyle/>
+          <a:p>
+            <a:endParaRPr/>
+          </a:p>
+        </p:txBody>
+      </p:sp>
+      <p:sp>
+        <p:nvSpPr>
+          <p:cNvPr id="20" name="Text 18"/>
+          <p:cNvSpPr/>
+          <p:nvPr/>
+        </p:nvSpPr>
+        <p:spPr>
+          <a:xfrm>
+            <a:off x="822960" y="7973568"/>
+            <a:ext cx="4365346" cy="402336"/>
+          </a:xfrm>
+          <a:prstGeom prst="rect">
+            <a:avLst/>
+          </a:prstGeom>
+          <a:noFill/>
+          <a:ln/>
+        </p:spPr>
+        <p:txBody>
+          <a:bodyPr wrap="square" lIns="0" tIns="0" rIns="0" bIns="0" rtlCol="0" anchor="ctr"/>
+          <a:lstStyle/>
+          <a:p>
+            <a:r>
+              <a:t>SITE VIDEO</a:t>
+            </a:r>
+          </a:p>
+        </p:txBody>
+      </p:sp>
+      <p:sp>
+        <p:nvSpPr>
+          <p:cNvPr id="21" name="Text 19"/>
+          <p:cNvSpPr/>
+          <p:nvPr/>
+        </p:nvSpPr>
+        <p:spPr>
+          <a:xfrm>
+            <a:off x="859536" y="8540496"/>
+            <a:ext cx="1691640" cy="329184"/>
+          </a:xfrm>
+          <a:prstGeom prst="rect">
+            <a:avLst/>
+          </a:prstGeom>
+          <a:noFill/>
+          <a:ln/>
+        </p:spPr>
+        <p:txBody>
+          <a:bodyPr wrap="square" lIns="0" tIns="0" rIns="0" bIns="0" rtlCol="0" anchor="ctr"/>
+          <a:lstStyle/>
+          <a:p>
+            <a:r>
+              <a:t>Site walkthrough</a:t>
+            </a:r>
+          </a:p>
+        </p:txBody>
+      </p:sp>
+      <p:sp>
+        <p:nvSpPr>
+          <p:cNvPr id="22" name="Text 20"/>
+          <p:cNvSpPr/>
+          <p:nvPr/>
+        </p:nvSpPr>
+        <p:spPr>
+          <a:xfrm>
+            <a:off x="2624328" y="8540496"/>
+            <a:ext cx="2499970" cy="329184"/>
+          </a:xfrm>
+          <a:prstGeom prst="rect">
+            <a:avLst/>
+          </a:prstGeom>
+          <a:noFill/>
+          <a:ln/>
+        </p:spPr>
+        <p:txBody>
+          <a:bodyPr wrap="square" lIns="0" tIns="0" rIns="0" bIns="0" rtlCol="0" anchor="ctr"/>
+          <a:lstStyle/>
+          <a:p>
+            <a:pPr marL="0" indent="0">
+              <a:buNone/>
+            </a:pPr>
+            <a:r>
+              <a:rPr lang="en-US" sz="1000" dirty="0">
+                <a:solidFill>
+                  <a:srgbClr val="9AA0A6"/>
+                </a:solidFill>
+                <a:latin typeface="Arial" pitchFamily="34" charset="0"/>
+                <a:ea typeface="Arial" pitchFamily="34" charset="-122"/>
+                <a:cs typeface="Arial" pitchFamily="34" charset="-120"/>
+              </a:rPr>
+              <a:t>—</a:t>
+            </a:r>
+            <a:endParaRPr lang="en-US" sz="1000" dirty="0"/>
+          </a:p>
+        </p:txBody>
+      </p:sp>
+      <p:sp>
+        <p:nvSpPr>
+          <p:cNvPr id="27" name="Shape 25"/>
+          <p:cNvSpPr/>
+          <p:nvPr/>
+        </p:nvSpPr>
+        <p:spPr>
+          <a:xfrm>
+            <a:off x="5627218" y="7973568"/>
+            <a:ext cx="8838590" cy="1463040"/>
+          </a:xfrm>
+          <a:prstGeom prst="roundRect">
+            <a:avLst>
+              <a:gd name="adj" fmla="val 2439"/>
+            </a:avLst>
+          </a:prstGeom>
+          <a:solidFill>
+            <a:srgbClr val="FFFFFF"/>
+          </a:solidFill>
+          <a:ln w="12700">
+            <a:solidFill>
+              <a:srgbClr val="D6DBE2"/>
+            </a:solidFill>
+            <a:prstDash val="solid"/>
+          </a:ln>
+        </p:spPr>
+        <p:txBody>
+          <a:bodyPr/>
+          <a:lstStyle/>
+          <a:p>
+            <a:endParaRPr/>
+          </a:p>
+        </p:txBody>
+      </p:sp>
+      <p:sp>
+        <p:nvSpPr>
+          <p:cNvPr id="28" name="Shape 26"/>
+          <p:cNvSpPr/>
+          <p:nvPr/>
+        </p:nvSpPr>
+        <p:spPr>
+          <a:xfrm>
+            <a:off x="5627218" y="7973568"/>
+            <a:ext cx="8838590" cy="402336"/>
+          </a:xfrm>
+          <a:prstGeom prst="rect">
+            <a:avLst/>
+          </a:prstGeom>
+          <a:solidFill>
+            <a:srgbClr val="17365D"/>
+          </a:solidFill>
+          <a:ln w="12700">
+            <a:solidFill>
+              <a:srgbClr val="333333"/>
+            </a:solidFill>
+            <a:prstDash val="solid"/>
+          </a:ln>
+        </p:spPr>
+        <p:txBody>
+          <a:bodyPr/>
+          <a:lstStyle/>
+          <a:p>
+            <a:endParaRPr/>
+          </a:p>
+        </p:txBody>
+      </p:sp>
+      <p:sp>
+        <p:nvSpPr>
+          <p:cNvPr id="29" name="Text 27"/>
+          <p:cNvSpPr/>
+          <p:nvPr/>
+        </p:nvSpPr>
+        <p:spPr>
+          <a:xfrm>
+            <a:off x="5791810" y="7973568"/>
+            <a:ext cx="8509406" cy="402336"/>
+          </a:xfrm>
+          <a:prstGeom prst="rect">
+            <a:avLst/>
+          </a:prstGeom>
+          <a:noFill/>
+          <a:ln/>
+        </p:spPr>
+        <p:txBody>
+          <a:bodyPr wrap="square" lIns="0" tIns="0" rIns="0" bIns="0" rtlCol="0" anchor="ctr"/>
+          <a:lstStyle/>
+          <a:p>
+            <a:pPr marL="0" indent="0">
+              <a:buNone/>
+            </a:pPr>
+            <a:r>
+              <a:rPr lang="en-US" sz="1050" b="1" kern="0" spc="70" dirty="0">
+                <a:solidFill>
+                  <a:srgbClr val="FFFFFF"/>
+                </a:solidFill>
+                <a:latin typeface="Arial" pitchFamily="34" charset="0"/>
+                <a:ea typeface="Arial" pitchFamily="34" charset="-122"/>
+                <a:cs typeface="Arial" pitchFamily="34" charset="-120"/>
+              </a:rPr>
+              <a:t>FEEDBACK FOR THIS SPACE</a:t>
+            </a:r>
+            <a:endParaRPr lang="en-US" sz="1050" dirty="0"/>
+          </a:p>
+        </p:txBody>
+      </p:sp>
+      <p:sp>
+        <p:nvSpPr>
+          <p:cNvPr id="30" name="Text 28"/>
+          <p:cNvSpPr/>
+          <p:nvPr/>
+        </p:nvSpPr>
+        <p:spPr>
+          <a:xfrm>
+            <a:off x="5828386" y="8485632"/>
+            <a:ext cx="8436254" cy="896112"/>
+          </a:xfrm>
+          <a:prstGeom prst="rect">
+            <a:avLst/>
+          </a:prstGeom>
+          <a:noFill/>
+          <a:ln/>
+        </p:spPr>
+        <p:txBody>
+          <a:bodyPr wrap="square" lIns="0" tIns="0" rIns="0" bIns="0" rtlCol="0" anchor="t"/>
+          <a:lstStyle/>
+          <a:p>
+            <a:pPr marL="0" indent="0">
+              <a:lnSpc>
+                <a:spcPts val="1600"/>
+              </a:lnSpc>
+              <a:buNone/>
+            </a:pPr>
+            <a:r>
+              <a:rPr lang="en-US" sz="1100" i="1" dirty="0">
+                <a:solidFill>
+                  <a:srgbClr val="9AA0A6"/>
+                </a:solidFill>
+                <a:latin typeface="Arial" pitchFamily="34" charset="0"/>
+                <a:ea typeface="Arial" pitchFamily="34" charset="-122"/>
+                <a:cs typeface="Arial" pitchFamily="34" charset="-120"/>
+              </a:rPr>
+              <a:t>To be recorded at the next site visit.</a:t>
+            </a:r>
+            <a:endParaRPr lang="en-US" sz="1100" dirty="0"/>
+          </a:p>
+        </p:txBody>
+      </p:sp>
+      <p:sp>
+        <p:nvSpPr>
+          <p:cNvPr id="31" name="Shape 29"/>
+          <p:cNvSpPr/>
+          <p:nvPr/>
+        </p:nvSpPr>
+        <p:spPr>
+          <a:xfrm>
+            <a:off x="658368" y="9482328"/>
+            <a:ext cx="13807440" cy="566928"/>
+          </a:xfrm>
+          <a:prstGeom prst="roundRect">
+            <a:avLst>
+              <a:gd name="adj" fmla="val 8065"/>
+            </a:avLst>
+          </a:prstGeom>
+          <a:solidFill>
+            <a:srgbClr val="EAF1F9"/>
+          </a:solidFill>
+          <a:ln w="12700">
+            <a:solidFill>
+              <a:srgbClr val="D6DBE2"/>
+            </a:solidFill>
+            <a:prstDash val="solid"/>
+          </a:ln>
+        </p:spPr>
+        <p:txBody>
+          <a:bodyPr/>
+          <a:lstStyle/>
+          <a:p>
+            <a:endParaRPr/>
+          </a:p>
+        </p:txBody>
+      </p:sp>
+      <p:sp>
+        <p:nvSpPr>
+          <p:cNvPr id="32" name="Text 30"/>
+          <p:cNvSpPr/>
+          <p:nvPr/>
+        </p:nvSpPr>
+        <p:spPr>
+          <a:xfrm>
+            <a:off x="932688" y="9509760"/>
+            <a:ext cx="13258800" cy="566928"/>
+          </a:xfrm>
+          <a:prstGeom prst="rect">
+            <a:avLst/>
+          </a:prstGeom>
+          <a:noFill/>
+          <a:ln/>
+        </p:spPr>
+        <p:txBody>
+          <a:bodyPr wrap="square" lIns="0" tIns="0" rIns="0" bIns="0" rtlCol="0" anchor="ctr"/>
+          <a:lstStyle/>
+          <a:p>
+            <a:r>
+              <a:t>Completion: —      ·      Last site visit: —      ·      Updated automatically from site form</a:t>
+            </a:r>
+          </a:p>
+        </p:txBody>
+      </p:sp>
+      <p:sp>
+        <p:nvSpPr>
+          <p:cNvPr id="33" name="Shape 31"/>
+          <p:cNvSpPr/>
+          <p:nvPr/>
+        </p:nvSpPr>
+        <p:spPr>
+          <a:xfrm>
+            <a:off x="0" y="10213848"/>
+            <a:ext cx="15124176" cy="32004"/>
+          </a:xfrm>
+          <a:prstGeom prst="rect">
+            <a:avLst/>
+          </a:prstGeom>
+          <a:solidFill>
+            <a:srgbClr val="17365D"/>
+          </a:solidFill>
+          <a:ln w="12700">
+            <a:solidFill>
+              <a:srgbClr val="17365D"/>
+            </a:solidFill>
+            <a:prstDash val="solid"/>
+          </a:ln>
+        </p:spPr>
+        <p:txBody>
+          <a:bodyPr/>
+          <a:lstStyle/>
+          <a:p>
+            <a:endParaRPr/>
+          </a:p>
+        </p:txBody>
+      </p:sp>
+      <p:sp>
+        <p:nvSpPr>
+          <p:cNvPr id="34" name="Text 32"/>
+          <p:cNvSpPr/>
+          <p:nvPr/>
+        </p:nvSpPr>
+        <p:spPr>
+          <a:xfrm>
+            <a:off x="658368" y="10287000"/>
+            <a:ext cx="8229600" cy="274320"/>
+          </a:xfrm>
+          <a:prstGeom prst="rect">
+            <a:avLst/>
+          </a:prstGeom>
+          <a:noFill/>
+          <a:ln/>
+        </p:spPr>
+        <p:txBody>
+          <a:bodyPr wrap="square" lIns="0" tIns="0" rIns="0" bIns="0" rtlCol="0" anchor="ctr"/>
+          <a:lstStyle/>
+          <a:p>
+            <a:pPr marL="0" indent="0">
+              <a:buNone/>
+            </a:pPr>
+            <a:r>
+              <a:rPr lang="en-US" sz="950" dirty="0">
+                <a:solidFill>
+                  <a:srgbClr val="6E7680"/>
+                </a:solidFill>
+                <a:latin typeface="Arial" pitchFamily="34" charset="0"/>
+                <a:ea typeface="Arial" pitchFamily="34" charset="-122"/>
+                <a:cs typeface="Arial" pitchFamily="34" charset="-120"/>
+              </a:rPr>
+              <a:t>ROHL-0002  ·  Regenta, Jamshedpur</a:t>
+            </a:r>
+            <a:endParaRPr lang="en-US" sz="950" dirty="0"/>
+          </a:p>
+        </p:txBody>
+      </p:sp>
+      <p:sp>
+        <p:nvSpPr>
+          <p:cNvPr id="35" name="Text 33"/>
+          <p:cNvSpPr/>
+          <p:nvPr/>
+        </p:nvSpPr>
+        <p:spPr>
+          <a:xfrm>
+            <a:off x="8979408" y="10287000"/>
+            <a:ext cx="5486400" cy="274320"/>
+          </a:xfrm>
+          <a:prstGeom prst="rect">
+            <a:avLst/>
+          </a:prstGeom>
+          <a:noFill/>
+          <a:ln/>
+        </p:spPr>
+        <p:txBody>
+          <a:bodyPr wrap="square" lIns="0" tIns="0" rIns="0" bIns="0" rtlCol="0" anchor="ctr"/>
+          <a:lstStyle/>
+          <a:p>
+            <a:pPr marL="0" indent="0" algn="r">
+              <a:buNone/>
+            </a:pPr>
+            <a:r>
+              <a:rPr sz="950" b="1" i="0">
+                <a:solidFill>
+                  <a:srgbClr val="C2185B"/>
+                </a:solidFill>
+                <a:latin typeface="Arial"/>
+              </a:rPr>
+              <a:t>RE:GEN:TA  HOTELS</a:t>
+            </a:r>
+            <a:endParaRPr lang="en-US" sz="950" dirty="0"/>
+          </a:p>
+        </p:txBody>
+      </p:sp>
+    </p:spTree>
+  </p:cSld>
+  <p:clrMapOvr>
+    <a:masterClrMapping/>
+  </p:clrMapOvr>
+</p:sld>
+</file>
+
+<file path=ppt/slides/slide1.xml><?xml version="1.0" encoding="utf-8"?>
+<p:sld xmlns:a="http://schemas.openxmlformats.org/drawingml/2006/main" xmlns:r="http://schemas.openxmlformats.org/officeDocument/2006/relationships" xmlns:p="http://schemas.openxmlformats.org/presentationml/2006/main">
+  <p:cSld name="Slide 25">
+    <p:bg>
+      <p:bgPr>
+        <a:solidFill>
+          <a:srgbClr val="F5F6F8"/>
+        </a:solidFill>
+        <a:effectLst/>
+      </p:bgPr>
+    </p:bg>
+    <p:spTree>
+      <p:nvGrpSpPr>
+        <p:cNvPr id="1" name=""/>
+        <p:cNvGrpSpPr/>
+        <p:nvPr/>
+      </p:nvGrpSpPr>
+      <p:grpSpPr>
+        <a:xfrm>
+          <a:off x="0" y="0"/>
+          <a:ext cx="0" cy="0"/>
+          <a:chOff x="0" y="0"/>
+          <a:chExt cx="0" cy="0"/>
+        </a:xfrm>
+      </p:grpSpPr>
+      <p:sp>
+        <p:nvSpPr>
+          <p:cNvPr id="2" name="Shape 0"/>
+          <p:cNvSpPr/>
+          <p:nvPr/>
+        </p:nvSpPr>
+        <p:spPr>
+          <a:xfrm>
+            <a:off x="0" y="0"/>
+            <a:ext cx="15124176" cy="1170432"/>
+          </a:xfrm>
+          <a:prstGeom prst="rect">
+            <a:avLst/>
+          </a:prstGeom>
+          <a:solidFill>
+            <a:srgbClr val="17365D"/>
+          </a:solidFill>
+          <a:ln w="12700">
+            <a:solidFill>
+              <a:srgbClr val="17365D"/>
+            </a:solidFill>
+            <a:prstDash val="solid"/>
+          </a:ln>
+        </p:spPr>
+        <p:txBody>
+          <a:bodyPr/>
+          <a:lstStyle/>
+          <a:p>
+            <a:endParaRPr/>
+          </a:p>
+        </p:txBody>
+      </p:sp>
+      <p:sp>
+        <p:nvSpPr>
+          <p:cNvPr id="3" name="Text 1"/>
+          <p:cNvSpPr/>
+          <p:nvPr/>
+        </p:nvSpPr>
+        <p:spPr>
+          <a:xfrm>
+            <a:off x="658368" y="237744"/>
+            <a:ext cx="10515600" cy="457200"/>
+          </a:xfrm>
+          <a:prstGeom prst="rect">
+            <a:avLst/>
+          </a:prstGeom>
+          <a:noFill/>
+          <a:ln/>
+        </p:spPr>
+        <p:txBody>
+          <a:bodyPr wrap="square" lIns="0" tIns="0" rIns="0" bIns="0" rtlCol="0" anchor="ctr"/>
+          <a:lstStyle/>
+          <a:p>
+            <a:pPr marL="0" indent="0">
+              <a:buNone/>
+            </a:pPr>
+            <a:r>
+              <a:rPr lang="en-US" sz="2600" b="1" dirty="0">
+                <a:solidFill>
+                  <a:srgbClr val="FFFFFF"/>
+                </a:solidFill>
+                <a:latin typeface="Arial" pitchFamily="34" charset="0"/>
+                <a:ea typeface="Arial" pitchFamily="34" charset="-122"/>
+                <a:cs typeface="Arial" pitchFamily="34" charset="-120"/>
+              </a:rPr>
+              <a:t>04 · Building façade &amp; main porch</a:t>
+            </a:r>
+            <a:endParaRPr lang="en-US" sz="2600" dirty="0"/>
+          </a:p>
+        </p:txBody>
+      </p:sp>
+      <p:sp>
+        <p:nvSpPr>
+          <p:cNvPr id="4" name="Text 2"/>
+          <p:cNvSpPr/>
+          <p:nvPr/>
+        </p:nvSpPr>
+        <p:spPr>
+          <a:xfrm>
+            <a:off x="658368" y="694944"/>
+            <a:ext cx="10515600" cy="292608"/>
+          </a:xfrm>
+          <a:prstGeom prst="rect">
+            <a:avLst/>
+          </a:prstGeom>
+          <a:noFill/>
+          <a:ln/>
+        </p:spPr>
+        <p:txBody>
+          <a:bodyPr wrap="square" lIns="0" tIns="0" rIns="0" bIns="0" rtlCol="0" anchor="ctr"/>
+          <a:lstStyle/>
+          <a:p>
+            <a:pPr marL="0" indent="0">
+              <a:buNone/>
+            </a:pPr>
+            <a:r>
+              <a:rPr lang="en-US" sz="1200" dirty="0">
+                <a:solidFill>
+                  <a:srgbClr val="AFC3DC"/>
+                </a:solidFill>
+                <a:latin typeface="Arial" pitchFamily="34" charset="0"/>
+                <a:ea typeface="Arial" pitchFamily="34" charset="-122"/>
+                <a:cs typeface="Arial" pitchFamily="34" charset="-120"/>
+              </a:rPr>
+              <a:t>Arrival experience — façade, porch, driveway, signage   ·   Regenta, Jamshedpur</a:t>
+            </a:r>
+            <a:endParaRPr lang="en-US" sz="1200" dirty="0"/>
+          </a:p>
+        </p:txBody>
+      </p:sp>
+      <p:sp>
+        <p:nvSpPr>
+          <p:cNvPr id="5" name="Text 3"/>
+          <p:cNvSpPr/>
+          <p:nvPr/>
+        </p:nvSpPr>
+        <p:spPr>
+          <a:xfrm>
+            <a:off x="11265408" y="329184"/>
+            <a:ext cx="3200400" cy="502920"/>
+          </a:xfrm>
+          <a:prstGeom prst="rect">
+            <a:avLst/>
+          </a:prstGeom>
+          <a:noFill/>
+          <a:ln/>
+        </p:spPr>
+        <p:txBody>
+          <a:bodyPr wrap="square" lIns="0" tIns="0" rIns="0" bIns="0" rtlCol="0" anchor="ctr"/>
+          <a:lstStyle/>
+          <a:p>
+            <a:pPr marL="0" indent="0" algn="r">
+              <a:buNone/>
+            </a:pPr>
+            <a:r>
+              <a:rPr lang="en-US" sz="1200" b="1" dirty="0">
+                <a:solidFill>
+                  <a:srgbClr val="FFFFFF"/>
+                </a:solidFill>
+                <a:latin typeface="Arial" pitchFamily="34" charset="0"/>
+                <a:ea typeface="Arial" pitchFamily="34" charset="-122"/>
+                <a:cs typeface="Arial" pitchFamily="34" charset="-120"/>
+              </a:rPr>
+              <a:t>ROHL-0002</a:t>
+            </a:r>
+            <a:endParaRPr lang="en-US" sz="1200" dirty="0"/>
+          </a:p>
+        </p:txBody>
+      </p:sp>
+      <p:sp>
+        <p:nvSpPr>
+          <p:cNvPr id="6" name="Shape 4"/>
+          <p:cNvSpPr/>
+          <p:nvPr/>
+        </p:nvSpPr>
+        <p:spPr>
+          <a:xfrm>
+            <a:off x="658368" y="1645920"/>
+            <a:ext cx="4419600" cy="475488"/>
+          </a:xfrm>
+          <a:prstGeom prst="rect">
+            <a:avLst/>
+          </a:prstGeom>
+          <a:solidFill>
+            <a:srgbClr val="C3C7CD"/>
+          </a:solidFill>
+          <a:ln w="12700">
+            <a:solidFill>
+              <a:srgbClr val="333333"/>
+            </a:solidFill>
+            <a:prstDash val="solid"/>
+          </a:ln>
+        </p:spPr>
+        <p:txBody>
+          <a:bodyPr/>
+          <a:lstStyle/>
+          <a:p>
+            <a:endParaRPr/>
+          </a:p>
+        </p:txBody>
+      </p:sp>
+      <p:sp>
+        <p:nvSpPr>
           <p:cNvPr id="7" name="Text 5"/>
           <p:cNvSpPr/>
           <p:nvPr/>
         </p:nvSpPr>
         <p:spPr>
           <a:xfrm>
-            <a:off x="1097280" y="5989320"/>
-            <a:ext cx="2201875" cy="256032"/>
-          </a:xfrm>
-          <a:prstGeom prst="rect">
-            <a:avLst/>
-          </a:prstGeom>
-          <a:noFill/>
-          <a:ln/>
-        </p:spPr>
-        <p:txBody>
-          <a:bodyPr wrap="square" lIns="0" tIns="0" rIns="0" bIns="0" rtlCol="0" anchor="ctr"/>
-          <a:lstStyle/>
-          <a:p>
-            <a:pPr marL="0" indent="0">
-              <a:buNone/>
-            </a:pPr>
-            <a:r>
-              <a:rPr lang="en-US" sz="900" b="1" kern="0" spc="70" dirty="0">
-                <a:solidFill>
-                  <a:srgbClr val="8FA9C6"/>
-                </a:solidFill>
-                <a:latin typeface="Arial" pitchFamily="34" charset="0"/>
-                <a:ea typeface="Arial" pitchFamily="34" charset="-122"/>
-                <a:cs typeface="Arial" pitchFamily="34" charset="-120"/>
-              </a:rPr>
-              <a:t>KEYS</a:t>
-            </a:r>
-            <a:endParaRPr lang="en-US" sz="900" dirty="0"/>
-          </a:p>
-        </p:txBody>
-      </p:sp>
-      <p:sp>
-        <p:nvSpPr>
-          <p:cNvPr id="8" name="Text 6"/>
-          <p:cNvSpPr/>
-          <p:nvPr/>
-        </p:nvSpPr>
-        <p:spPr>
-          <a:xfrm>
-            <a:off x="1097280" y="6254496"/>
-            <a:ext cx="2201875" cy="411480"/>
-          </a:xfrm>
-          <a:prstGeom prst="rect">
-            <a:avLst/>
-          </a:prstGeom>
-          <a:noFill/>
-          <a:ln/>
-        </p:spPr>
-        <p:txBody>
-          <a:bodyPr wrap="square" lIns="0" tIns="0" rIns="0" bIns="0" rtlCol="0" anchor="ctr"/>
-          <a:lstStyle/>
-          <a:p>
-            <a:pPr marL="0" indent="0">
-              <a:buNone/>
-            </a:pPr>
-            <a:r>
-              <a:rPr lang="en-US" sz="1600" b="1" dirty="0">
+            <a:off x="822960" y="1645920"/>
+            <a:ext cx="4090416" cy="475488"/>
+          </a:xfrm>
+          <a:prstGeom prst="rect">
+            <a:avLst/>
+          </a:prstGeom>
+          <a:noFill/>
+          <a:ln/>
+        </p:spPr>
+        <p:txBody>
+          <a:bodyPr wrap="square" lIns="0" tIns="0" rIns="0" bIns="0" rtlCol="0" anchor="ctr"/>
+          <a:lstStyle/>
+          <a:p>
+            <a:pPr marL="0" indent="0">
+              <a:buNone/>
+            </a:pPr>
+            <a:r>
+              <a:rPr lang="en-US" sz="1100" b="1" kern="0" spc="60" dirty="0">
                 <a:solidFill>
                   <a:srgbClr val="FFFFFF"/>
                 </a:solidFill>
@@ -2256,9 +3306,43 @@
                 <a:ea typeface="Arial" pitchFamily="34" charset="-122"/>
                 <a:cs typeface="Arial" pitchFamily="34" charset="-120"/>
               </a:rPr>
-              <a:t>63</a:t>
-            </a:r>
-            <a:endParaRPr lang="en-US" sz="1600" dirty="0"/>
+              <a:t>RENDERED — DESIGN INTENT</a:t>
+            </a:r>
+            <a:endParaRPr lang="en-US" sz="1100" dirty="0"/>
+          </a:p>
+        </p:txBody>
+      </p:sp>
+      <p:sp>
+        <p:nvSpPr>
+          <p:cNvPr id="8" name="Shape 6"/>
+          <p:cNvSpPr/>
+          <p:nvPr/>
+        </p:nvSpPr>
+        <p:spPr>
+          <a:xfrm>
+            <a:off x="658368" y="2212848"/>
+            <a:ext cx="4419600" cy="5605272"/>
+          </a:xfrm>
+          <a:prstGeom prst="roundRect">
+            <a:avLst>
+              <a:gd name="adj" fmla="val 1034"/>
+            </a:avLst>
+          </a:prstGeom>
+          <a:solidFill>
+            <a:srgbClr val="F0F1F3"/>
+          </a:solidFill>
+          <a:ln w="12700">
+            <a:solidFill>
+              <a:srgbClr val="D6DBE2"/>
+            </a:solidFill>
+            <a:prstDash val="solid"/>
+          </a:ln>
+        </p:spPr>
+        <p:txBody>
+          <a:bodyPr/>
+          <a:lstStyle/>
+          <a:p>
+            <a:endParaRPr/>
           </a:p>
         </p:txBody>
       </p:sp>
@@ -2270,63 +3354,95 @@
         </p:nvSpPr>
         <p:spPr>
           <a:xfrm>
-            <a:off x="3573475" y="5989320"/>
-            <a:ext cx="2201875" cy="256032"/>
-          </a:xfrm>
-          <a:prstGeom prst="rect">
-            <a:avLst/>
-          </a:prstGeom>
-          <a:noFill/>
-          <a:ln/>
-        </p:spPr>
-        <p:txBody>
-          <a:bodyPr wrap="square" lIns="0" tIns="0" rIns="0" bIns="0" rtlCol="0" anchor="ctr"/>
-          <a:lstStyle/>
-          <a:p>
-            <a:pPr marL="0" indent="0">
-              <a:buNone/>
-            </a:pPr>
-            <a:r>
-              <a:rPr lang="en-US" sz="900" b="1" kern="0" spc="70" dirty="0">
-                <a:solidFill>
-                  <a:srgbClr val="8FA9C6"/>
-                </a:solidFill>
-                <a:latin typeface="Arial" pitchFamily="34" charset="0"/>
-                <a:ea typeface="Arial" pitchFamily="34" charset="-122"/>
-                <a:cs typeface="Arial" pitchFamily="34" charset="-120"/>
-              </a:rPr>
-              <a:t>STAGE</a:t>
-            </a:r>
-            <a:endParaRPr lang="en-US" sz="900" dirty="0"/>
-          </a:p>
-        </p:txBody>
-      </p:sp>
-      <p:sp>
-        <p:nvSpPr>
-          <p:cNvPr id="10" name="Text 8"/>
-          <p:cNvSpPr/>
-          <p:nvPr/>
-        </p:nvSpPr>
-        <p:spPr>
-          <a:xfrm>
-            <a:off x="3573475" y="6254496"/>
-            <a:ext cx="2201875" cy="411480"/>
-          </a:xfrm>
-          <a:prstGeom prst="rect">
-            <a:avLst/>
-          </a:prstGeom>
-          <a:noFill/>
-          <a:ln/>
-        </p:spPr>
-        <p:txBody>
-          <a:bodyPr wrap="square" lIns="0" tIns="0" rIns="0" bIns="0" rtlCol="0" anchor="ctr"/>
-          <a:lstStyle/>
-          <a:p>
-            <a:pPr marL="0" indent="0">
-              <a:buNone/>
-            </a:pPr>
-            <a:r>
-              <a:rPr lang="en-US" sz="1600" b="1" dirty="0">
+            <a:off x="932688" y="4709160"/>
+            <a:ext cx="3870960" cy="457200"/>
+          </a:xfrm>
+          <a:prstGeom prst="rect">
+            <a:avLst/>
+          </a:prstGeom>
+          <a:noFill/>
+          <a:ln/>
+        </p:spPr>
+        <p:txBody>
+          <a:bodyPr wrap="square" lIns="0" tIns="0" rIns="0" bIns="0" rtlCol="0" anchor="ctr"/>
+          <a:lstStyle/>
+          <a:p>
+            <a:pPr marL="0" indent="0" algn="ctr">
+              <a:buNone/>
+            </a:pPr>
+            <a:r>
+              <a:rPr lang="en-US" sz="1200" i="1" dirty="0">
+                <a:solidFill>
+                  <a:srgbClr val="9AA0A6"/>
+                </a:solidFill>
+                <a:latin typeface="Arial" pitchFamily="34" charset="0"/>
+                <a:ea typeface="Arial" pitchFamily="34" charset="-122"/>
+                <a:cs typeface="Arial" pitchFamily="34" charset="-120"/>
+              </a:rPr>
+              <a:t>Photograph awaited</a:t>
+            </a:r>
+            <a:endParaRPr lang="en-US" sz="1200" dirty="0"/>
+          </a:p>
+        </p:txBody>
+      </p:sp>
+      <p:sp>
+        <p:nvSpPr>
+          <p:cNvPr id="10" name="Shape 8"/>
+          <p:cNvSpPr/>
+          <p:nvPr/>
+        </p:nvSpPr>
+        <p:spPr>
+          <a:xfrm>
+            <a:off x="5352288" y="1645920"/>
+            <a:ext cx="4419600" cy="475488"/>
+          </a:xfrm>
+          <a:prstGeom prst="rect">
+            <a:avLst/>
+          </a:prstGeom>
+          <a:solidFill>
+            <a:srgbClr val="C3C7CD"/>
+          </a:solidFill>
+          <a:ln w="12700">
+            <a:solidFill>
+              <a:srgbClr val="333333"/>
+            </a:solidFill>
+            <a:prstDash val="solid"/>
+          </a:ln>
+        </p:spPr>
+        <p:txBody>
+          <a:bodyPr/>
+          <a:lstStyle/>
+          <a:p>
+            <a:endParaRPr/>
+          </a:p>
+        </p:txBody>
+      </p:sp>
+      <p:sp>
+        <p:nvSpPr>
+          <p:cNvPr id="11" name="Text 9"/>
+          <p:cNvSpPr/>
+          <p:nvPr/>
+        </p:nvSpPr>
+        <p:spPr>
+          <a:xfrm>
+            <a:off x="5516880" y="1645920"/>
+            <a:ext cx="4090416" cy="475488"/>
+          </a:xfrm>
+          <a:prstGeom prst="rect">
+            <a:avLst/>
+          </a:prstGeom>
+          <a:noFill/>
+          <a:ln/>
+        </p:spPr>
+        <p:txBody>
+          <a:bodyPr wrap="square" lIns="0" tIns="0" rIns="0" bIns="0" rtlCol="0" anchor="ctr"/>
+          <a:lstStyle/>
+          <a:p>
+            <a:pPr marL="0" indent="0">
+              <a:buNone/>
+            </a:pPr>
+            <a:r>
+              <a:rPr lang="en-US" sz="1100" b="1" kern="0" spc="60" dirty="0">
                 <a:solidFill>
                   <a:srgbClr val="FFFFFF"/>
                 </a:solidFill>
@@ -2334,77 +3450,143 @@
                 <a:ea typeface="Arial" pitchFamily="34" charset="-122"/>
                 <a:cs typeface="Arial" pitchFamily="34" charset="-120"/>
               </a:rPr>
-              <a:t>Construction</a:t>
-            </a:r>
-            <a:endParaRPr lang="en-US" sz="1600" dirty="0"/>
-          </a:p>
-        </p:txBody>
-      </p:sp>
-      <p:sp>
-        <p:nvSpPr>
-          <p:cNvPr id="11" name="Text 9"/>
-          <p:cNvSpPr/>
-          <p:nvPr/>
-        </p:nvSpPr>
-        <p:spPr>
-          <a:xfrm>
-            <a:off x="6049670" y="5989320"/>
-            <a:ext cx="2201875" cy="256032"/>
-          </a:xfrm>
-          <a:prstGeom prst="rect">
-            <a:avLst/>
-          </a:prstGeom>
-          <a:noFill/>
-          <a:ln/>
-        </p:spPr>
-        <p:txBody>
-          <a:bodyPr wrap="square" lIns="0" tIns="0" rIns="0" bIns="0" rtlCol="0" anchor="ctr"/>
-          <a:lstStyle/>
-          <a:p>
-            <a:pPr marL="0" indent="0">
-              <a:buNone/>
-            </a:pPr>
-            <a:r>
-              <a:rPr lang="en-US" sz="900" b="1" kern="0" spc="70" dirty="0">
-                <a:solidFill>
-                  <a:srgbClr val="8FA9C6"/>
-                </a:solidFill>
-                <a:latin typeface="Arial" pitchFamily="34" charset="0"/>
-                <a:ea typeface="Arial" pitchFamily="34" charset="-122"/>
-                <a:cs typeface="Arial" pitchFamily="34" charset="-120"/>
-              </a:rPr>
-              <a:t>RISK</a:t>
-            </a:r>
-            <a:endParaRPr lang="en-US" sz="900" dirty="0"/>
-          </a:p>
-        </p:txBody>
-      </p:sp>
-      <p:sp>
-        <p:nvSpPr>
-          <p:cNvPr id="12" name="Text 10"/>
-          <p:cNvSpPr/>
-          <p:nvPr/>
-        </p:nvSpPr>
-        <p:spPr>
-          <a:xfrm>
-            <a:off x="6049670" y="6254496"/>
-            <a:ext cx="2201875" cy="411480"/>
-          </a:xfrm>
-          <a:prstGeom prst="rect">
-            <a:avLst/>
-          </a:prstGeom>
-          <a:noFill/>
-          <a:ln/>
-        </p:spPr>
-        <p:txBody>
-          <a:bodyPr wrap="square" lIns="0" tIns="0" rIns="0" bIns="0" rtlCol="0" anchor="ctr"/>
-          <a:lstStyle/>
-          <a:p>
-            <a:pPr marL="0" indent="0">
-              <a:buNone/>
-            </a:pPr>
-            <a:r>
-              <a:rPr lang="en-US" sz="1600" b="1" dirty="0">
+              <a:t>PREVIOUS MONTH</a:t>
+            </a:r>
+            <a:endParaRPr lang="en-US" sz="1100" dirty="0"/>
+          </a:p>
+        </p:txBody>
+      </p:sp>
+      <p:sp>
+        <p:nvSpPr>
+          <p:cNvPr id="12" name="Shape 10"/>
+          <p:cNvSpPr/>
+          <p:nvPr/>
+        </p:nvSpPr>
+        <p:spPr>
+          <a:xfrm>
+            <a:off x="5352288" y="2212848"/>
+            <a:ext cx="4419600" cy="5605272"/>
+          </a:xfrm>
+          <a:prstGeom prst="roundRect">
+            <a:avLst>
+              <a:gd name="adj" fmla="val 1034"/>
+            </a:avLst>
+          </a:prstGeom>
+          <a:solidFill>
+            <a:srgbClr val="F0F1F3"/>
+          </a:solidFill>
+          <a:ln w="12700">
+            <a:solidFill>
+              <a:srgbClr val="D6DBE2"/>
+            </a:solidFill>
+            <a:prstDash val="solid"/>
+          </a:ln>
+        </p:spPr>
+        <p:txBody>
+          <a:bodyPr/>
+          <a:lstStyle/>
+          <a:p>
+            <a:endParaRPr/>
+          </a:p>
+        </p:txBody>
+      </p:sp>
+      <p:sp>
+        <p:nvSpPr>
+          <p:cNvPr id="13" name="Text 11"/>
+          <p:cNvSpPr/>
+          <p:nvPr/>
+        </p:nvSpPr>
+        <p:spPr>
+          <a:xfrm>
+            <a:off x="5626608" y="4709160"/>
+            <a:ext cx="3870960" cy="457200"/>
+          </a:xfrm>
+          <a:prstGeom prst="rect">
+            <a:avLst/>
+          </a:prstGeom>
+          <a:noFill/>
+          <a:ln/>
+        </p:spPr>
+        <p:txBody>
+          <a:bodyPr wrap="square" lIns="0" tIns="0" rIns="0" bIns="0" rtlCol="0" anchor="ctr"/>
+          <a:lstStyle/>
+          <a:p>
+            <a:pPr marL="0" indent="0" algn="ctr">
+              <a:buNone/>
+            </a:pPr>
+            <a:r>
+              <a:rPr lang="en-US" sz="1200" i="1" dirty="0">
+                <a:solidFill>
+                  <a:srgbClr val="9AA0A6"/>
+                </a:solidFill>
+                <a:latin typeface="Arial" pitchFamily="34" charset="0"/>
+                <a:ea typeface="Arial" pitchFamily="34" charset="-122"/>
+                <a:cs typeface="Arial" pitchFamily="34" charset="-120"/>
+              </a:rPr>
+              <a:t>Photograph awaited</a:t>
+            </a:r>
+            <a:endParaRPr lang="en-US" sz="1200" dirty="0"/>
+          </a:p>
+        </p:txBody>
+      </p:sp>
+      <p:sp>
+        <p:nvSpPr>
+          <p:cNvPr id="14" name="Shape 12"/>
+          <p:cNvSpPr/>
+          <p:nvPr/>
+        </p:nvSpPr>
+        <p:spPr>
+          <a:xfrm>
+            <a:off x="10046208" y="1645920"/>
+            <a:ext cx="4419600" cy="475488"/>
+          </a:xfrm>
+          <a:prstGeom prst="rect">
+            <a:avLst/>
+          </a:prstGeom>
+          <a:solidFill>
+            <a:srgbClr val="C3C7CD"/>
+          </a:solidFill>
+          <a:ln w="12700">
+            <a:solidFill>
+              <a:srgbClr val="333333"/>
+            </a:solidFill>
+            <a:prstDash val="solid"/>
+          </a:ln>
+        </p:spPr>
+        <p:txBody>
+          <a:bodyPr/>
+          <a:lstStyle/>
+          <a:p>
+            <a:endParaRPr/>
+          </a:p>
+        </p:txBody>
+      </p:sp>
+      <p:sp>
+        <p:nvSpPr>
+          <p:cNvPr id="15" name="Text 13"/>
+          <p:cNvSpPr/>
+          <p:nvPr/>
+        </p:nvSpPr>
+        <p:spPr>
+          <a:xfrm>
+            <a:off x="10210800" y="1645920"/>
+            <a:ext cx="4090416" cy="475488"/>
+          </a:xfrm>
+          <a:prstGeom prst="rect">
+            <a:avLst/>
+          </a:prstGeom>
+          <a:noFill/>
+          <a:ln/>
+        </p:spPr>
+        <p:txBody>
+          <a:bodyPr wrap="square" lIns="0" tIns="0" rIns="0" bIns="0" rtlCol="0" anchor="ctr"/>
+          <a:lstStyle/>
+          <a:p>
+            <a:pPr marL="0" indent="0">
+              <a:buNone/>
+            </a:pPr>
+            <a:r>
+              <a:rPr lang="en-US" sz="1100" b="1" kern="0" spc="60" dirty="0">
                 <a:solidFill>
                   <a:srgbClr val="FFFFFF"/>
                 </a:solidFill>
@@ -2412,77 +3594,336 @@
                 <a:ea typeface="Arial" pitchFamily="34" charset="-122"/>
                 <a:cs typeface="Arial" pitchFamily="34" charset="-120"/>
               </a:rPr>
-              <a:t>Medium</a:t>
-            </a:r>
-            <a:endParaRPr lang="en-US" sz="1600" dirty="0"/>
-          </a:p>
-        </p:txBody>
-      </p:sp>
-      <p:sp>
-        <p:nvSpPr>
-          <p:cNvPr id="13" name="Text 11"/>
-          <p:cNvSpPr/>
-          <p:nvPr/>
-        </p:nvSpPr>
-        <p:spPr>
-          <a:xfrm>
-            <a:off x="8525866" y="5989320"/>
-            <a:ext cx="2201875" cy="256032"/>
-          </a:xfrm>
-          <a:prstGeom prst="rect">
-            <a:avLst/>
-          </a:prstGeom>
-          <a:noFill/>
-          <a:ln/>
-        </p:spPr>
-        <p:txBody>
-          <a:bodyPr wrap="square" lIns="0" tIns="0" rIns="0" bIns="0" rtlCol="0" anchor="ctr"/>
-          <a:lstStyle/>
-          <a:p>
-            <a:pPr marL="0" indent="0">
-              <a:buNone/>
-            </a:pPr>
-            <a:r>
-              <a:rPr lang="en-US" sz="900" b="1" kern="0" spc="70" dirty="0">
-                <a:solidFill>
-                  <a:srgbClr val="8FA9C6"/>
-                </a:solidFill>
-                <a:latin typeface="Arial" pitchFamily="34" charset="0"/>
-                <a:ea typeface="Arial" pitchFamily="34" charset="-122"/>
-                <a:cs typeface="Arial" pitchFamily="34" charset="-120"/>
-              </a:rPr>
-              <a:t>COMPLETION</a:t>
-            </a:r>
-            <a:endParaRPr lang="en-US" sz="900" dirty="0"/>
-          </a:p>
-        </p:txBody>
-      </p:sp>
-      <p:sp>
-        <p:nvSpPr>
-          <p:cNvPr id="14" name="Text 12"/>
-          <p:cNvSpPr/>
-          <p:nvPr/>
-        </p:nvSpPr>
-        <p:spPr>
-          <a:xfrm>
-            <a:off x="8525866" y="6254496"/>
-            <a:ext cx="2201875" cy="411480"/>
-          </a:xfrm>
-          <a:prstGeom prst="rect">
-            <a:avLst/>
-          </a:prstGeom>
-          <a:noFill/>
-          <a:ln/>
-        </p:spPr>
-        <p:txBody>
-          <a:bodyPr wrap="square" lIns="0" tIns="0" rIns="0" bIns="0" rtlCol="0" anchor="ctr"/>
-          <a:lstStyle/>
-          <a:p>
-            <a:pPr marL="0" indent="0">
-              <a:buNone/>
-            </a:pPr>
-            <a:r>
-              <a:rPr lang="en-US" sz="1600" b="1" dirty="0">
+              <a:t>CURRENT MONTH</a:t>
+            </a:r>
+            <a:endParaRPr lang="en-US" sz="1100" dirty="0"/>
+          </a:p>
+        </p:txBody>
+      </p:sp>
+      <p:sp>
+        <p:nvSpPr>
+          <p:cNvPr id="16" name="Shape 14"/>
+          <p:cNvSpPr/>
+          <p:nvPr/>
+        </p:nvSpPr>
+        <p:spPr>
+          <a:xfrm>
+            <a:off x="10046208" y="2212848"/>
+            <a:ext cx="4419600" cy="5605272"/>
+          </a:xfrm>
+          <a:prstGeom prst="roundRect">
+            <a:avLst>
+              <a:gd name="adj" fmla="val 1034"/>
+            </a:avLst>
+          </a:prstGeom>
+          <a:solidFill>
+            <a:srgbClr val="F0F1F3"/>
+          </a:solidFill>
+          <a:ln w="12700">
+            <a:solidFill>
+              <a:srgbClr val="D6DBE2"/>
+            </a:solidFill>
+            <a:prstDash val="solid"/>
+          </a:ln>
+        </p:spPr>
+        <p:txBody>
+          <a:bodyPr/>
+          <a:lstStyle/>
+          <a:p>
+            <a:endParaRPr/>
+          </a:p>
+        </p:txBody>
+      </p:sp>
+      <p:sp>
+        <p:nvSpPr>
+          <p:cNvPr id="17" name="Text 15"/>
+          <p:cNvSpPr/>
+          <p:nvPr/>
+        </p:nvSpPr>
+        <p:spPr>
+          <a:xfrm>
+            <a:off x="10320528" y="4709160"/>
+            <a:ext cx="3870960" cy="457200"/>
+          </a:xfrm>
+          <a:prstGeom prst="rect">
+            <a:avLst/>
+          </a:prstGeom>
+          <a:noFill/>
+          <a:ln/>
+        </p:spPr>
+        <p:txBody>
+          <a:bodyPr wrap="square" lIns="0" tIns="0" rIns="0" bIns="0" rtlCol="0" anchor="ctr"/>
+          <a:lstStyle/>
+          <a:p>
+            <a:pPr marL="0" indent="0" algn="ctr">
+              <a:buNone/>
+            </a:pPr>
+            <a:r>
+              <a:rPr lang="en-US" sz="1200" i="1" dirty="0">
+                <a:solidFill>
+                  <a:srgbClr val="9AA0A6"/>
+                </a:solidFill>
+                <a:latin typeface="Arial" pitchFamily="34" charset="0"/>
+                <a:ea typeface="Arial" pitchFamily="34" charset="-122"/>
+                <a:cs typeface="Arial" pitchFamily="34" charset="-120"/>
+              </a:rPr>
+              <a:t>Photograph awaited</a:t>
+            </a:r>
+            <a:endParaRPr lang="en-US" sz="1200" dirty="0"/>
+          </a:p>
+        </p:txBody>
+      </p:sp>
+      <p:sp>
+        <p:nvSpPr>
+          <p:cNvPr id="18" name="Shape 16"/>
+          <p:cNvSpPr/>
+          <p:nvPr/>
+        </p:nvSpPr>
+        <p:spPr>
+          <a:xfrm>
+            <a:off x="658368" y="7973568"/>
+            <a:ext cx="4694530" cy="1463040"/>
+          </a:xfrm>
+          <a:prstGeom prst="roundRect">
+            <a:avLst>
+              <a:gd name="adj" fmla="val 2439"/>
+            </a:avLst>
+          </a:prstGeom>
+          <a:solidFill>
+            <a:srgbClr val="FFFFFF"/>
+          </a:solidFill>
+          <a:ln w="12700">
+            <a:solidFill>
+              <a:srgbClr val="D6DBE2"/>
+            </a:solidFill>
+            <a:prstDash val="solid"/>
+          </a:ln>
+        </p:spPr>
+        <p:txBody>
+          <a:bodyPr/>
+          <a:lstStyle/>
+          <a:p>
+            <a:endParaRPr/>
+          </a:p>
+        </p:txBody>
+      </p:sp>
+      <p:sp>
+        <p:nvSpPr>
+          <p:cNvPr id="19" name="Shape 17"/>
+          <p:cNvSpPr/>
+          <p:nvPr/>
+        </p:nvSpPr>
+        <p:spPr>
+          <a:xfrm>
+            <a:off x="658368" y="7973568"/>
+            <a:ext cx="4694530" cy="402336"/>
+          </a:xfrm>
+          <a:prstGeom prst="rect">
+            <a:avLst/>
+          </a:prstGeom>
+          <a:solidFill>
+            <a:srgbClr val="2F75B5"/>
+          </a:solidFill>
+          <a:ln w="12700">
+            <a:solidFill>
+              <a:srgbClr val="333333"/>
+            </a:solidFill>
+            <a:prstDash val="solid"/>
+          </a:ln>
+        </p:spPr>
+        <p:txBody>
+          <a:bodyPr/>
+          <a:lstStyle/>
+          <a:p>
+            <a:endParaRPr/>
+          </a:p>
+        </p:txBody>
+      </p:sp>
+      <p:sp>
+        <p:nvSpPr>
+          <p:cNvPr id="20" name="Text 18"/>
+          <p:cNvSpPr/>
+          <p:nvPr/>
+        </p:nvSpPr>
+        <p:spPr>
+          <a:xfrm>
+            <a:off x="822960" y="7973568"/>
+            <a:ext cx="4365346" cy="402336"/>
+          </a:xfrm>
+          <a:prstGeom prst="rect">
+            <a:avLst/>
+          </a:prstGeom>
+          <a:noFill/>
+          <a:ln/>
+        </p:spPr>
+        <p:txBody>
+          <a:bodyPr wrap="square" lIns="0" tIns="0" rIns="0" bIns="0" rtlCol="0" anchor="ctr"/>
+          <a:lstStyle/>
+          <a:p>
+            <a:r>
+              <a:t>SITE VIDEO</a:t>
+            </a:r>
+          </a:p>
+        </p:txBody>
+      </p:sp>
+      <p:sp>
+        <p:nvSpPr>
+          <p:cNvPr id="21" name="Text 19"/>
+          <p:cNvSpPr/>
+          <p:nvPr/>
+        </p:nvSpPr>
+        <p:spPr>
+          <a:xfrm>
+            <a:off x="859536" y="8540496"/>
+            <a:ext cx="1691640" cy="329184"/>
+          </a:xfrm>
+          <a:prstGeom prst="rect">
+            <a:avLst/>
+          </a:prstGeom>
+          <a:noFill/>
+          <a:ln/>
+        </p:spPr>
+        <p:txBody>
+          <a:bodyPr wrap="square" lIns="0" tIns="0" rIns="0" bIns="0" rtlCol="0" anchor="ctr"/>
+          <a:lstStyle/>
+          <a:p>
+            <a:r>
+              <a:t>Site walkthrough</a:t>
+            </a:r>
+          </a:p>
+        </p:txBody>
+      </p:sp>
+      <p:sp>
+        <p:nvSpPr>
+          <p:cNvPr id="22" name="Text 20"/>
+          <p:cNvSpPr/>
+          <p:nvPr/>
+        </p:nvSpPr>
+        <p:spPr>
+          <a:xfrm>
+            <a:off x="2624328" y="8540496"/>
+            <a:ext cx="2499970" cy="329184"/>
+          </a:xfrm>
+          <a:prstGeom prst="rect">
+            <a:avLst/>
+          </a:prstGeom>
+          <a:noFill/>
+          <a:ln/>
+        </p:spPr>
+        <p:txBody>
+          <a:bodyPr wrap="square" lIns="0" tIns="0" rIns="0" bIns="0" rtlCol="0" anchor="ctr"/>
+          <a:lstStyle/>
+          <a:p>
+            <a:pPr marL="0" indent="0">
+              <a:buNone/>
+            </a:pPr>
+            <a:r>
+              <a:rPr lang="en-US" sz="1000" dirty="0">
+                <a:solidFill>
+                  <a:srgbClr val="9AA0A6"/>
+                </a:solidFill>
+                <a:latin typeface="Arial" pitchFamily="34" charset="0"/>
+                <a:ea typeface="Arial" pitchFamily="34" charset="-122"/>
+                <a:cs typeface="Arial" pitchFamily="34" charset="-120"/>
+              </a:rPr>
+              <a:t>—</a:t>
+            </a:r>
+            <a:endParaRPr lang="en-US" sz="1000" dirty="0"/>
+          </a:p>
+        </p:txBody>
+      </p:sp>
+      <p:sp>
+        <p:nvSpPr>
+          <p:cNvPr id="27" name="Shape 25"/>
+          <p:cNvSpPr/>
+          <p:nvPr/>
+        </p:nvSpPr>
+        <p:spPr>
+          <a:xfrm>
+            <a:off x="5627218" y="7973568"/>
+            <a:ext cx="8838590" cy="1463040"/>
+          </a:xfrm>
+          <a:prstGeom prst="roundRect">
+            <a:avLst>
+              <a:gd name="adj" fmla="val 2439"/>
+            </a:avLst>
+          </a:prstGeom>
+          <a:solidFill>
+            <a:srgbClr val="FFFFFF"/>
+          </a:solidFill>
+          <a:ln w="12700">
+            <a:solidFill>
+              <a:srgbClr val="D6DBE2"/>
+            </a:solidFill>
+            <a:prstDash val="solid"/>
+          </a:ln>
+        </p:spPr>
+        <p:txBody>
+          <a:bodyPr/>
+          <a:lstStyle/>
+          <a:p>
+            <a:endParaRPr/>
+          </a:p>
+        </p:txBody>
+      </p:sp>
+      <p:sp>
+        <p:nvSpPr>
+          <p:cNvPr id="28" name="Shape 26"/>
+          <p:cNvSpPr/>
+          <p:nvPr/>
+        </p:nvSpPr>
+        <p:spPr>
+          <a:xfrm>
+            <a:off x="5627218" y="7973568"/>
+            <a:ext cx="8838590" cy="402336"/>
+          </a:xfrm>
+          <a:prstGeom prst="rect">
+            <a:avLst/>
+          </a:prstGeom>
+          <a:solidFill>
+            <a:srgbClr val="17365D"/>
+          </a:solidFill>
+          <a:ln w="12700">
+            <a:solidFill>
+              <a:srgbClr val="333333"/>
+            </a:solidFill>
+            <a:prstDash val="solid"/>
+          </a:ln>
+        </p:spPr>
+        <p:txBody>
+          <a:bodyPr/>
+          <a:lstStyle/>
+          <a:p>
+            <a:endParaRPr/>
+          </a:p>
+        </p:txBody>
+      </p:sp>
+      <p:sp>
+        <p:nvSpPr>
+          <p:cNvPr id="29" name="Text 27"/>
+          <p:cNvSpPr/>
+          <p:nvPr/>
+        </p:nvSpPr>
+        <p:spPr>
+          <a:xfrm>
+            <a:off x="5791810" y="7973568"/>
+            <a:ext cx="8509406" cy="402336"/>
+          </a:xfrm>
+          <a:prstGeom prst="rect">
+            <a:avLst/>
+          </a:prstGeom>
+          <a:noFill/>
+          <a:ln/>
+        </p:spPr>
+        <p:txBody>
+          <a:bodyPr wrap="square" lIns="0" tIns="0" rIns="0" bIns="0" rtlCol="0" anchor="ctr"/>
+          <a:lstStyle/>
+          <a:p>
+            <a:pPr marL="0" indent="0">
+              <a:buNone/>
+            </a:pPr>
+            <a:r>
+              <a:rPr lang="en-US" sz="1050" b="1" kern="0" spc="70" dirty="0">
                 <a:solidFill>
                   <a:srgbClr val="FFFFFF"/>
                 </a:solidFill>
@@ -2490,321 +3931,220 @@
                 <a:ea typeface="Arial" pitchFamily="34" charset="-122"/>
                 <a:cs typeface="Arial" pitchFamily="34" charset="-120"/>
               </a:rPr>
-              <a:t>50%</a:t>
-            </a:r>
-            <a:endParaRPr lang="en-US" sz="1600" dirty="0"/>
-          </a:p>
-        </p:txBody>
-      </p:sp>
-      <p:sp>
-        <p:nvSpPr>
-          <p:cNvPr id="15" name="Text 13"/>
-          <p:cNvSpPr/>
-          <p:nvPr/>
-        </p:nvSpPr>
-        <p:spPr>
-          <a:xfrm>
-            <a:off x="11002061" y="5989320"/>
-            <a:ext cx="2201875" cy="256032"/>
-          </a:xfrm>
-          <a:prstGeom prst="rect">
-            <a:avLst/>
-          </a:prstGeom>
-          <a:noFill/>
-          <a:ln/>
-        </p:spPr>
-        <p:txBody>
-          <a:bodyPr wrap="square" lIns="0" tIns="0" rIns="0" bIns="0" rtlCol="0" anchor="ctr"/>
-          <a:lstStyle/>
-          <a:p>
-            <a:pPr marL="0" indent="0">
-              <a:buNone/>
-            </a:pPr>
-            <a:r>
-              <a:rPr lang="en-US" sz="900" b="1" kern="0" spc="70" dirty="0">
-                <a:solidFill>
-                  <a:srgbClr val="8FA9C6"/>
-                </a:solidFill>
-                <a:latin typeface="Arial" pitchFamily="34" charset="0"/>
-                <a:ea typeface="Arial" pitchFamily="34" charset="-122"/>
-                <a:cs typeface="Arial" pitchFamily="34" charset="-120"/>
-              </a:rPr>
-              <a:t>OPENING</a:t>
-            </a:r>
-            <a:endParaRPr lang="en-US" sz="900" dirty="0"/>
-          </a:p>
-        </p:txBody>
-      </p:sp>
-      <p:sp>
-        <p:nvSpPr>
-          <p:cNvPr id="16" name="Text 14"/>
-          <p:cNvSpPr/>
-          <p:nvPr/>
-        </p:nvSpPr>
-        <p:spPr>
-          <a:xfrm>
-            <a:off x="11002061" y="6254496"/>
-            <a:ext cx="2201875" cy="411480"/>
-          </a:xfrm>
-          <a:prstGeom prst="rect">
-            <a:avLst/>
-          </a:prstGeom>
-          <a:noFill/>
-          <a:ln/>
-        </p:spPr>
-        <p:txBody>
-          <a:bodyPr wrap="square" lIns="0" tIns="0" rIns="0" bIns="0" rtlCol="0" anchor="ctr"/>
-          <a:lstStyle/>
-          <a:p>
-            <a:pPr marL="0" indent="0">
-              <a:buNone/>
-            </a:pPr>
-            <a:r>
-              <a:rPr lang="en-US" sz="1600" b="1" dirty="0">
-                <a:solidFill>
-                  <a:srgbClr val="FFFFFF"/>
-                </a:solidFill>
-                <a:latin typeface="Arial" pitchFamily="34" charset="0"/>
-                <a:ea typeface="Arial" pitchFamily="34" charset="-122"/>
-                <a:cs typeface="Arial" pitchFamily="34" charset="-120"/>
-              </a:rPr>
-              <a:t>27-Mar-2028</a:t>
-            </a:r>
-            <a:endParaRPr lang="en-US" sz="1600" dirty="0"/>
-          </a:p>
-        </p:txBody>
-      </p:sp>
-      <p:sp>
-        <p:nvSpPr>
-          <p:cNvPr id="17" name="Text 15"/>
-          <p:cNvSpPr/>
-          <p:nvPr/>
-        </p:nvSpPr>
-        <p:spPr>
-          <a:xfrm>
-            <a:off x="1097280" y="7955280"/>
-            <a:ext cx="4114800" cy="347472"/>
-          </a:xfrm>
-          <a:prstGeom prst="rect">
-            <a:avLst/>
-          </a:prstGeom>
-          <a:noFill/>
-          <a:ln/>
-        </p:spPr>
-        <p:txBody>
-          <a:bodyPr wrap="square" lIns="0" tIns="0" rIns="0" bIns="0" rtlCol="0" anchor="ctr"/>
-          <a:lstStyle/>
-          <a:p>
-            <a:pPr marL="0" indent="0">
-              <a:buNone/>
-            </a:pPr>
-            <a:r>
-              <a:rPr lang="en-US" sz="1150" dirty="0">
-                <a:solidFill>
-                  <a:srgbClr val="AFC3DC"/>
-                </a:solidFill>
-                <a:latin typeface="Arial" pitchFamily="34" charset="0"/>
-                <a:ea typeface="Arial" pitchFamily="34" charset="-122"/>
-                <a:cs typeface="Arial" pitchFamily="34" charset="-120"/>
-              </a:rPr>
-              <a:t>01  Project overview &amp; contact details</a:t>
-            </a:r>
-            <a:endParaRPr lang="en-US" sz="1150" dirty="0"/>
-          </a:p>
-        </p:txBody>
-      </p:sp>
-      <p:sp>
-        <p:nvSpPr>
-          <p:cNvPr id="18" name="Text 16"/>
-          <p:cNvSpPr/>
-          <p:nvPr/>
-        </p:nvSpPr>
-        <p:spPr>
-          <a:xfrm>
-            <a:off x="5303520" y="7955280"/>
-            <a:ext cx="4114800" cy="347472"/>
-          </a:xfrm>
-          <a:prstGeom prst="rect">
-            <a:avLst/>
-          </a:prstGeom>
-          <a:noFill/>
-          <a:ln/>
-        </p:spPr>
-        <p:txBody>
-          <a:bodyPr wrap="square" lIns="0" tIns="0" rIns="0" bIns="0" rtlCol="0" anchor="ctr"/>
-          <a:lstStyle/>
-          <a:p>
-            <a:pPr marL="0" indent="0">
-              <a:buNone/>
-            </a:pPr>
-            <a:r>
-              <a:rPr lang="en-US" sz="1150" dirty="0">
-                <a:solidFill>
-                  <a:srgbClr val="AFC3DC"/>
-                </a:solidFill>
-                <a:latin typeface="Arial" pitchFamily="34" charset="0"/>
-                <a:ea typeface="Arial" pitchFamily="34" charset="-122"/>
-                <a:cs typeface="Arial" pitchFamily="34" charset="-120"/>
-              </a:rPr>
-              <a:t>02  Property details — floor wise</a:t>
-            </a:r>
-            <a:endParaRPr lang="en-US" sz="1150" dirty="0"/>
-          </a:p>
-        </p:txBody>
-      </p:sp>
-      <p:sp>
-        <p:nvSpPr>
-          <p:cNvPr id="19" name="Text 17"/>
-          <p:cNvSpPr/>
-          <p:nvPr/>
-        </p:nvSpPr>
-        <p:spPr>
-          <a:xfrm>
-            <a:off x="9509760" y="7955280"/>
-            <a:ext cx="4114800" cy="347472"/>
-          </a:xfrm>
-          <a:prstGeom prst="rect">
-            <a:avLst/>
-          </a:prstGeom>
-          <a:noFill/>
-          <a:ln/>
-        </p:spPr>
-        <p:txBody>
-          <a:bodyPr wrap="square" lIns="0" tIns="0" rIns="0" bIns="0" rtlCol="0" anchor="ctr"/>
-          <a:lstStyle/>
-          <a:p>
-            <a:pPr marL="0" indent="0">
-              <a:buNone/>
-            </a:pPr>
-            <a:r>
-              <a:rPr lang="en-US" sz="1150" dirty="0">
-                <a:solidFill>
-                  <a:srgbClr val="AFC3DC"/>
-                </a:solidFill>
-                <a:latin typeface="Arial" pitchFamily="34" charset="0"/>
-                <a:ea typeface="Arial" pitchFamily="34" charset="-122"/>
-                <a:cs typeface="Arial" pitchFamily="34" charset="-120"/>
-              </a:rPr>
-              <a:t>03  Internal memorandum, drawings &amp; renderings</a:t>
-            </a:r>
-            <a:endParaRPr lang="en-US" sz="1150" dirty="0"/>
-          </a:p>
-        </p:txBody>
-      </p:sp>
-      <p:sp>
-        <p:nvSpPr>
-          <p:cNvPr id="20" name="Text 18"/>
-          <p:cNvSpPr/>
-          <p:nvPr/>
-        </p:nvSpPr>
-        <p:spPr>
-          <a:xfrm>
-            <a:off x="1097280" y="8366760"/>
-            <a:ext cx="4114800" cy="347472"/>
-          </a:xfrm>
-          <a:prstGeom prst="rect">
-            <a:avLst/>
-          </a:prstGeom>
-          <a:noFill/>
-          <a:ln/>
-        </p:spPr>
-        <p:txBody>
-          <a:bodyPr wrap="square" lIns="0" tIns="0" rIns="0" bIns="0" rtlCol="0" anchor="ctr"/>
-          <a:lstStyle/>
-          <a:p>
-            <a:pPr marL="0" indent="0">
-              <a:buNone/>
-            </a:pPr>
-            <a:r>
-              <a:rPr lang="en-US" sz="1150" dirty="0">
-                <a:solidFill>
-                  <a:srgbClr val="AFC3DC"/>
-                </a:solidFill>
-                <a:latin typeface="Arial" pitchFamily="34" charset="0"/>
-                <a:ea typeface="Arial" pitchFamily="34" charset="-122"/>
-                <a:cs typeface="Arial" pitchFamily="34" charset="-120"/>
-              </a:rPr>
-              <a:t>04  Work status — by space</a:t>
-            </a:r>
-            <a:endParaRPr lang="en-US" sz="1150" dirty="0"/>
-          </a:p>
-        </p:txBody>
-      </p:sp>
-      <p:sp>
-        <p:nvSpPr>
-          <p:cNvPr id="21" name="Text 19"/>
-          <p:cNvSpPr/>
-          <p:nvPr/>
-        </p:nvSpPr>
-        <p:spPr>
-          <a:xfrm>
-            <a:off x="5303520" y="8366760"/>
-            <a:ext cx="4114800" cy="347472"/>
-          </a:xfrm>
-          <a:prstGeom prst="rect">
-            <a:avLst/>
-          </a:prstGeom>
-          <a:noFill/>
-          <a:ln/>
-        </p:spPr>
-        <p:txBody>
-          <a:bodyPr wrap="square" lIns="0" tIns="0" rIns="0" bIns="0" rtlCol="0" anchor="ctr"/>
-          <a:lstStyle/>
-          <a:p>
-            <a:pPr marL="0" indent="0">
-              <a:buNone/>
-            </a:pPr>
-            <a:r>
-              <a:rPr lang="en-US" sz="1150" dirty="0">
-                <a:solidFill>
-                  <a:srgbClr val="AFC3DC"/>
-                </a:solidFill>
-                <a:latin typeface="Arial" pitchFamily="34" charset="0"/>
-                <a:ea typeface="Arial" pitchFamily="34" charset="-122"/>
-                <a:cs typeface="Arial" pitchFamily="34" charset="-120"/>
-              </a:rPr>
-              <a:t>05  Project feedback</a:t>
-            </a:r>
-            <a:endParaRPr lang="en-US" sz="1150" dirty="0"/>
-          </a:p>
-        </p:txBody>
-      </p:sp>
-      <p:sp>
-        <p:nvSpPr>
-          <p:cNvPr id="22" name="Text 20"/>
-          <p:cNvSpPr/>
-          <p:nvPr/>
-        </p:nvSpPr>
-        <p:spPr>
-          <a:xfrm>
-            <a:off x="1097280" y="9235440"/>
-            <a:ext cx="9144000" cy="320040"/>
-          </a:xfrm>
-          <a:prstGeom prst="rect">
-            <a:avLst/>
-          </a:prstGeom>
-          <a:noFill/>
-          <a:ln/>
-        </p:spPr>
-        <p:txBody>
-          <a:bodyPr wrap="square" lIns="0" tIns="0" rIns="0" bIns="0" rtlCol="0" anchor="ctr"/>
-          <a:lstStyle/>
-          <a:p>
-            <a:pPr marL="0" indent="0">
-              <a:buNone/>
-            </a:pPr>
-            <a:r>
-              <a:rPr lang="en-US" sz="1050" i="1" dirty="0">
-                <a:solidFill>
-                  <a:srgbClr val="7E96B4"/>
-                </a:solidFill>
-                <a:latin typeface="Arial" pitchFamily="34" charset="0"/>
-                <a:ea typeface="Arial" pitchFamily="34" charset="-122"/>
-                <a:cs typeface="Arial" pitchFamily="34" charset="-120"/>
-              </a:rPr>
-              <a:t>Property photograph not on record — to be added from the next site update</a:t>
+              <a:t>FEEDBACK FOR THIS SPACE</a:t>
             </a:r>
             <a:endParaRPr lang="en-US" sz="1050" dirty="0"/>
+          </a:p>
+        </p:txBody>
+      </p:sp>
+      <p:sp>
+        <p:nvSpPr>
+          <p:cNvPr id="30" name="Text 28"/>
+          <p:cNvSpPr/>
+          <p:nvPr/>
+        </p:nvSpPr>
+        <p:spPr>
+          <a:xfrm>
+            <a:off x="5828386" y="8485632"/>
+            <a:ext cx="8436254" cy="896112"/>
+          </a:xfrm>
+          <a:prstGeom prst="rect">
+            <a:avLst/>
+          </a:prstGeom>
+          <a:noFill/>
+          <a:ln/>
+        </p:spPr>
+        <p:txBody>
+          <a:bodyPr wrap="square" lIns="0" tIns="0" rIns="0" bIns="0" rtlCol="0" anchor="t"/>
+          <a:lstStyle/>
+          <a:p>
+            <a:pPr marL="0" indent="0">
+              <a:lnSpc>
+                <a:spcPts val="1600"/>
+              </a:lnSpc>
+              <a:buNone/>
+            </a:pPr>
+            <a:r>
+              <a:rPr lang="en-US" sz="1100" i="1" dirty="0">
+                <a:solidFill>
+                  <a:srgbClr val="9AA0A6"/>
+                </a:solidFill>
+                <a:latin typeface="Arial" pitchFamily="34" charset="0"/>
+                <a:ea typeface="Arial" pitchFamily="34" charset="-122"/>
+                <a:cs typeface="Arial" pitchFamily="34" charset="-120"/>
+              </a:rPr>
+              <a:t>To be recorded at the next site visit.</a:t>
+            </a:r>
+            <a:endParaRPr lang="en-US" sz="1100" dirty="0"/>
+          </a:p>
+        </p:txBody>
+      </p:sp>
+      <p:sp>
+        <p:nvSpPr>
+          <p:cNvPr id="31" name="Shape 29"/>
+          <p:cNvSpPr/>
+          <p:nvPr/>
+        </p:nvSpPr>
+        <p:spPr>
+          <a:xfrm>
+            <a:off x="658368" y="9482328"/>
+            <a:ext cx="13807440" cy="566928"/>
+          </a:xfrm>
+          <a:prstGeom prst="roundRect">
+            <a:avLst>
+              <a:gd name="adj" fmla="val 8065"/>
+            </a:avLst>
+          </a:prstGeom>
+          <a:solidFill>
+            <a:srgbClr val="EAF1F9"/>
+          </a:solidFill>
+          <a:ln w="12700">
+            <a:solidFill>
+              <a:srgbClr val="D6DBE2"/>
+            </a:solidFill>
+            <a:prstDash val="solid"/>
+          </a:ln>
+        </p:spPr>
+        <p:txBody>
+          <a:bodyPr/>
+          <a:lstStyle/>
+          <a:p>
+            <a:endParaRPr/>
+          </a:p>
+        </p:txBody>
+      </p:sp>
+      <p:sp>
+        <p:nvSpPr>
+          <p:cNvPr id="32" name="Text 30"/>
+          <p:cNvSpPr/>
+          <p:nvPr/>
+        </p:nvSpPr>
+        <p:spPr>
+          <a:xfrm>
+            <a:off x="932688" y="9509760"/>
+            <a:ext cx="13258800" cy="566928"/>
+          </a:xfrm>
+          <a:prstGeom prst="rect">
+            <a:avLst/>
+          </a:prstGeom>
+          <a:noFill/>
+          <a:ln/>
+        </p:spPr>
+        <p:txBody>
+          <a:bodyPr wrap="square" lIns="0" tIns="0" rIns="0" bIns="0" rtlCol="0" anchor="ctr"/>
+          <a:lstStyle/>
+          <a:p>
+            <a:r>
+              <a:t>Completion: —      ·      Last site visit: —      ·      Updated automatically from site form</a:t>
+            </a:r>
+          </a:p>
+        </p:txBody>
+      </p:sp>
+      <p:sp>
+        <p:nvSpPr>
+          <p:cNvPr id="33" name="Shape 31"/>
+          <p:cNvSpPr/>
+          <p:nvPr/>
+        </p:nvSpPr>
+        <p:spPr>
+          <a:xfrm>
+            <a:off x="0" y="10213848"/>
+            <a:ext cx="15124176" cy="32004"/>
+          </a:xfrm>
+          <a:prstGeom prst="rect">
+            <a:avLst/>
+          </a:prstGeom>
+          <a:solidFill>
+            <a:srgbClr val="17365D"/>
+          </a:solidFill>
+          <a:ln w="12700">
+            <a:solidFill>
+              <a:srgbClr val="17365D"/>
+            </a:solidFill>
+            <a:prstDash val="solid"/>
+          </a:ln>
+        </p:spPr>
+        <p:txBody>
+          <a:bodyPr/>
+          <a:lstStyle/>
+          <a:p>
+            <a:endParaRPr/>
+          </a:p>
+        </p:txBody>
+      </p:sp>
+      <p:sp>
+        <p:nvSpPr>
+          <p:cNvPr id="34" name="Text 32"/>
+          <p:cNvSpPr/>
+          <p:nvPr/>
+        </p:nvSpPr>
+        <p:spPr>
+          <a:xfrm>
+            <a:off x="658368" y="10287000"/>
+            <a:ext cx="8229600" cy="274320"/>
+          </a:xfrm>
+          <a:prstGeom prst="rect">
+            <a:avLst/>
+          </a:prstGeom>
+          <a:noFill/>
+          <a:ln/>
+        </p:spPr>
+        <p:txBody>
+          <a:bodyPr wrap="square" lIns="0" tIns="0" rIns="0" bIns="0" rtlCol="0" anchor="ctr"/>
+          <a:lstStyle/>
+          <a:p>
+            <a:pPr marL="0" indent="0">
+              <a:buNone/>
+            </a:pPr>
+            <a:r>
+              <a:rPr lang="en-US" sz="950" dirty="0">
+                <a:solidFill>
+                  <a:srgbClr val="6E7680"/>
+                </a:solidFill>
+                <a:latin typeface="Arial" pitchFamily="34" charset="0"/>
+                <a:ea typeface="Arial" pitchFamily="34" charset="-122"/>
+                <a:cs typeface="Arial" pitchFamily="34" charset="-120"/>
+              </a:rPr>
+              <a:t>ROHL-0002  ·  Regenta, Jamshedpur</a:t>
+            </a:r>
+            <a:endParaRPr lang="en-US" sz="950" dirty="0"/>
+          </a:p>
+        </p:txBody>
+      </p:sp>
+      <p:sp>
+        <p:nvSpPr>
+          <p:cNvPr id="35" name="Text 33"/>
+          <p:cNvSpPr/>
+          <p:nvPr/>
+        </p:nvSpPr>
+        <p:spPr>
+          <a:xfrm>
+            <a:off x="8979408" y="10287000"/>
+            <a:ext cx="5486400" cy="274320"/>
+          </a:xfrm>
+          <a:prstGeom prst="rect">
+            <a:avLst/>
+          </a:prstGeom>
+          <a:noFill/>
+          <a:ln/>
+        </p:spPr>
+        <p:txBody>
+          <a:bodyPr wrap="square" lIns="0" tIns="0" rIns="0" bIns="0" rtlCol="0" anchor="ctr"/>
+          <a:lstStyle/>
+          <a:p>
+            <a:pPr marL="0" indent="0" algn="r">
+              <a:buNone/>
+            </a:pPr>
+            <a:r>
+              <a:rPr sz="950" b="1" i="0">
+                <a:solidFill>
+                  <a:srgbClr val="C2185B"/>
+                </a:solidFill>
+                <a:latin typeface="Arial"/>
+              </a:rPr>
+              <a:t>RE:GEN:TA  HOTELS</a:t>
+            </a:r>
+            <a:endParaRPr lang="en-US" sz="950" dirty="0"/>
           </a:p>
         </p:txBody>
       </p:sp>
@@ -5378,1143 +6718,6 @@
 </p:sld>
 </file>
 
-<file path=ppt/slides/slide12.xml><?xml version="1.0" encoding="utf-8"?>
-<p:sld xmlns:a="http://schemas.openxmlformats.org/drawingml/2006/main" xmlns:r="http://schemas.openxmlformats.org/officeDocument/2006/relationships" xmlns:p="http://schemas.openxmlformats.org/presentationml/2006/main">
-  <p:cSld name="Slide 32">
-    <p:bg>
-      <p:bgPr>
-        <a:solidFill>
-          <a:srgbClr val="F5F6F8"/>
-        </a:solidFill>
-        <a:effectLst/>
-      </p:bgPr>
-    </p:bg>
-    <p:spTree>
-      <p:nvGrpSpPr>
-        <p:cNvPr id="1" name=""/>
-        <p:cNvGrpSpPr/>
-        <p:nvPr/>
-      </p:nvGrpSpPr>
-      <p:grpSpPr>
-        <a:xfrm>
-          <a:off x="0" y="0"/>
-          <a:ext cx="0" cy="0"/>
-          <a:chOff x="0" y="0"/>
-          <a:chExt cx="0" cy="0"/>
-        </a:xfrm>
-      </p:grpSpPr>
-      <p:sp>
-        <p:nvSpPr>
-          <p:cNvPr id="2" name="Shape 0"/>
-          <p:cNvSpPr/>
-          <p:nvPr/>
-        </p:nvSpPr>
-        <p:spPr>
-          <a:xfrm>
-            <a:off x="0" y="0"/>
-            <a:ext cx="15124176" cy="1170432"/>
-          </a:xfrm>
-          <a:prstGeom prst="rect">
-            <a:avLst/>
-          </a:prstGeom>
-          <a:solidFill>
-            <a:srgbClr val="17365D"/>
-          </a:solidFill>
-          <a:ln w="12700">
-            <a:solidFill>
-              <a:srgbClr val="17365D"/>
-            </a:solidFill>
-            <a:prstDash val="solid"/>
-          </a:ln>
-        </p:spPr>
-        <p:txBody>
-          <a:bodyPr/>
-          <a:lstStyle/>
-          <a:p>
-            <a:endParaRPr/>
-          </a:p>
-        </p:txBody>
-      </p:sp>
-      <p:sp>
-        <p:nvSpPr>
-          <p:cNvPr id="3" name="Text 1"/>
-          <p:cNvSpPr/>
-          <p:nvPr/>
-        </p:nvSpPr>
-        <p:spPr>
-          <a:xfrm>
-            <a:off x="658368" y="237744"/>
-            <a:ext cx="10515600" cy="457200"/>
-          </a:xfrm>
-          <a:prstGeom prst="rect">
-            <a:avLst/>
-          </a:prstGeom>
-          <a:noFill/>
-          <a:ln/>
-        </p:spPr>
-        <p:txBody>
-          <a:bodyPr wrap="square" lIns="0" tIns="0" rIns="0" bIns="0" rtlCol="0" anchor="ctr"/>
-          <a:lstStyle/>
-          <a:p>
-            <a:pPr marL="0" indent="0">
-              <a:buNone/>
-            </a:pPr>
-            <a:r>
-              <a:rPr lang="en-US" sz="2600" b="1" dirty="0">
-                <a:solidFill>
-                  <a:srgbClr val="FFFFFF"/>
-                </a:solidFill>
-                <a:latin typeface="Arial" pitchFamily="34" charset="0"/>
-                <a:ea typeface="Arial" pitchFamily="34" charset="-122"/>
-                <a:cs typeface="Arial" pitchFamily="34" charset="-120"/>
-              </a:rPr>
-              <a:t>04 · Main kitchen</a:t>
-            </a:r>
-            <a:endParaRPr lang="en-US" sz="2600" dirty="0"/>
-          </a:p>
-        </p:txBody>
-      </p:sp>
-      <p:sp>
-        <p:nvSpPr>
-          <p:cNvPr id="4" name="Text 2"/>
-          <p:cNvSpPr/>
-          <p:nvPr/>
-        </p:nvSpPr>
-        <p:spPr>
-          <a:xfrm>
-            <a:off x="658368" y="694944"/>
-            <a:ext cx="10515600" cy="292608"/>
-          </a:xfrm>
-          <a:prstGeom prst="rect">
-            <a:avLst/>
-          </a:prstGeom>
-          <a:noFill/>
-          <a:ln/>
-        </p:spPr>
-        <p:txBody>
-          <a:bodyPr wrap="square" lIns="0" tIns="0" rIns="0" bIns="0" rtlCol="0" anchor="ctr"/>
-          <a:lstStyle/>
-          <a:p>
-            <a:pPr marL="0" indent="0">
-              <a:buNone/>
-            </a:pPr>
-            <a:r>
-              <a:rPr lang="en-US" sz="1200" dirty="0">
-                <a:solidFill>
-                  <a:srgbClr val="AFC3DC"/>
-                </a:solidFill>
-                <a:latin typeface="Arial" pitchFamily="34" charset="0"/>
-                <a:ea typeface="Arial" pitchFamily="34" charset="-122"/>
-                <a:cs typeface="Arial" pitchFamily="34" charset="-120"/>
-              </a:rPr>
-              <a:t>Main kitchen, cold and dry stores   ·   Regenta, Jamshedpur</a:t>
-            </a:r>
-            <a:endParaRPr lang="en-US" sz="1200" dirty="0"/>
-          </a:p>
-        </p:txBody>
-      </p:sp>
-      <p:sp>
-        <p:nvSpPr>
-          <p:cNvPr id="5" name="Text 3"/>
-          <p:cNvSpPr/>
-          <p:nvPr/>
-        </p:nvSpPr>
-        <p:spPr>
-          <a:xfrm>
-            <a:off x="11265408" y="329184"/>
-            <a:ext cx="3200400" cy="502920"/>
-          </a:xfrm>
-          <a:prstGeom prst="rect">
-            <a:avLst/>
-          </a:prstGeom>
-          <a:noFill/>
-          <a:ln/>
-        </p:spPr>
-        <p:txBody>
-          <a:bodyPr wrap="square" lIns="0" tIns="0" rIns="0" bIns="0" rtlCol="0" anchor="ctr"/>
-          <a:lstStyle/>
-          <a:p>
-            <a:pPr marL="0" indent="0" algn="r">
-              <a:buNone/>
-            </a:pPr>
-            <a:r>
-              <a:rPr lang="en-US" sz="1200" b="1" dirty="0">
-                <a:solidFill>
-                  <a:srgbClr val="FFFFFF"/>
-                </a:solidFill>
-                <a:latin typeface="Arial" pitchFamily="34" charset="0"/>
-                <a:ea typeface="Arial" pitchFamily="34" charset="-122"/>
-                <a:cs typeface="Arial" pitchFamily="34" charset="-120"/>
-              </a:rPr>
-              <a:t>ROHL-0002</a:t>
-            </a:r>
-            <a:endParaRPr lang="en-US" sz="1200" dirty="0"/>
-          </a:p>
-        </p:txBody>
-      </p:sp>
-      <p:sp>
-        <p:nvSpPr>
-          <p:cNvPr id="6" name="Shape 4"/>
-          <p:cNvSpPr/>
-          <p:nvPr/>
-        </p:nvSpPr>
-        <p:spPr>
-          <a:xfrm>
-            <a:off x="658368" y="1645920"/>
-            <a:ext cx="6766560" cy="475488"/>
-          </a:xfrm>
-          <a:prstGeom prst="rect">
-            <a:avLst/>
-          </a:prstGeom>
-          <a:solidFill>
-            <a:srgbClr val="C3C7CD"/>
-          </a:solidFill>
-          <a:ln w="12700">
-            <a:solidFill>
-              <a:srgbClr val="333333"/>
-            </a:solidFill>
-            <a:prstDash val="solid"/>
-          </a:ln>
-        </p:spPr>
-        <p:txBody>
-          <a:bodyPr/>
-          <a:lstStyle/>
-          <a:p>
-            <a:endParaRPr/>
-          </a:p>
-        </p:txBody>
-      </p:sp>
-      <p:sp>
-        <p:nvSpPr>
-          <p:cNvPr id="7" name="Text 5"/>
-          <p:cNvSpPr/>
-          <p:nvPr/>
-        </p:nvSpPr>
-        <p:spPr>
-          <a:xfrm>
-            <a:off x="822960" y="1645920"/>
-            <a:ext cx="6437376" cy="475488"/>
-          </a:xfrm>
-          <a:prstGeom prst="rect">
-            <a:avLst/>
-          </a:prstGeom>
-          <a:noFill/>
-          <a:ln/>
-        </p:spPr>
-        <p:txBody>
-          <a:bodyPr wrap="square" lIns="0" tIns="0" rIns="0" bIns="0" rtlCol="0" anchor="ctr"/>
-          <a:lstStyle/>
-          <a:p>
-            <a:pPr marL="0" indent="0">
-              <a:buNone/>
-            </a:pPr>
-            <a:r>
-              <a:rPr lang="en-US" sz="1100" b="1" kern="0" spc="60" dirty="0">
-                <a:solidFill>
-                  <a:srgbClr val="FFFFFF"/>
-                </a:solidFill>
-                <a:latin typeface="Arial" pitchFamily="34" charset="0"/>
-                <a:ea typeface="Arial" pitchFamily="34" charset="-122"/>
-                <a:cs typeface="Arial" pitchFamily="34" charset="-120"/>
-              </a:rPr>
-              <a:t>PREVIOUS MONTH</a:t>
-            </a:r>
-            <a:endParaRPr lang="en-US" sz="1100" dirty="0"/>
-          </a:p>
-        </p:txBody>
-      </p:sp>
-      <p:sp>
-        <p:nvSpPr>
-          <p:cNvPr id="8" name="Shape 6"/>
-          <p:cNvSpPr/>
-          <p:nvPr/>
-        </p:nvSpPr>
-        <p:spPr>
-          <a:xfrm>
-            <a:off x="658368" y="2212848"/>
-            <a:ext cx="6766560" cy="4709160"/>
-          </a:xfrm>
-          <a:prstGeom prst="roundRect">
-            <a:avLst>
-              <a:gd name="adj" fmla="val 971"/>
-            </a:avLst>
-          </a:prstGeom>
-          <a:solidFill>
-            <a:srgbClr val="F0F1F3"/>
-          </a:solidFill>
-          <a:ln w="12700">
-            <a:solidFill>
-              <a:srgbClr val="D6DBE2"/>
-            </a:solidFill>
-            <a:prstDash val="solid"/>
-          </a:ln>
-        </p:spPr>
-        <p:txBody>
-          <a:bodyPr/>
-          <a:lstStyle/>
-          <a:p>
-            <a:endParaRPr/>
-          </a:p>
-        </p:txBody>
-      </p:sp>
-      <p:sp>
-        <p:nvSpPr>
-          <p:cNvPr id="9" name="Text 7"/>
-          <p:cNvSpPr/>
-          <p:nvPr/>
-        </p:nvSpPr>
-        <p:spPr>
-          <a:xfrm>
-            <a:off x="932688" y="4338828"/>
-            <a:ext cx="6217920" cy="457200"/>
-          </a:xfrm>
-          <a:prstGeom prst="rect">
-            <a:avLst/>
-          </a:prstGeom>
-          <a:noFill/>
-          <a:ln/>
-        </p:spPr>
-        <p:txBody>
-          <a:bodyPr wrap="square" lIns="0" tIns="0" rIns="0" bIns="0" rtlCol="0" anchor="ctr"/>
-          <a:lstStyle/>
-          <a:p>
-            <a:pPr marL="0" indent="0" algn="ctr">
-              <a:buNone/>
-            </a:pPr>
-            <a:r>
-              <a:rPr lang="en-US" sz="1200" i="1" dirty="0">
-                <a:solidFill>
-                  <a:srgbClr val="9AA0A6"/>
-                </a:solidFill>
-                <a:latin typeface="Arial" pitchFamily="34" charset="0"/>
-                <a:ea typeface="Arial" pitchFamily="34" charset="-122"/>
-                <a:cs typeface="Arial" pitchFamily="34" charset="-120"/>
-              </a:rPr>
-              <a:t>Photograph awaited</a:t>
-            </a:r>
-            <a:endParaRPr lang="en-US" sz="1200" dirty="0"/>
-          </a:p>
-        </p:txBody>
-      </p:sp>
-      <p:sp>
-        <p:nvSpPr>
-          <p:cNvPr id="10" name="Shape 8"/>
-          <p:cNvSpPr/>
-          <p:nvPr/>
-        </p:nvSpPr>
-        <p:spPr>
-          <a:xfrm>
-            <a:off x="7699248" y="1645920"/>
-            <a:ext cx="6766560" cy="475488"/>
-          </a:xfrm>
-          <a:prstGeom prst="rect">
-            <a:avLst/>
-          </a:prstGeom>
-          <a:solidFill>
-            <a:srgbClr val="C3C7CD"/>
-          </a:solidFill>
-          <a:ln w="12700">
-            <a:solidFill>
-              <a:srgbClr val="333333"/>
-            </a:solidFill>
-            <a:prstDash val="solid"/>
-          </a:ln>
-        </p:spPr>
-        <p:txBody>
-          <a:bodyPr/>
-          <a:lstStyle/>
-          <a:p>
-            <a:endParaRPr/>
-          </a:p>
-        </p:txBody>
-      </p:sp>
-      <p:sp>
-        <p:nvSpPr>
-          <p:cNvPr id="11" name="Text 9"/>
-          <p:cNvSpPr/>
-          <p:nvPr/>
-        </p:nvSpPr>
-        <p:spPr>
-          <a:xfrm>
-            <a:off x="7863840" y="1645920"/>
-            <a:ext cx="6437376" cy="475488"/>
-          </a:xfrm>
-          <a:prstGeom prst="rect">
-            <a:avLst/>
-          </a:prstGeom>
-          <a:noFill/>
-          <a:ln/>
-        </p:spPr>
-        <p:txBody>
-          <a:bodyPr wrap="square" lIns="0" tIns="0" rIns="0" bIns="0" rtlCol="0" anchor="ctr"/>
-          <a:lstStyle/>
-          <a:p>
-            <a:pPr marL="0" indent="0">
-              <a:buNone/>
-            </a:pPr>
-            <a:r>
-              <a:rPr lang="en-US" sz="1100" b="1" kern="0" spc="60" dirty="0">
-                <a:solidFill>
-                  <a:srgbClr val="FFFFFF"/>
-                </a:solidFill>
-                <a:latin typeface="Arial" pitchFamily="34" charset="0"/>
-                <a:ea typeface="Arial" pitchFamily="34" charset="-122"/>
-                <a:cs typeface="Arial" pitchFamily="34" charset="-120"/>
-              </a:rPr>
-              <a:t>CURRENT MONTH</a:t>
-            </a:r>
-            <a:endParaRPr lang="en-US" sz="1100" dirty="0"/>
-          </a:p>
-        </p:txBody>
-      </p:sp>
-      <p:sp>
-        <p:nvSpPr>
-          <p:cNvPr id="12" name="Shape 10"/>
-          <p:cNvSpPr/>
-          <p:nvPr/>
-        </p:nvSpPr>
-        <p:spPr>
-          <a:xfrm>
-            <a:off x="7699248" y="2212848"/>
-            <a:ext cx="6766560" cy="4709160"/>
-          </a:xfrm>
-          <a:prstGeom prst="roundRect">
-            <a:avLst>
-              <a:gd name="adj" fmla="val 971"/>
-            </a:avLst>
-          </a:prstGeom>
-          <a:solidFill>
-            <a:srgbClr val="F0F1F3"/>
-          </a:solidFill>
-          <a:ln w="12700">
-            <a:solidFill>
-              <a:srgbClr val="D6DBE2"/>
-            </a:solidFill>
-            <a:prstDash val="solid"/>
-          </a:ln>
-        </p:spPr>
-        <p:txBody>
-          <a:bodyPr/>
-          <a:lstStyle/>
-          <a:p>
-            <a:endParaRPr/>
-          </a:p>
-        </p:txBody>
-      </p:sp>
-      <p:sp>
-        <p:nvSpPr>
-          <p:cNvPr id="13" name="Text 11"/>
-          <p:cNvSpPr/>
-          <p:nvPr/>
-        </p:nvSpPr>
-        <p:spPr>
-          <a:xfrm>
-            <a:off x="7973568" y="4338828"/>
-            <a:ext cx="6217920" cy="457200"/>
-          </a:xfrm>
-          <a:prstGeom prst="rect">
-            <a:avLst/>
-          </a:prstGeom>
-          <a:noFill/>
-          <a:ln/>
-        </p:spPr>
-        <p:txBody>
-          <a:bodyPr wrap="square" lIns="0" tIns="0" rIns="0" bIns="0" rtlCol="0" anchor="ctr"/>
-          <a:lstStyle/>
-          <a:p>
-            <a:pPr marL="0" indent="0" algn="ctr">
-              <a:buNone/>
-            </a:pPr>
-            <a:r>
-              <a:rPr lang="en-US" sz="1200" i="1" dirty="0">
-                <a:solidFill>
-                  <a:srgbClr val="9AA0A6"/>
-                </a:solidFill>
-                <a:latin typeface="Arial" pitchFamily="34" charset="0"/>
-                <a:ea typeface="Arial" pitchFamily="34" charset="-122"/>
-                <a:cs typeface="Arial" pitchFamily="34" charset="-120"/>
-              </a:rPr>
-              <a:t>Photograph awaited</a:t>
-            </a:r>
-            <a:endParaRPr lang="en-US" sz="1200" dirty="0"/>
-          </a:p>
-        </p:txBody>
-      </p:sp>
-      <p:sp>
-        <p:nvSpPr>
-          <p:cNvPr id="14" name="Shape 12"/>
-          <p:cNvSpPr/>
-          <p:nvPr/>
-        </p:nvSpPr>
-        <p:spPr>
-          <a:xfrm>
-            <a:off x="658368" y="7232904"/>
-            <a:ext cx="4694530" cy="1874520"/>
-          </a:xfrm>
-          <a:prstGeom prst="roundRect">
-            <a:avLst>
-              <a:gd name="adj" fmla="val 2439"/>
-            </a:avLst>
-          </a:prstGeom>
-          <a:solidFill>
-            <a:srgbClr val="FFFFFF"/>
-          </a:solidFill>
-          <a:ln w="12700">
-            <a:solidFill>
-              <a:srgbClr val="D6DBE2"/>
-            </a:solidFill>
-            <a:prstDash val="solid"/>
-          </a:ln>
-        </p:spPr>
-        <p:txBody>
-          <a:bodyPr/>
-          <a:lstStyle/>
-          <a:p>
-            <a:endParaRPr/>
-          </a:p>
-        </p:txBody>
-      </p:sp>
-      <p:sp>
-        <p:nvSpPr>
-          <p:cNvPr id="15" name="Shape 13"/>
-          <p:cNvSpPr/>
-          <p:nvPr/>
-        </p:nvSpPr>
-        <p:spPr>
-          <a:xfrm>
-            <a:off x="658368" y="7232904"/>
-            <a:ext cx="4694530" cy="402336"/>
-          </a:xfrm>
-          <a:prstGeom prst="rect">
-            <a:avLst/>
-          </a:prstGeom>
-          <a:solidFill>
-            <a:srgbClr val="2F75B5"/>
-          </a:solidFill>
-          <a:ln w="12700">
-            <a:solidFill>
-              <a:srgbClr val="333333"/>
-            </a:solidFill>
-            <a:prstDash val="solid"/>
-          </a:ln>
-        </p:spPr>
-        <p:txBody>
-          <a:bodyPr/>
-          <a:lstStyle/>
-          <a:p>
-            <a:endParaRPr/>
-          </a:p>
-        </p:txBody>
-      </p:sp>
-      <p:sp>
-        <p:nvSpPr>
-          <p:cNvPr id="16" name="Text 14"/>
-          <p:cNvSpPr/>
-          <p:nvPr/>
-        </p:nvSpPr>
-        <p:spPr>
-          <a:xfrm>
-            <a:off x="822960" y="7232904"/>
-            <a:ext cx="4365346" cy="402336"/>
-          </a:xfrm>
-          <a:prstGeom prst="rect">
-            <a:avLst/>
-          </a:prstGeom>
-          <a:noFill/>
-          <a:ln/>
-        </p:spPr>
-        <p:txBody>
-          <a:bodyPr wrap="square" lIns="0" tIns="0" rIns="0" bIns="0" rtlCol="0" anchor="ctr"/>
-          <a:lstStyle/>
-          <a:p>
-            <a:pPr marL="0" indent="0">
-              <a:buNone/>
-            </a:pPr>
-            <a:r>
-              <a:rPr lang="en-US" sz="1050" b="1" kern="0" spc="70" dirty="0">
-                <a:solidFill>
-                  <a:srgbClr val="FFFFFF"/>
-                </a:solidFill>
-                <a:latin typeface="Arial" pitchFamily="34" charset="0"/>
-                <a:ea typeface="Arial" pitchFamily="34" charset="-122"/>
-                <a:cs typeface="Arial" pitchFamily="34" charset="-120"/>
-              </a:rPr>
-              <a:t>VIDEO LINKS</a:t>
-            </a:r>
-            <a:endParaRPr lang="en-US" sz="1050" dirty="0"/>
-          </a:p>
-        </p:txBody>
-      </p:sp>
-      <p:sp>
-        <p:nvSpPr>
-          <p:cNvPr id="17" name="Text 15"/>
-          <p:cNvSpPr/>
-          <p:nvPr/>
-        </p:nvSpPr>
-        <p:spPr>
-          <a:xfrm>
-            <a:off x="859536" y="7763256"/>
-            <a:ext cx="1691640" cy="329184"/>
-          </a:xfrm>
-          <a:prstGeom prst="rect">
-            <a:avLst/>
-          </a:prstGeom>
-          <a:noFill/>
-          <a:ln/>
-        </p:spPr>
-        <p:txBody>
-          <a:bodyPr wrap="square" lIns="0" tIns="0" rIns="0" bIns="0" rtlCol="0" anchor="ctr"/>
-          <a:lstStyle/>
-          <a:p>
-            <a:pPr marL="0" indent="0">
-              <a:buNone/>
-            </a:pPr>
-            <a:r>
-              <a:rPr lang="en-US" sz="1000" dirty="0">
-                <a:solidFill>
-                  <a:srgbClr val="6E7680"/>
-                </a:solidFill>
-                <a:latin typeface="Arial" pitchFamily="34" charset="0"/>
-                <a:ea typeface="Arial" pitchFamily="34" charset="-122"/>
-                <a:cs typeface="Arial" pitchFamily="34" charset="-120"/>
-              </a:rPr>
-              <a:t>Walkthrough</a:t>
-            </a:r>
-            <a:endParaRPr lang="en-US" sz="1000" dirty="0"/>
-          </a:p>
-        </p:txBody>
-      </p:sp>
-      <p:sp>
-        <p:nvSpPr>
-          <p:cNvPr id="18" name="Text 16"/>
-          <p:cNvSpPr/>
-          <p:nvPr/>
-        </p:nvSpPr>
-        <p:spPr>
-          <a:xfrm>
-            <a:off x="2624328" y="7763256"/>
-            <a:ext cx="2499970" cy="329184"/>
-          </a:xfrm>
-          <a:prstGeom prst="rect">
-            <a:avLst/>
-          </a:prstGeom>
-          <a:noFill/>
-          <a:ln/>
-        </p:spPr>
-        <p:txBody>
-          <a:bodyPr wrap="square" lIns="0" tIns="0" rIns="0" bIns="0" rtlCol="0" anchor="ctr"/>
-          <a:lstStyle/>
-          <a:p>
-            <a:pPr marL="0" indent="0">
-              <a:buNone/>
-            </a:pPr>
-            <a:r>
-              <a:rPr lang="en-US" sz="1000" dirty="0">
-                <a:solidFill>
-                  <a:srgbClr val="9AA0A6"/>
-                </a:solidFill>
-                <a:latin typeface="Arial" pitchFamily="34" charset="0"/>
-                <a:ea typeface="Arial" pitchFamily="34" charset="-122"/>
-                <a:cs typeface="Arial" pitchFamily="34" charset="-120"/>
-              </a:rPr>
-              <a:t>—</a:t>
-            </a:r>
-            <a:endParaRPr lang="en-US" sz="1000" dirty="0"/>
-          </a:p>
-        </p:txBody>
-      </p:sp>
-      <p:sp>
-        <p:nvSpPr>
-          <p:cNvPr id="19" name="Text 17"/>
-          <p:cNvSpPr/>
-          <p:nvPr/>
-        </p:nvSpPr>
-        <p:spPr>
-          <a:xfrm>
-            <a:off x="859536" y="8183880"/>
-            <a:ext cx="1691640" cy="329184"/>
-          </a:xfrm>
-          <a:prstGeom prst="rect">
-            <a:avLst/>
-          </a:prstGeom>
-          <a:noFill/>
-          <a:ln/>
-        </p:spPr>
-        <p:txBody>
-          <a:bodyPr wrap="square" lIns="0" tIns="0" rIns="0" bIns="0" rtlCol="0" anchor="ctr"/>
-          <a:lstStyle/>
-          <a:p>
-            <a:pPr marL="0" indent="0">
-              <a:buNone/>
-            </a:pPr>
-            <a:r>
-              <a:rPr lang="en-US" sz="1000" dirty="0">
-                <a:solidFill>
-                  <a:srgbClr val="6E7680"/>
-                </a:solidFill>
-                <a:latin typeface="Arial" pitchFamily="34" charset="0"/>
-                <a:ea typeface="Arial" pitchFamily="34" charset="-122"/>
-                <a:cs typeface="Arial" pitchFamily="34" charset="-120"/>
-              </a:rPr>
-              <a:t>Detail / close-up</a:t>
-            </a:r>
-            <a:endParaRPr lang="en-US" sz="1000" dirty="0"/>
-          </a:p>
-        </p:txBody>
-      </p:sp>
-      <p:sp>
-        <p:nvSpPr>
-          <p:cNvPr id="20" name="Text 18"/>
-          <p:cNvSpPr/>
-          <p:nvPr/>
-        </p:nvSpPr>
-        <p:spPr>
-          <a:xfrm>
-            <a:off x="2624328" y="8183880"/>
-            <a:ext cx="2499970" cy="329184"/>
-          </a:xfrm>
-          <a:prstGeom prst="rect">
-            <a:avLst/>
-          </a:prstGeom>
-          <a:noFill/>
-          <a:ln/>
-        </p:spPr>
-        <p:txBody>
-          <a:bodyPr wrap="square" lIns="0" tIns="0" rIns="0" bIns="0" rtlCol="0" anchor="ctr"/>
-          <a:lstStyle/>
-          <a:p>
-            <a:pPr marL="0" indent="0">
-              <a:buNone/>
-            </a:pPr>
-            <a:r>
-              <a:rPr lang="en-US" sz="1000" dirty="0">
-                <a:solidFill>
-                  <a:srgbClr val="9AA0A6"/>
-                </a:solidFill>
-                <a:latin typeface="Arial" pitchFamily="34" charset="0"/>
-                <a:ea typeface="Arial" pitchFamily="34" charset="-122"/>
-                <a:cs typeface="Arial" pitchFamily="34" charset="-120"/>
-              </a:rPr>
-              <a:t>—</a:t>
-            </a:r>
-            <a:endParaRPr lang="en-US" sz="1000" dirty="0"/>
-          </a:p>
-        </p:txBody>
-      </p:sp>
-      <p:sp>
-        <p:nvSpPr>
-          <p:cNvPr id="21" name="Text 19"/>
-          <p:cNvSpPr/>
-          <p:nvPr/>
-        </p:nvSpPr>
-        <p:spPr>
-          <a:xfrm>
-            <a:off x="859536" y="8604504"/>
-            <a:ext cx="1691640" cy="329184"/>
-          </a:xfrm>
-          <a:prstGeom prst="rect">
-            <a:avLst/>
-          </a:prstGeom>
-          <a:noFill/>
-          <a:ln/>
-        </p:spPr>
-        <p:txBody>
-          <a:bodyPr wrap="square" lIns="0" tIns="0" rIns="0" bIns="0" rtlCol="0" anchor="ctr"/>
-          <a:lstStyle/>
-          <a:p>
-            <a:pPr marL="0" indent="0">
-              <a:buNone/>
-            </a:pPr>
-            <a:r>
-              <a:rPr lang="en-US" sz="1000" dirty="0">
-                <a:solidFill>
-                  <a:srgbClr val="6E7680"/>
-                </a:solidFill>
-                <a:latin typeface="Arial" pitchFamily="34" charset="0"/>
-                <a:ea typeface="Arial" pitchFamily="34" charset="-122"/>
-                <a:cs typeface="Arial" pitchFamily="34" charset="-120"/>
-              </a:rPr>
-              <a:t>Snag review</a:t>
-            </a:r>
-            <a:endParaRPr lang="en-US" sz="1000" dirty="0"/>
-          </a:p>
-        </p:txBody>
-      </p:sp>
-      <p:sp>
-        <p:nvSpPr>
-          <p:cNvPr id="22" name="Text 20"/>
-          <p:cNvSpPr/>
-          <p:nvPr/>
-        </p:nvSpPr>
-        <p:spPr>
-          <a:xfrm>
-            <a:off x="2624328" y="8604504"/>
-            <a:ext cx="2499970" cy="329184"/>
-          </a:xfrm>
-          <a:prstGeom prst="rect">
-            <a:avLst/>
-          </a:prstGeom>
-          <a:noFill/>
-          <a:ln/>
-        </p:spPr>
-        <p:txBody>
-          <a:bodyPr wrap="square" lIns="0" tIns="0" rIns="0" bIns="0" rtlCol="0" anchor="ctr"/>
-          <a:lstStyle/>
-          <a:p>
-            <a:pPr marL="0" indent="0">
-              <a:buNone/>
-            </a:pPr>
-            <a:r>
-              <a:rPr lang="en-US" sz="1000" dirty="0">
-                <a:solidFill>
-                  <a:srgbClr val="9AA0A6"/>
-                </a:solidFill>
-                <a:latin typeface="Arial" pitchFamily="34" charset="0"/>
-                <a:ea typeface="Arial" pitchFamily="34" charset="-122"/>
-                <a:cs typeface="Arial" pitchFamily="34" charset="-120"/>
-              </a:rPr>
-              <a:t>—</a:t>
-            </a:r>
-            <a:endParaRPr lang="en-US" sz="1000" dirty="0"/>
-          </a:p>
-        </p:txBody>
-      </p:sp>
-      <p:sp>
-        <p:nvSpPr>
-          <p:cNvPr id="23" name="Shape 21"/>
-          <p:cNvSpPr/>
-          <p:nvPr/>
-        </p:nvSpPr>
-        <p:spPr>
-          <a:xfrm>
-            <a:off x="5627218" y="7232904"/>
-            <a:ext cx="8838590" cy="1874520"/>
-          </a:xfrm>
-          <a:prstGeom prst="roundRect">
-            <a:avLst>
-              <a:gd name="adj" fmla="val 2439"/>
-            </a:avLst>
-          </a:prstGeom>
-          <a:solidFill>
-            <a:srgbClr val="FFFFFF"/>
-          </a:solidFill>
-          <a:ln w="12700">
-            <a:solidFill>
-              <a:srgbClr val="D6DBE2"/>
-            </a:solidFill>
-            <a:prstDash val="solid"/>
-          </a:ln>
-        </p:spPr>
-        <p:txBody>
-          <a:bodyPr/>
-          <a:lstStyle/>
-          <a:p>
-            <a:endParaRPr/>
-          </a:p>
-        </p:txBody>
-      </p:sp>
-      <p:sp>
-        <p:nvSpPr>
-          <p:cNvPr id="24" name="Shape 22"/>
-          <p:cNvSpPr/>
-          <p:nvPr/>
-        </p:nvSpPr>
-        <p:spPr>
-          <a:xfrm>
-            <a:off x="5627218" y="7232904"/>
-            <a:ext cx="8838590" cy="402336"/>
-          </a:xfrm>
-          <a:prstGeom prst="rect">
-            <a:avLst/>
-          </a:prstGeom>
-          <a:solidFill>
-            <a:srgbClr val="17365D"/>
-          </a:solidFill>
-          <a:ln w="12700">
-            <a:solidFill>
-              <a:srgbClr val="333333"/>
-            </a:solidFill>
-            <a:prstDash val="solid"/>
-          </a:ln>
-        </p:spPr>
-        <p:txBody>
-          <a:bodyPr/>
-          <a:lstStyle/>
-          <a:p>
-            <a:endParaRPr/>
-          </a:p>
-        </p:txBody>
-      </p:sp>
-      <p:sp>
-        <p:nvSpPr>
-          <p:cNvPr id="25" name="Text 23"/>
-          <p:cNvSpPr/>
-          <p:nvPr/>
-        </p:nvSpPr>
-        <p:spPr>
-          <a:xfrm>
-            <a:off x="5791810" y="7232904"/>
-            <a:ext cx="8509406" cy="402336"/>
-          </a:xfrm>
-          <a:prstGeom prst="rect">
-            <a:avLst/>
-          </a:prstGeom>
-          <a:noFill/>
-          <a:ln/>
-        </p:spPr>
-        <p:txBody>
-          <a:bodyPr wrap="square" lIns="0" tIns="0" rIns="0" bIns="0" rtlCol="0" anchor="ctr"/>
-          <a:lstStyle/>
-          <a:p>
-            <a:pPr marL="0" indent="0">
-              <a:buNone/>
-            </a:pPr>
-            <a:r>
-              <a:rPr lang="en-US" sz="1050" b="1" kern="0" spc="70" dirty="0">
-                <a:solidFill>
-                  <a:srgbClr val="FFFFFF"/>
-                </a:solidFill>
-                <a:latin typeface="Arial" pitchFamily="34" charset="0"/>
-                <a:ea typeface="Arial" pitchFamily="34" charset="-122"/>
-                <a:cs typeface="Arial" pitchFamily="34" charset="-120"/>
-              </a:rPr>
-              <a:t>FEEDBACK FOR THIS SPACE</a:t>
-            </a:r>
-            <a:endParaRPr lang="en-US" sz="1050" dirty="0"/>
-          </a:p>
-        </p:txBody>
-      </p:sp>
-      <p:sp>
-        <p:nvSpPr>
-          <p:cNvPr id="26" name="Text 24"/>
-          <p:cNvSpPr/>
-          <p:nvPr/>
-        </p:nvSpPr>
-        <p:spPr>
-          <a:xfrm>
-            <a:off x="5828386" y="7744968"/>
-            <a:ext cx="8436254" cy="1234440"/>
-          </a:xfrm>
-          <a:prstGeom prst="rect">
-            <a:avLst/>
-          </a:prstGeom>
-          <a:noFill/>
-          <a:ln/>
-        </p:spPr>
-        <p:txBody>
-          <a:bodyPr wrap="square" lIns="0" tIns="0" rIns="0" bIns="0" rtlCol="0" anchor="t"/>
-          <a:lstStyle/>
-          <a:p>
-            <a:pPr marL="0" indent="0">
-              <a:lnSpc>
-                <a:spcPts val="1600"/>
-              </a:lnSpc>
-              <a:buNone/>
-            </a:pPr>
-            <a:r>
-              <a:rPr lang="en-US" sz="1100" i="1" dirty="0">
-                <a:solidFill>
-                  <a:srgbClr val="9AA0A6"/>
-                </a:solidFill>
-                <a:latin typeface="Arial" pitchFamily="34" charset="0"/>
-                <a:ea typeface="Arial" pitchFamily="34" charset="-122"/>
-                <a:cs typeface="Arial" pitchFamily="34" charset="-120"/>
-              </a:rPr>
-              <a:t>To be recorded at the next site visit.</a:t>
-            </a:r>
-            <a:endParaRPr lang="en-US" sz="1100" dirty="0"/>
-          </a:p>
-        </p:txBody>
-      </p:sp>
-      <p:sp>
-        <p:nvSpPr>
-          <p:cNvPr id="27" name="Shape 25"/>
-          <p:cNvSpPr/>
-          <p:nvPr/>
-        </p:nvSpPr>
-        <p:spPr>
-          <a:xfrm>
-            <a:off x="658368" y="9052560"/>
-            <a:ext cx="13807440" cy="566928"/>
-          </a:xfrm>
-          <a:prstGeom prst="roundRect">
-            <a:avLst>
-              <a:gd name="adj" fmla="val 8065"/>
-            </a:avLst>
-          </a:prstGeom>
-          <a:solidFill>
-            <a:srgbClr val="EAF1F9"/>
-          </a:solidFill>
-          <a:ln w="12700">
-            <a:solidFill>
-              <a:srgbClr val="D6DBE2"/>
-            </a:solidFill>
-            <a:prstDash val="solid"/>
-          </a:ln>
-        </p:spPr>
-        <p:txBody>
-          <a:bodyPr/>
-          <a:lstStyle/>
-          <a:p>
-            <a:endParaRPr/>
-          </a:p>
-        </p:txBody>
-      </p:sp>
-      <p:sp>
-        <p:nvSpPr>
-          <p:cNvPr id="28" name="Text 26"/>
-          <p:cNvSpPr/>
-          <p:nvPr/>
-        </p:nvSpPr>
-        <p:spPr>
-          <a:xfrm>
-            <a:off x="932688" y="9052560"/>
-            <a:ext cx="13258800" cy="566928"/>
-          </a:xfrm>
-          <a:prstGeom prst="rect">
-            <a:avLst/>
-          </a:prstGeom>
-          <a:noFill/>
-          <a:ln/>
-        </p:spPr>
-        <p:txBody>
-          <a:bodyPr wrap="square" lIns="0" tIns="0" rIns="0" bIns="0" rtlCol="0" anchor="ctr"/>
-          <a:lstStyle/>
-          <a:p>
-            <a:pPr marL="0" indent="0">
-              <a:buNone/>
-            </a:pPr>
-            <a:r>
-              <a:rPr lang="en-US" sz="1100" b="1" dirty="0">
-                <a:solidFill>
-                  <a:srgbClr val="17365D"/>
-                </a:solidFill>
-                <a:latin typeface="Arial" pitchFamily="34" charset="0"/>
-                <a:ea typeface="Arial" pitchFamily="34" charset="-122"/>
-                <a:cs typeface="Arial" pitchFamily="34" charset="-120"/>
-              </a:rPr>
-              <a:t>Last site visit: Technical visit pending   ·   Completion 50%   ·   Stage: Construction   ·   Risk: Medium</a:t>
-            </a:r>
-            <a:endParaRPr lang="en-US" sz="1100" dirty="0"/>
-          </a:p>
-        </p:txBody>
-      </p:sp>
-      <p:sp>
-        <p:nvSpPr>
-          <p:cNvPr id="29" name="Shape 27"/>
-          <p:cNvSpPr/>
-          <p:nvPr/>
-        </p:nvSpPr>
-        <p:spPr>
-          <a:xfrm>
-            <a:off x="0" y="10213848"/>
-            <a:ext cx="15124176" cy="32004"/>
-          </a:xfrm>
-          <a:prstGeom prst="rect">
-            <a:avLst/>
-          </a:prstGeom>
-          <a:solidFill>
-            <a:srgbClr val="17365D"/>
-          </a:solidFill>
-          <a:ln w="12700">
-            <a:solidFill>
-              <a:srgbClr val="17365D"/>
-            </a:solidFill>
-            <a:prstDash val="solid"/>
-          </a:ln>
-        </p:spPr>
-        <p:txBody>
-          <a:bodyPr/>
-          <a:lstStyle/>
-          <a:p>
-            <a:endParaRPr/>
-          </a:p>
-        </p:txBody>
-      </p:sp>
-      <p:sp>
-        <p:nvSpPr>
-          <p:cNvPr id="30" name="Text 28"/>
-          <p:cNvSpPr/>
-          <p:nvPr/>
-        </p:nvSpPr>
-        <p:spPr>
-          <a:xfrm>
-            <a:off x="658368" y="10287000"/>
-            <a:ext cx="8229600" cy="274320"/>
-          </a:xfrm>
-          <a:prstGeom prst="rect">
-            <a:avLst/>
-          </a:prstGeom>
-          <a:noFill/>
-          <a:ln/>
-        </p:spPr>
-        <p:txBody>
-          <a:bodyPr wrap="square" lIns="0" tIns="0" rIns="0" bIns="0" rtlCol="0" anchor="ctr"/>
-          <a:lstStyle/>
-          <a:p>
-            <a:pPr marL="0" indent="0">
-              <a:buNone/>
-            </a:pPr>
-            <a:r>
-              <a:rPr lang="en-US" sz="950" dirty="0">
-                <a:solidFill>
-                  <a:srgbClr val="6E7680"/>
-                </a:solidFill>
-                <a:latin typeface="Arial" pitchFamily="34" charset="0"/>
-                <a:ea typeface="Arial" pitchFamily="34" charset="-122"/>
-                <a:cs typeface="Arial" pitchFamily="34" charset="-120"/>
-              </a:rPr>
-              <a:t>ROHL-0002  ·  Regenta, Jamshedpur</a:t>
-            </a:r>
-            <a:endParaRPr lang="en-US" sz="950" dirty="0"/>
-          </a:p>
-        </p:txBody>
-      </p:sp>
-      <p:sp>
-        <p:nvSpPr>
-          <p:cNvPr id="31" name="Text 29"/>
-          <p:cNvSpPr/>
-          <p:nvPr/>
-        </p:nvSpPr>
-        <p:spPr>
-          <a:xfrm>
-            <a:off x="8979408" y="10287000"/>
-            <a:ext cx="5486400" cy="274320"/>
-          </a:xfrm>
-          <a:prstGeom prst="rect">
-            <a:avLst/>
-          </a:prstGeom>
-          <a:noFill/>
-          <a:ln/>
-        </p:spPr>
-        <p:txBody>
-          <a:bodyPr wrap="square" lIns="0" tIns="0" rIns="0" bIns="0" rtlCol="0" anchor="ctr"/>
-          <a:lstStyle/>
-          <a:p>
-            <a:pPr marL="0" indent="0" algn="r">
-              <a:buNone/>
-            </a:pPr>
-            <a:r>
-              <a:rPr sz="950" b="1" i="0">
-                <a:solidFill>
-                  <a:srgbClr val="C2185B"/>
-                </a:solidFill>
-                <a:latin typeface="Arial"/>
-              </a:rPr>
-              <a:t>RE:GEN:TA  HOTELS</a:t>
-            </a:r>
-            <a:endParaRPr lang="en-US" sz="950" dirty="0"/>
-          </a:p>
-        </p:txBody>
-      </p:sp>
-    </p:spTree>
-  </p:cSld>
-  <p:clrMapOvr>
-    <a:masterClrMapping/>
-  </p:clrMapOvr>
-</p:sld>
-</file>
-
 <file path=ppt/slides/slide13.xml><?xml version="1.0" encoding="utf-8"?>
 <p:sld xmlns:a="http://schemas.openxmlformats.org/drawingml/2006/main" xmlns:r="http://schemas.openxmlformats.org/officeDocument/2006/relationships" xmlns:p="http://schemas.openxmlformats.org/presentationml/2006/main">
   <p:cSld name="Slide 33">
@@ -12374,7 +12577,7 @@
 
 <file path=ppt/slides/slide2.xml><?xml version="1.0" encoding="utf-8"?>
 <p:sld xmlns:a="http://schemas.openxmlformats.org/drawingml/2006/main" xmlns:r="http://schemas.openxmlformats.org/officeDocument/2006/relationships" xmlns:p="http://schemas.openxmlformats.org/presentationml/2006/main">
-  <p:cSld name="Slide 22">
+  <p:cSld name="Slide 32">
     <p:bg>
       <p:bgPr>
         <a:solidFill>
@@ -12462,7 +12665,7 @@
                 <a:ea typeface="Arial" pitchFamily="34" charset="-122"/>
                 <a:cs typeface="Arial" pitchFamily="34" charset="-120"/>
               </a:rPr>
-              <a:t>01 · Project Overview &amp; Contact Details</a:t>
+              <a:t>04 · Main kitchen</a:t>
             </a:r>
             <a:endParaRPr lang="en-US" sz="2600" dirty="0"/>
           </a:p>
@@ -12501,7 +12704,7 @@
                 <a:ea typeface="Arial" pitchFamily="34" charset="-122"/>
                 <a:cs typeface="Arial" pitchFamily="34" charset="-120"/>
               </a:rPr>
-              <a:t>Regenta — Jamshedpur</a:t>
+              <a:t>Main kitchen, cold and dry stores   ·   Regenta, Jamshedpur</a:t>
             </a:r>
             <a:endParaRPr lang="en-US" sz="1200" dirty="0"/>
           </a:p>
@@ -12554,16 +12757,87 @@
         </p:nvSpPr>
         <p:spPr>
           <a:xfrm>
-            <a:off x="658368" y="1572768"/>
-            <a:ext cx="4419600" cy="2880360"/>
+            <a:off x="658368" y="1645920"/>
+            <a:ext cx="6766560" cy="475488"/>
+          </a:xfrm>
+          <a:prstGeom prst="rect">
+            <a:avLst/>
+          </a:prstGeom>
+          <a:solidFill>
+            <a:srgbClr val="C3C7CD"/>
+          </a:solidFill>
+          <a:ln w="12700">
+            <a:solidFill>
+              <a:srgbClr val="333333"/>
+            </a:solidFill>
+            <a:prstDash val="solid"/>
+          </a:ln>
+        </p:spPr>
+        <p:txBody>
+          <a:bodyPr/>
+          <a:lstStyle/>
+          <a:p>
+            <a:endParaRPr/>
+          </a:p>
+        </p:txBody>
+      </p:sp>
+      <p:sp>
+        <p:nvSpPr>
+          <p:cNvPr id="7" name="Text 5"/>
+          <p:cNvSpPr/>
+          <p:nvPr/>
+        </p:nvSpPr>
+        <p:spPr>
+          <a:xfrm>
+            <a:off x="822960" y="1645920"/>
+            <a:ext cx="6437376" cy="475488"/>
+          </a:xfrm>
+          <a:prstGeom prst="rect">
+            <a:avLst/>
+          </a:prstGeom>
+          <a:noFill/>
+          <a:ln/>
+        </p:spPr>
+        <p:txBody>
+          <a:bodyPr wrap="square" lIns="0" tIns="0" rIns="0" bIns="0" rtlCol="0" anchor="ctr"/>
+          <a:lstStyle/>
+          <a:p>
+            <a:pPr marL="0" indent="0">
+              <a:buNone/>
+            </a:pPr>
+            <a:r>
+              <a:rPr lang="en-US" sz="1100" b="1" kern="0" spc="60" dirty="0">
+                <a:solidFill>
+                  <a:srgbClr val="FFFFFF"/>
+                </a:solidFill>
+                <a:latin typeface="Arial" pitchFamily="34" charset="0"/>
+                <a:ea typeface="Arial" pitchFamily="34" charset="-122"/>
+                <a:cs typeface="Arial" pitchFamily="34" charset="-120"/>
+              </a:rPr>
+              <a:t>PREVIOUS MONTH</a:t>
+            </a:r>
+            <a:endParaRPr lang="en-US" sz="1100" dirty="0"/>
+          </a:p>
+        </p:txBody>
+      </p:sp>
+      <p:sp>
+        <p:nvSpPr>
+          <p:cNvPr id="8" name="Shape 6"/>
+          <p:cNvSpPr/>
+          <p:nvPr/>
+        </p:nvSpPr>
+        <p:spPr>
+          <a:xfrm>
+            <a:off x="658368" y="2212848"/>
+            <a:ext cx="6766560" cy="5605272"/>
           </a:xfrm>
           <a:prstGeom prst="roundRect">
             <a:avLst>
-              <a:gd name="adj" fmla="val 1587"/>
+              <a:gd name="adj" fmla="val 971"/>
             </a:avLst>
           </a:prstGeom>
           <a:solidFill>
-            <a:srgbClr val="FFFFFF"/>
+            <a:srgbClr val="F0F1F3"/>
           </a:solidFill>
           <a:ln w="12700">
             <a:solidFill>
@@ -12582,20 +12856,59 @@
       </p:sp>
       <p:sp>
         <p:nvSpPr>
-          <p:cNvPr id="7" name="Shape 5"/>
-          <p:cNvSpPr/>
-          <p:nvPr/>
-        </p:nvSpPr>
-        <p:spPr>
-          <a:xfrm>
-            <a:off x="658368" y="1572768"/>
-            <a:ext cx="4419600" cy="457200"/>
-          </a:xfrm>
-          <a:prstGeom prst="rect">
-            <a:avLst/>
-          </a:prstGeom>
-          <a:solidFill>
-            <a:srgbClr val="2F75B5"/>
+          <p:cNvPr id="9" name="Text 7"/>
+          <p:cNvSpPr/>
+          <p:nvPr/>
+        </p:nvSpPr>
+        <p:spPr>
+          <a:xfrm>
+            <a:off x="932688" y="4709160"/>
+            <a:ext cx="6217920" cy="457200"/>
+          </a:xfrm>
+          <a:prstGeom prst="rect">
+            <a:avLst/>
+          </a:prstGeom>
+          <a:noFill/>
+          <a:ln/>
+        </p:spPr>
+        <p:txBody>
+          <a:bodyPr wrap="square" lIns="0" tIns="0" rIns="0" bIns="0" rtlCol="0" anchor="ctr"/>
+          <a:lstStyle/>
+          <a:p>
+            <a:pPr marL="0" indent="0" algn="ctr">
+              <a:buNone/>
+            </a:pPr>
+            <a:r>
+              <a:rPr lang="en-US" sz="1200" i="1" dirty="0">
+                <a:solidFill>
+                  <a:srgbClr val="9AA0A6"/>
+                </a:solidFill>
+                <a:latin typeface="Arial" pitchFamily="34" charset="0"/>
+                <a:ea typeface="Arial" pitchFamily="34" charset="-122"/>
+                <a:cs typeface="Arial" pitchFamily="34" charset="-120"/>
+              </a:rPr>
+              <a:t>Photograph awaited</a:t>
+            </a:r>
+            <a:endParaRPr lang="en-US" sz="1200" dirty="0"/>
+          </a:p>
+        </p:txBody>
+      </p:sp>
+      <p:sp>
+        <p:nvSpPr>
+          <p:cNvPr id="10" name="Shape 8"/>
+          <p:cNvSpPr/>
+          <p:nvPr/>
+        </p:nvSpPr>
+        <p:spPr>
+          <a:xfrm>
+            <a:off x="7699248" y="1645920"/>
+            <a:ext cx="6766560" cy="475488"/>
+          </a:xfrm>
+          <a:prstGeom prst="rect">
+            <a:avLst/>
+          </a:prstGeom>
+          <a:solidFill>
+            <a:srgbClr val="C3C7CD"/>
           </a:solidFill>
           <a:ln w="12700">
             <a:solidFill>
@@ -12614,30 +12927,30 @@
       </p:sp>
       <p:sp>
         <p:nvSpPr>
-          <p:cNvPr id="8" name="Text 6"/>
-          <p:cNvSpPr/>
-          <p:nvPr/>
-        </p:nvSpPr>
-        <p:spPr>
-          <a:xfrm>
-            <a:off x="877824" y="1572768"/>
-            <a:ext cx="3980688" cy="457200"/>
-          </a:xfrm>
-          <a:prstGeom prst="rect">
-            <a:avLst/>
-          </a:prstGeom>
-          <a:noFill/>
-          <a:ln/>
-        </p:spPr>
-        <p:txBody>
-          <a:bodyPr wrap="square" lIns="0" tIns="0" rIns="0" bIns="0" rtlCol="0" anchor="ctr"/>
-          <a:lstStyle/>
-          <a:p>
-            <a:pPr marL="0" indent="0">
-              <a:buNone/>
-            </a:pPr>
-            <a:r>
-              <a:rPr lang="en-US" sz="1050" b="1" kern="0" spc="80" dirty="0">
+          <p:cNvPr id="11" name="Text 9"/>
+          <p:cNvSpPr/>
+          <p:nvPr/>
+        </p:nvSpPr>
+        <p:spPr>
+          <a:xfrm>
+            <a:off x="7863840" y="1645920"/>
+            <a:ext cx="6437376" cy="475488"/>
+          </a:xfrm>
+          <a:prstGeom prst="rect">
+            <a:avLst/>
+          </a:prstGeom>
+          <a:noFill/>
+          <a:ln/>
+        </p:spPr>
+        <p:txBody>
+          <a:bodyPr wrap="square" lIns="0" tIns="0" rIns="0" bIns="0" rtlCol="0" anchor="ctr"/>
+          <a:lstStyle/>
+          <a:p>
+            <a:pPr marL="0" indent="0">
+              <a:buNone/>
+            </a:pPr>
+            <a:r>
+              <a:rPr lang="en-US" sz="1100" b="1" kern="0" spc="60" dirty="0">
                 <a:solidFill>
                   <a:srgbClr val="FFFFFF"/>
                 </a:solidFill>
@@ -12645,264 +12958,30 @@
                 <a:ea typeface="Arial" pitchFamily="34" charset="-122"/>
                 <a:cs typeface="Arial" pitchFamily="34" charset="-120"/>
               </a:rPr>
-              <a:t>SITE OWNER</a:t>
-            </a:r>
-            <a:endParaRPr lang="en-US" sz="1050" dirty="0"/>
-          </a:p>
-        </p:txBody>
-      </p:sp>
-      <p:sp>
-        <p:nvSpPr>
-          <p:cNvPr id="9" name="Text 7"/>
-          <p:cNvSpPr/>
-          <p:nvPr/>
-        </p:nvSpPr>
-        <p:spPr>
-          <a:xfrm>
-            <a:off x="877824" y="2231136"/>
-            <a:ext cx="3980688" cy="219456"/>
-          </a:xfrm>
-          <a:prstGeom prst="rect">
-            <a:avLst/>
-          </a:prstGeom>
-          <a:noFill/>
-          <a:ln/>
-        </p:spPr>
-        <p:txBody>
-          <a:bodyPr wrap="square" lIns="0" tIns="0" rIns="0" bIns="0" rtlCol="0" anchor="ctr"/>
-          <a:lstStyle/>
-          <a:p>
-            <a:pPr marL="0" indent="0">
-              <a:buNone/>
-            </a:pPr>
-            <a:r>
-              <a:rPr lang="en-US" sz="900" b="1" kern="0" spc="70" dirty="0">
-                <a:solidFill>
-                  <a:srgbClr val="2F75B5"/>
-                </a:solidFill>
-                <a:latin typeface="Arial" pitchFamily="34" charset="0"/>
-                <a:ea typeface="Arial" pitchFamily="34" charset="-122"/>
-                <a:cs typeface="Arial" pitchFamily="34" charset="-120"/>
-              </a:rPr>
-              <a:t>NAME OF SITE</a:t>
-            </a:r>
-            <a:endParaRPr lang="en-US" sz="900" dirty="0"/>
-          </a:p>
-        </p:txBody>
-      </p:sp>
-      <p:sp>
-        <p:nvSpPr>
-          <p:cNvPr id="10" name="Text 8"/>
-          <p:cNvSpPr/>
-          <p:nvPr/>
-        </p:nvSpPr>
-        <p:spPr>
-          <a:xfrm>
-            <a:off x="877824" y="2468880"/>
-            <a:ext cx="3980688" cy="292608"/>
-          </a:xfrm>
-          <a:prstGeom prst="rect">
-            <a:avLst/>
-          </a:prstGeom>
-          <a:noFill/>
-          <a:ln/>
-        </p:spPr>
-        <p:txBody>
-          <a:bodyPr wrap="square" lIns="0" tIns="0" rIns="0" bIns="0" rtlCol="0" anchor="ctr"/>
-          <a:lstStyle/>
-          <a:p>
-            <a:pPr marL="0" indent="0">
-              <a:buNone/>
-            </a:pPr>
-            <a:r>
-              <a:rPr lang="en-US" sz="1300" dirty="0">
-                <a:solidFill>
-                  <a:srgbClr val="222222"/>
-                </a:solidFill>
-                <a:latin typeface="Arial" pitchFamily="34" charset="0"/>
-                <a:ea typeface="Arial" pitchFamily="34" charset="-122"/>
-                <a:cs typeface="Arial" pitchFamily="34" charset="-120"/>
-              </a:rPr>
-              <a:t>Regenta, Jamshedpur</a:t>
-            </a:r>
-            <a:endParaRPr lang="en-US" sz="1300" dirty="0"/>
-          </a:p>
-        </p:txBody>
-      </p:sp>
-      <p:sp>
-        <p:nvSpPr>
-          <p:cNvPr id="11" name="Text 9"/>
-          <p:cNvSpPr/>
-          <p:nvPr/>
-        </p:nvSpPr>
-        <p:spPr>
-          <a:xfrm>
-            <a:off x="877824" y="2980944"/>
-            <a:ext cx="3980688" cy="219456"/>
-          </a:xfrm>
-          <a:prstGeom prst="rect">
-            <a:avLst/>
-          </a:prstGeom>
-          <a:noFill/>
-          <a:ln/>
-        </p:spPr>
-        <p:txBody>
-          <a:bodyPr wrap="square" lIns="0" tIns="0" rIns="0" bIns="0" rtlCol="0" anchor="ctr"/>
-          <a:lstStyle/>
-          <a:p>
-            <a:pPr marL="0" indent="0">
-              <a:buNone/>
-            </a:pPr>
-            <a:r>
-              <a:rPr lang="en-US" sz="900" b="1" kern="0" spc="70" dirty="0">
-                <a:solidFill>
-                  <a:srgbClr val="2F75B5"/>
-                </a:solidFill>
-                <a:latin typeface="Arial" pitchFamily="34" charset="0"/>
-                <a:ea typeface="Arial" pitchFamily="34" charset="-122"/>
-                <a:cs typeface="Arial" pitchFamily="34" charset="-120"/>
-              </a:rPr>
-              <a:t>NAME OF OWNER</a:t>
-            </a:r>
-            <a:endParaRPr lang="en-US" sz="900" dirty="0"/>
-          </a:p>
-        </p:txBody>
-      </p:sp>
-      <p:sp>
-        <p:nvSpPr>
-          <p:cNvPr id="12" name="Text 10"/>
-          <p:cNvSpPr/>
-          <p:nvPr/>
-        </p:nvSpPr>
-        <p:spPr>
-          <a:xfrm>
-            <a:off x="877824" y="3218688"/>
-            <a:ext cx="3980688" cy="292608"/>
-          </a:xfrm>
-          <a:prstGeom prst="rect">
-            <a:avLst/>
-          </a:prstGeom>
-          <a:noFill/>
-          <a:ln/>
-        </p:spPr>
-        <p:txBody>
-          <a:bodyPr wrap="square" lIns="0" tIns="0" rIns="0" bIns="0" rtlCol="0" anchor="ctr"/>
-          <a:lstStyle/>
-          <a:p>
-            <a:pPr marL="0" indent="0">
-              <a:buNone/>
-            </a:pPr>
-            <a:r>
-              <a:rPr lang="en-US" sz="1300" dirty="0">
-                <a:solidFill>
-                  <a:srgbClr val="222222"/>
-                </a:solidFill>
-                <a:latin typeface="Arial" pitchFamily="34" charset="0"/>
-                <a:ea typeface="Arial" pitchFamily="34" charset="-122"/>
-                <a:cs typeface="Arial" pitchFamily="34" charset="-120"/>
-              </a:rPr>
-              <a:t>Mr. Harish</a:t>
-            </a:r>
-            <a:endParaRPr lang="en-US" sz="1300" dirty="0"/>
-          </a:p>
-        </p:txBody>
-      </p:sp>
-      <p:sp>
-        <p:nvSpPr>
-          <p:cNvPr id="13" name="Text 11"/>
-          <p:cNvSpPr/>
-          <p:nvPr/>
-        </p:nvSpPr>
-        <p:spPr>
-          <a:xfrm>
-            <a:off x="877824" y="3730752"/>
-            <a:ext cx="3980688" cy="219456"/>
-          </a:xfrm>
-          <a:prstGeom prst="rect">
-            <a:avLst/>
-          </a:prstGeom>
-          <a:noFill/>
-          <a:ln/>
-        </p:spPr>
-        <p:txBody>
-          <a:bodyPr wrap="square" lIns="0" tIns="0" rIns="0" bIns="0" rtlCol="0" anchor="ctr"/>
-          <a:lstStyle/>
-          <a:p>
-            <a:pPr marL="0" indent="0">
-              <a:buNone/>
-            </a:pPr>
-            <a:r>
-              <a:rPr lang="en-US" sz="900" b="1" kern="0" spc="70" dirty="0">
-                <a:solidFill>
-                  <a:srgbClr val="2F75B5"/>
-                </a:solidFill>
-                <a:latin typeface="Arial" pitchFamily="34" charset="0"/>
-                <a:ea typeface="Arial" pitchFamily="34" charset="-122"/>
-                <a:cs typeface="Arial" pitchFamily="34" charset="-120"/>
-              </a:rPr>
-              <a:t>CONTACT</a:t>
-            </a:r>
-            <a:endParaRPr lang="en-US" sz="900" dirty="0"/>
-          </a:p>
-        </p:txBody>
-      </p:sp>
-      <p:sp>
-        <p:nvSpPr>
-          <p:cNvPr id="14" name="Text 12"/>
-          <p:cNvSpPr/>
-          <p:nvPr/>
-        </p:nvSpPr>
-        <p:spPr>
-          <a:xfrm>
-            <a:off x="877824" y="3968496"/>
-            <a:ext cx="3980688" cy="292608"/>
-          </a:xfrm>
-          <a:prstGeom prst="rect">
-            <a:avLst/>
-          </a:prstGeom>
-          <a:noFill/>
-          <a:ln/>
-        </p:spPr>
-        <p:txBody>
-          <a:bodyPr wrap="square" lIns="0" tIns="0" rIns="0" bIns="0" rtlCol="0" anchor="ctr"/>
-          <a:lstStyle/>
-          <a:p>
-            <a:pPr marL="0" indent="0">
-              <a:buNone/>
-            </a:pPr>
-            <a:r>
-              <a:rPr lang="en-US" sz="1300" dirty="0">
-                <a:solidFill>
-                  <a:srgbClr val="222222"/>
-                </a:solidFill>
-                <a:latin typeface="Arial" pitchFamily="34" charset="0"/>
-                <a:ea typeface="Arial" pitchFamily="34" charset="-122"/>
-                <a:cs typeface="Arial" pitchFamily="34" charset="-120"/>
-              </a:rPr>
-              <a:t>9234000011</a:t>
-            </a:r>
-            <a:endParaRPr lang="en-US" sz="1300" dirty="0"/>
-          </a:p>
-        </p:txBody>
-      </p:sp>
-      <p:sp>
-        <p:nvSpPr>
-          <p:cNvPr id="15" name="Shape 13"/>
-          <p:cNvSpPr/>
-          <p:nvPr/>
-        </p:nvSpPr>
-        <p:spPr>
-          <a:xfrm>
-            <a:off x="5352288" y="1572768"/>
-            <a:ext cx="4419600" cy="2880360"/>
+              <a:t>CURRENT MONTH</a:t>
+            </a:r>
+            <a:endParaRPr lang="en-US" sz="1100" dirty="0"/>
+          </a:p>
+        </p:txBody>
+      </p:sp>
+      <p:sp>
+        <p:nvSpPr>
+          <p:cNvPr id="12" name="Shape 10"/>
+          <p:cNvSpPr/>
+          <p:nvPr/>
+        </p:nvSpPr>
+        <p:spPr>
+          <a:xfrm>
+            <a:off x="7699248" y="2212848"/>
+            <a:ext cx="6766560" cy="5605272"/>
           </a:xfrm>
           <a:prstGeom prst="roundRect">
             <a:avLst>
-              <a:gd name="adj" fmla="val 1587"/>
+              <a:gd name="adj" fmla="val 971"/>
             </a:avLst>
           </a:prstGeom>
           <a:solidFill>
-            <a:srgbClr val="FFFFFF"/>
+            <a:srgbClr val="F0F1F3"/>
           </a:solidFill>
           <a:ln w="12700">
             <a:solidFill>
@@ -12921,14 +13000,87 @@
       </p:sp>
       <p:sp>
         <p:nvSpPr>
-          <p:cNvPr id="16" name="Shape 14"/>
-          <p:cNvSpPr/>
-          <p:nvPr/>
-        </p:nvSpPr>
-        <p:spPr>
-          <a:xfrm>
-            <a:off x="5352288" y="1572768"/>
-            <a:ext cx="4419600" cy="457200"/>
+          <p:cNvPr id="13" name="Text 11"/>
+          <p:cNvSpPr/>
+          <p:nvPr/>
+        </p:nvSpPr>
+        <p:spPr>
+          <a:xfrm>
+            <a:off x="7973568" y="4709160"/>
+            <a:ext cx="6217920" cy="457200"/>
+          </a:xfrm>
+          <a:prstGeom prst="rect">
+            <a:avLst/>
+          </a:prstGeom>
+          <a:noFill/>
+          <a:ln/>
+        </p:spPr>
+        <p:txBody>
+          <a:bodyPr wrap="square" lIns="0" tIns="0" rIns="0" bIns="0" rtlCol="0" anchor="ctr"/>
+          <a:lstStyle/>
+          <a:p>
+            <a:pPr marL="0" indent="0" algn="ctr">
+              <a:buNone/>
+            </a:pPr>
+            <a:r>
+              <a:rPr lang="en-US" sz="1200" i="1" dirty="0">
+                <a:solidFill>
+                  <a:srgbClr val="9AA0A6"/>
+                </a:solidFill>
+                <a:latin typeface="Arial" pitchFamily="34" charset="0"/>
+                <a:ea typeface="Arial" pitchFamily="34" charset="-122"/>
+                <a:cs typeface="Arial" pitchFamily="34" charset="-120"/>
+              </a:rPr>
+              <a:t>Photograph awaited</a:t>
+            </a:r>
+            <a:endParaRPr lang="en-US" sz="1200" dirty="0"/>
+          </a:p>
+        </p:txBody>
+      </p:sp>
+      <p:sp>
+        <p:nvSpPr>
+          <p:cNvPr id="14" name="Shape 12"/>
+          <p:cNvSpPr/>
+          <p:nvPr/>
+        </p:nvSpPr>
+        <p:spPr>
+          <a:xfrm>
+            <a:off x="658368" y="7973568"/>
+            <a:ext cx="4694530" cy="1463040"/>
+          </a:xfrm>
+          <a:prstGeom prst="roundRect">
+            <a:avLst>
+              <a:gd name="adj" fmla="val 2439"/>
+            </a:avLst>
+          </a:prstGeom>
+          <a:solidFill>
+            <a:srgbClr val="FFFFFF"/>
+          </a:solidFill>
+          <a:ln w="12700">
+            <a:solidFill>
+              <a:srgbClr val="D6DBE2"/>
+            </a:solidFill>
+            <a:prstDash val="solid"/>
+          </a:ln>
+        </p:spPr>
+        <p:txBody>
+          <a:bodyPr/>
+          <a:lstStyle/>
+          <a:p>
+            <a:endParaRPr/>
+          </a:p>
+        </p:txBody>
+      </p:sp>
+      <p:sp>
+        <p:nvSpPr>
+          <p:cNvPr id="15" name="Shape 13"/>
+          <p:cNvSpPr/>
+          <p:nvPr/>
+        </p:nvSpPr>
+        <p:spPr>
+          <a:xfrm>
+            <a:off x="658368" y="7973568"/>
+            <a:ext cx="4694530" cy="402336"/>
           </a:xfrm>
           <a:prstGeom prst="rect">
             <a:avLst/>
@@ -12953,40 +13105,55 @@
       </p:sp>
       <p:sp>
         <p:nvSpPr>
+          <p:cNvPr id="16" name="Text 14"/>
+          <p:cNvSpPr/>
+          <p:nvPr/>
+        </p:nvSpPr>
+        <p:spPr>
+          <a:xfrm>
+            <a:off x="822960" y="7973568"/>
+            <a:ext cx="4365346" cy="402336"/>
+          </a:xfrm>
+          <a:prstGeom prst="rect">
+            <a:avLst/>
+          </a:prstGeom>
+          <a:noFill/>
+          <a:ln/>
+        </p:spPr>
+        <p:txBody>
+          <a:bodyPr wrap="square" lIns="0" tIns="0" rIns="0" bIns="0" rtlCol="0" anchor="ctr"/>
+          <a:lstStyle/>
+          <a:p>
+            <a:r>
+              <a:t>SITE VIDEO</a:t>
+            </a:r>
+          </a:p>
+        </p:txBody>
+      </p:sp>
+      <p:sp>
+        <p:nvSpPr>
           <p:cNvPr id="17" name="Text 15"/>
           <p:cNvSpPr/>
           <p:nvPr/>
         </p:nvSpPr>
         <p:spPr>
           <a:xfrm>
-            <a:off x="5571744" y="1572768"/>
-            <a:ext cx="3980688" cy="457200"/>
-          </a:xfrm>
-          <a:prstGeom prst="rect">
-            <a:avLst/>
-          </a:prstGeom>
-          <a:noFill/>
-          <a:ln/>
-        </p:spPr>
-        <p:txBody>
-          <a:bodyPr wrap="square" lIns="0" tIns="0" rIns="0" bIns="0" rtlCol="0" anchor="ctr"/>
-          <a:lstStyle/>
-          <a:p>
-            <a:pPr marL="0" indent="0">
-              <a:buNone/>
-            </a:pPr>
-            <a:r>
-              <a:rPr lang="en-US" sz="1050" b="1" kern="0" spc="80" dirty="0">
-                <a:solidFill>
-                  <a:srgbClr val="FFFFFF"/>
-                </a:solidFill>
-                <a:latin typeface="Arial" pitchFamily="34" charset="0"/>
-                <a:ea typeface="Arial" pitchFamily="34" charset="-122"/>
-                <a:cs typeface="Arial" pitchFamily="34" charset="-120"/>
-              </a:rPr>
-              <a:t>PROJECT MANAGEMENT</a:t>
-            </a:r>
-            <a:endParaRPr lang="en-US" sz="1050" dirty="0"/>
+            <a:off x="859536" y="8540496"/>
+            <a:ext cx="1691640" cy="329184"/>
+          </a:xfrm>
+          <a:prstGeom prst="rect">
+            <a:avLst/>
+          </a:prstGeom>
+          <a:noFill/>
+          <a:ln/>
+        </p:spPr>
+        <p:txBody>
+          <a:bodyPr wrap="square" lIns="0" tIns="0" rIns="0" bIns="0" rtlCol="0" anchor="ctr"/>
+          <a:lstStyle/>
+          <a:p>
+            <a:r>
+              <a:t>Site walkthrough</a:t>
+            </a:r>
           </a:p>
         </p:txBody>
       </p:sp>
@@ -12998,246 +13165,51 @@
         </p:nvSpPr>
         <p:spPr>
           <a:xfrm>
-            <a:off x="5571744" y="2231136"/>
-            <a:ext cx="3980688" cy="219456"/>
-          </a:xfrm>
-          <a:prstGeom prst="rect">
-            <a:avLst/>
-          </a:prstGeom>
-          <a:noFill/>
-          <a:ln/>
-        </p:spPr>
-        <p:txBody>
-          <a:bodyPr wrap="square" lIns="0" tIns="0" rIns="0" bIns="0" rtlCol="0" anchor="ctr"/>
-          <a:lstStyle/>
-          <a:p>
-            <a:pPr marL="0" indent="0">
-              <a:buNone/>
-            </a:pPr>
-            <a:r>
-              <a:rPr lang="en-US" sz="900" b="1" kern="0" spc="70" dirty="0">
-                <a:solidFill>
-                  <a:srgbClr val="2F75B5"/>
-                </a:solidFill>
-                <a:latin typeface="Arial" pitchFamily="34" charset="0"/>
-                <a:ea typeface="Arial" pitchFamily="34" charset="-122"/>
-                <a:cs typeface="Arial" pitchFamily="34" charset="-120"/>
-              </a:rPr>
-              <a:t>PROJECT MANAGER AT SITE</a:t>
-            </a:r>
-            <a:endParaRPr lang="en-US" sz="900" dirty="0"/>
-          </a:p>
-        </p:txBody>
-      </p:sp>
-      <p:sp>
-        <p:nvSpPr>
-          <p:cNvPr id="19" name="Text 17"/>
-          <p:cNvSpPr/>
-          <p:nvPr/>
-        </p:nvSpPr>
-        <p:spPr>
-          <a:xfrm>
-            <a:off x="5571744" y="2468880"/>
-            <a:ext cx="3980688" cy="292608"/>
-          </a:xfrm>
-          <a:prstGeom prst="rect">
-            <a:avLst/>
-          </a:prstGeom>
-          <a:noFill/>
-          <a:ln/>
-        </p:spPr>
-        <p:txBody>
-          <a:bodyPr wrap="square" lIns="0" tIns="0" rIns="0" bIns="0" rtlCol="0" anchor="ctr"/>
-          <a:lstStyle/>
-          <a:p>
-            <a:pPr marL="0" indent="0">
-              <a:buNone/>
-            </a:pPr>
-            <a:r>
-              <a:rPr lang="en-US" sz="1300" dirty="0">
-                <a:solidFill>
-                  <a:srgbClr val="222222"/>
-                </a:solidFill>
-                <a:latin typeface="Arial" pitchFamily="34" charset="0"/>
-                <a:ea typeface="Arial" pitchFamily="34" charset="-122"/>
-                <a:cs typeface="Arial" pitchFamily="34" charset="-120"/>
-              </a:rPr>
-              <a:t>Mr. Joydeep</a:t>
-            </a:r>
-            <a:endParaRPr lang="en-US" sz="1300" dirty="0"/>
-          </a:p>
-        </p:txBody>
-      </p:sp>
-      <p:sp>
-        <p:nvSpPr>
-          <p:cNvPr id="20" name="Text 18"/>
-          <p:cNvSpPr/>
-          <p:nvPr/>
-        </p:nvSpPr>
-        <p:spPr>
-          <a:xfrm>
-            <a:off x="5571744" y="2980944"/>
-            <a:ext cx="3980688" cy="219456"/>
-          </a:xfrm>
-          <a:prstGeom prst="rect">
-            <a:avLst/>
-          </a:prstGeom>
-          <a:noFill/>
-          <a:ln/>
-        </p:spPr>
-        <p:txBody>
-          <a:bodyPr wrap="square" lIns="0" tIns="0" rIns="0" bIns="0" rtlCol="0" anchor="ctr"/>
-          <a:lstStyle/>
-          <a:p>
-            <a:pPr marL="0" indent="0">
-              <a:buNone/>
-            </a:pPr>
-            <a:r>
-              <a:rPr lang="en-US" sz="900" b="1" kern="0" spc="70" dirty="0">
-                <a:solidFill>
-                  <a:srgbClr val="2F75B5"/>
-                </a:solidFill>
-                <a:latin typeface="Arial" pitchFamily="34" charset="0"/>
-                <a:ea typeface="Arial" pitchFamily="34" charset="-122"/>
-                <a:cs typeface="Arial" pitchFamily="34" charset="-120"/>
-              </a:rPr>
-              <a:t>CONTACT</a:t>
-            </a:r>
-            <a:endParaRPr lang="en-US" sz="900" dirty="0"/>
-          </a:p>
-        </p:txBody>
-      </p:sp>
-      <p:sp>
-        <p:nvSpPr>
-          <p:cNvPr id="21" name="Text 19"/>
-          <p:cNvSpPr/>
-          <p:nvPr/>
-        </p:nvSpPr>
-        <p:spPr>
-          <a:xfrm>
-            <a:off x="5571744" y="3218688"/>
-            <a:ext cx="3980688" cy="292608"/>
-          </a:xfrm>
-          <a:prstGeom prst="rect">
-            <a:avLst/>
-          </a:prstGeom>
-          <a:noFill/>
-          <a:ln/>
-        </p:spPr>
-        <p:txBody>
-          <a:bodyPr wrap="square" lIns="0" tIns="0" rIns="0" bIns="0" rtlCol="0" anchor="ctr"/>
-          <a:lstStyle/>
-          <a:p>
-            <a:pPr marL="0" indent="0">
-              <a:buNone/>
-            </a:pPr>
-            <a:r>
-              <a:rPr lang="en-US" sz="1300" dirty="0">
-                <a:solidFill>
-                  <a:srgbClr val="222222"/>
-                </a:solidFill>
-                <a:latin typeface="Arial" pitchFamily="34" charset="0"/>
-                <a:ea typeface="Arial" pitchFamily="34" charset="-122"/>
-                <a:cs typeface="Arial" pitchFamily="34" charset="-120"/>
-              </a:rPr>
-              <a:t>9234000020</a:t>
-            </a:r>
-            <a:endParaRPr lang="en-US" sz="1300" dirty="0"/>
-          </a:p>
-        </p:txBody>
-      </p:sp>
-      <p:sp>
-        <p:nvSpPr>
-          <p:cNvPr id="22" name="Text 20"/>
-          <p:cNvSpPr/>
-          <p:nvPr/>
-        </p:nvSpPr>
-        <p:spPr>
-          <a:xfrm>
-            <a:off x="5571744" y="3730752"/>
-            <a:ext cx="3980688" cy="219456"/>
-          </a:xfrm>
-          <a:prstGeom prst="rect">
-            <a:avLst/>
-          </a:prstGeom>
-          <a:noFill/>
-          <a:ln/>
-        </p:spPr>
-        <p:txBody>
-          <a:bodyPr wrap="square" lIns="0" tIns="0" rIns="0" bIns="0" rtlCol="0" anchor="ctr"/>
-          <a:lstStyle/>
-          <a:p>
-            <a:pPr marL="0" indent="0">
-              <a:buNone/>
-            </a:pPr>
-            <a:r>
-              <a:rPr lang="en-US" sz="900" b="1" kern="0" spc="70" dirty="0">
-                <a:solidFill>
-                  <a:srgbClr val="2F75B5"/>
-                </a:solidFill>
-                <a:latin typeface="Arial" pitchFamily="34" charset="0"/>
-                <a:ea typeface="Arial" pitchFamily="34" charset="-122"/>
-                <a:cs typeface="Arial" pitchFamily="34" charset="-120"/>
-              </a:rPr>
-              <a:t>CLUSTER HEAD</a:t>
-            </a:r>
-            <a:endParaRPr lang="en-US" sz="900" dirty="0"/>
-          </a:p>
-        </p:txBody>
-      </p:sp>
-      <p:sp>
-        <p:nvSpPr>
-          <p:cNvPr id="23" name="Text 21"/>
-          <p:cNvSpPr/>
-          <p:nvPr/>
-        </p:nvSpPr>
-        <p:spPr>
-          <a:xfrm>
-            <a:off x="5571744" y="3968496"/>
-            <a:ext cx="3980688" cy="292608"/>
-          </a:xfrm>
-          <a:prstGeom prst="rect">
-            <a:avLst/>
-          </a:prstGeom>
-          <a:noFill/>
-          <a:ln/>
-        </p:spPr>
-        <p:txBody>
-          <a:bodyPr wrap="square" lIns="0" tIns="0" rIns="0" bIns="0" rtlCol="0" anchor="ctr"/>
-          <a:lstStyle/>
-          <a:p>
-            <a:pPr marL="0" indent="0">
-              <a:buNone/>
-            </a:pPr>
-            <a:r>
-              <a:rPr lang="en-US" sz="1300" dirty="0">
-                <a:solidFill>
-                  <a:srgbClr val="222222"/>
-                </a:solidFill>
-                <a:latin typeface="Arial" pitchFamily="34" charset="0"/>
-                <a:ea typeface="Arial" pitchFamily="34" charset="-122"/>
-                <a:cs typeface="Arial" pitchFamily="34" charset="-120"/>
-              </a:rPr>
-              <a:t>Mr. Chandan Chaudhary</a:t>
-            </a:r>
-            <a:endParaRPr lang="en-US" sz="1300" dirty="0"/>
-          </a:p>
-        </p:txBody>
-      </p:sp>
-      <p:sp>
-        <p:nvSpPr>
-          <p:cNvPr id="24" name="Shape 22"/>
-          <p:cNvSpPr/>
-          <p:nvPr/>
-        </p:nvSpPr>
-        <p:spPr>
-          <a:xfrm>
-            <a:off x="10046208" y="1572768"/>
-            <a:ext cx="4419600" cy="2880360"/>
+            <a:off x="2624328" y="8540496"/>
+            <a:ext cx="2499970" cy="329184"/>
+          </a:xfrm>
+          <a:prstGeom prst="rect">
+            <a:avLst/>
+          </a:prstGeom>
+          <a:noFill/>
+          <a:ln/>
+        </p:spPr>
+        <p:txBody>
+          <a:bodyPr wrap="square" lIns="0" tIns="0" rIns="0" bIns="0" rtlCol="0" anchor="ctr"/>
+          <a:lstStyle/>
+          <a:p>
+            <a:pPr marL="0" indent="0">
+              <a:buNone/>
+            </a:pPr>
+            <a:r>
+              <a:rPr lang="en-US" sz="1000" dirty="0">
+                <a:solidFill>
+                  <a:srgbClr val="9AA0A6"/>
+                </a:solidFill>
+                <a:latin typeface="Arial" pitchFamily="34" charset="0"/>
+                <a:ea typeface="Arial" pitchFamily="34" charset="-122"/>
+                <a:cs typeface="Arial" pitchFamily="34" charset="-120"/>
+              </a:rPr>
+              <a:t>—</a:t>
+            </a:r>
+            <a:endParaRPr lang="en-US" sz="1000" dirty="0"/>
+          </a:p>
+        </p:txBody>
+      </p:sp>
+      <p:sp>
+        <p:nvSpPr>
+          <p:cNvPr id="23" name="Shape 21"/>
+          <p:cNvSpPr/>
+          <p:nvPr/>
+        </p:nvSpPr>
+        <p:spPr>
+          <a:xfrm>
+            <a:off x="5627218" y="7973568"/>
+            <a:ext cx="8838590" cy="1463040"/>
           </a:xfrm>
           <a:prstGeom prst="roundRect">
             <a:avLst>
-              <a:gd name="adj" fmla="val 1587"/>
+              <a:gd name="adj" fmla="val 2439"/>
             </a:avLst>
           </a:prstGeom>
           <a:solidFill>
@@ -13260,20 +13232,20 @@
       </p:sp>
       <p:sp>
         <p:nvSpPr>
-          <p:cNvPr id="25" name="Shape 23"/>
-          <p:cNvSpPr/>
-          <p:nvPr/>
-        </p:nvSpPr>
-        <p:spPr>
-          <a:xfrm>
-            <a:off x="10046208" y="1572768"/>
-            <a:ext cx="4419600" cy="457200"/>
-          </a:xfrm>
-          <a:prstGeom prst="rect">
-            <a:avLst/>
-          </a:prstGeom>
-          <a:solidFill>
-            <a:srgbClr val="2F75B5"/>
+          <p:cNvPr id="24" name="Shape 22"/>
+          <p:cNvSpPr/>
+          <p:nvPr/>
+        </p:nvSpPr>
+        <p:spPr>
+          <a:xfrm>
+            <a:off x="5627218" y="7973568"/>
+            <a:ext cx="8838590" cy="402336"/>
+          </a:xfrm>
+          <a:prstGeom prst="rect">
+            <a:avLst/>
+          </a:prstGeom>
+          <a:solidFill>
+            <a:srgbClr val="17365D"/>
           </a:solidFill>
           <a:ln w="12700">
             <a:solidFill>
@@ -13292,295 +13264,103 @@
       </p:sp>
       <p:sp>
         <p:nvSpPr>
+          <p:cNvPr id="25" name="Text 23"/>
+          <p:cNvSpPr/>
+          <p:nvPr/>
+        </p:nvSpPr>
+        <p:spPr>
+          <a:xfrm>
+            <a:off x="5791810" y="7973568"/>
+            <a:ext cx="8509406" cy="402336"/>
+          </a:xfrm>
+          <a:prstGeom prst="rect">
+            <a:avLst/>
+          </a:prstGeom>
+          <a:noFill/>
+          <a:ln/>
+        </p:spPr>
+        <p:txBody>
+          <a:bodyPr wrap="square" lIns="0" tIns="0" rIns="0" bIns="0" rtlCol="0" anchor="ctr"/>
+          <a:lstStyle/>
+          <a:p>
+            <a:pPr marL="0" indent="0">
+              <a:buNone/>
+            </a:pPr>
+            <a:r>
+              <a:rPr lang="en-US" sz="1050" b="1" kern="0" spc="70" dirty="0">
+                <a:solidFill>
+                  <a:srgbClr val="FFFFFF"/>
+                </a:solidFill>
+                <a:latin typeface="Arial" pitchFamily="34" charset="0"/>
+                <a:ea typeface="Arial" pitchFamily="34" charset="-122"/>
+                <a:cs typeface="Arial" pitchFamily="34" charset="-120"/>
+              </a:rPr>
+              <a:t>FEEDBACK FOR THIS SPACE</a:t>
+            </a:r>
+            <a:endParaRPr lang="en-US" sz="1050" dirty="0"/>
+          </a:p>
+        </p:txBody>
+      </p:sp>
+      <p:sp>
+        <p:nvSpPr>
           <p:cNvPr id="26" name="Text 24"/>
           <p:cNvSpPr/>
           <p:nvPr/>
         </p:nvSpPr>
         <p:spPr>
           <a:xfrm>
-            <a:off x="10265664" y="1572768"/>
-            <a:ext cx="3980688" cy="457200"/>
-          </a:xfrm>
-          <a:prstGeom prst="rect">
-            <a:avLst/>
-          </a:prstGeom>
-          <a:noFill/>
-          <a:ln/>
-        </p:spPr>
-        <p:txBody>
-          <a:bodyPr wrap="square" lIns="0" tIns="0" rIns="0" bIns="0" rtlCol="0" anchor="ctr"/>
-          <a:lstStyle/>
-          <a:p>
-            <a:pPr marL="0" indent="0">
-              <a:buNone/>
-            </a:pPr>
-            <a:r>
-              <a:rPr lang="en-US" sz="1050" b="1" kern="0" spc="80" dirty="0">
-                <a:solidFill>
-                  <a:srgbClr val="FFFFFF"/>
-                </a:solidFill>
-                <a:latin typeface="Arial" pitchFamily="34" charset="0"/>
-                <a:ea typeface="Arial" pitchFamily="34" charset="-122"/>
-                <a:cs typeface="Arial" pitchFamily="34" charset="-120"/>
-              </a:rPr>
-              <a:t>ARCHITECTURE</a:t>
-            </a:r>
-            <a:endParaRPr lang="en-US" sz="1050" dirty="0"/>
-          </a:p>
-        </p:txBody>
-      </p:sp>
-      <p:sp>
-        <p:nvSpPr>
-          <p:cNvPr id="27" name="Text 25"/>
-          <p:cNvSpPr/>
-          <p:nvPr/>
-        </p:nvSpPr>
-        <p:spPr>
-          <a:xfrm>
-            <a:off x="10265664" y="2231136"/>
-            <a:ext cx="3980688" cy="219456"/>
-          </a:xfrm>
-          <a:prstGeom prst="rect">
-            <a:avLst/>
-          </a:prstGeom>
-          <a:noFill/>
-          <a:ln/>
-        </p:spPr>
-        <p:txBody>
-          <a:bodyPr wrap="square" lIns="0" tIns="0" rIns="0" bIns="0" rtlCol="0" anchor="ctr"/>
-          <a:lstStyle/>
-          <a:p>
-            <a:pPr marL="0" indent="0">
-              <a:buNone/>
-            </a:pPr>
-            <a:r>
-              <a:rPr lang="en-US" sz="900" b="1" kern="0" spc="70" dirty="0">
-                <a:solidFill>
-                  <a:srgbClr val="2F75B5"/>
-                </a:solidFill>
-                <a:latin typeface="Arial" pitchFamily="34" charset="0"/>
-                <a:ea typeface="Arial" pitchFamily="34" charset="-122"/>
-                <a:cs typeface="Arial" pitchFamily="34" charset="-120"/>
-              </a:rPr>
-              <a:t>NAME OF ARCHITECT</a:t>
-            </a:r>
-            <a:endParaRPr lang="en-US" sz="900" dirty="0"/>
-          </a:p>
-        </p:txBody>
-      </p:sp>
-      <p:sp>
-        <p:nvSpPr>
-          <p:cNvPr id="28" name="Text 26"/>
-          <p:cNvSpPr/>
-          <p:nvPr/>
-        </p:nvSpPr>
-        <p:spPr>
-          <a:xfrm>
-            <a:off x="10265664" y="2468880"/>
-            <a:ext cx="3980688" cy="292608"/>
-          </a:xfrm>
-          <a:prstGeom prst="rect">
-            <a:avLst/>
-          </a:prstGeom>
-          <a:noFill/>
-          <a:ln/>
-        </p:spPr>
-        <p:txBody>
-          <a:bodyPr wrap="square" lIns="0" tIns="0" rIns="0" bIns="0" rtlCol="0" anchor="ctr"/>
-          <a:lstStyle/>
-          <a:p>
-            <a:pPr marL="0" indent="0">
-              <a:buNone/>
-            </a:pPr>
-            <a:r>
-              <a:rPr lang="en-US" sz="1300" dirty="0">
-                <a:solidFill>
-                  <a:srgbClr val="222222"/>
-                </a:solidFill>
-                <a:latin typeface="Arial" pitchFamily="34" charset="0"/>
-                <a:ea typeface="Arial" pitchFamily="34" charset="-122"/>
-                <a:cs typeface="Arial" pitchFamily="34" charset="-120"/>
-              </a:rPr>
-              <a:t>Dimensions Graph</a:t>
-            </a:r>
-            <a:endParaRPr lang="en-US" sz="1300" dirty="0"/>
-          </a:p>
-        </p:txBody>
-      </p:sp>
-      <p:sp>
-        <p:nvSpPr>
-          <p:cNvPr id="29" name="Text 27"/>
-          <p:cNvSpPr/>
-          <p:nvPr/>
-        </p:nvSpPr>
-        <p:spPr>
-          <a:xfrm>
-            <a:off x="10265664" y="2980944"/>
-            <a:ext cx="3980688" cy="219456"/>
-          </a:xfrm>
-          <a:prstGeom prst="rect">
-            <a:avLst/>
-          </a:prstGeom>
-          <a:noFill/>
-          <a:ln/>
-        </p:spPr>
-        <p:txBody>
-          <a:bodyPr wrap="square" lIns="0" tIns="0" rIns="0" bIns="0" rtlCol="0" anchor="ctr"/>
-          <a:lstStyle/>
-          <a:p>
-            <a:pPr marL="0" indent="0">
-              <a:buNone/>
-            </a:pPr>
-            <a:r>
-              <a:rPr lang="en-US" sz="900" b="1" kern="0" spc="70" dirty="0">
-                <a:solidFill>
-                  <a:srgbClr val="2F75B5"/>
-                </a:solidFill>
-                <a:latin typeface="Arial" pitchFamily="34" charset="0"/>
-                <a:ea typeface="Arial" pitchFamily="34" charset="-122"/>
-                <a:cs typeface="Arial" pitchFamily="34" charset="-120"/>
-              </a:rPr>
-              <a:t>CONTACT</a:t>
-            </a:r>
-            <a:endParaRPr lang="en-US" sz="900" dirty="0"/>
-          </a:p>
-        </p:txBody>
-      </p:sp>
-      <p:sp>
-        <p:nvSpPr>
-          <p:cNvPr id="30" name="Text 28"/>
-          <p:cNvSpPr/>
-          <p:nvPr/>
-        </p:nvSpPr>
-        <p:spPr>
-          <a:xfrm>
-            <a:off x="10265664" y="3218688"/>
-            <a:ext cx="3980688" cy="292608"/>
-          </a:xfrm>
-          <a:prstGeom prst="rect">
-            <a:avLst/>
-          </a:prstGeom>
-          <a:noFill/>
-          <a:ln/>
-        </p:spPr>
-        <p:txBody>
-          <a:bodyPr wrap="square" lIns="0" tIns="0" rIns="0" bIns="0" rtlCol="0" anchor="ctr"/>
-          <a:lstStyle/>
-          <a:p>
-            <a:pPr marL="0" indent="0">
-              <a:buNone/>
-            </a:pPr>
-            <a:r>
-              <a:rPr lang="en-US" sz="1300" dirty="0">
-                <a:solidFill>
-                  <a:srgbClr val="222222"/>
-                </a:solidFill>
-                <a:latin typeface="Arial" pitchFamily="34" charset="0"/>
-                <a:ea typeface="Arial" pitchFamily="34" charset="-122"/>
-                <a:cs typeface="Arial" pitchFamily="34" charset="-120"/>
-              </a:rPr>
-              <a:t>9163755866</a:t>
-            </a:r>
-            <a:endParaRPr lang="en-US" sz="1300" dirty="0"/>
-          </a:p>
-        </p:txBody>
-      </p:sp>
-      <p:sp>
-        <p:nvSpPr>
-          <p:cNvPr id="31" name="Text 29"/>
-          <p:cNvSpPr/>
-          <p:nvPr/>
-        </p:nvSpPr>
-        <p:spPr>
-          <a:xfrm>
-            <a:off x="10265664" y="3730752"/>
-            <a:ext cx="3980688" cy="219456"/>
-          </a:xfrm>
-          <a:prstGeom prst="rect">
-            <a:avLst/>
-          </a:prstGeom>
-          <a:noFill/>
-          <a:ln/>
-        </p:spPr>
-        <p:txBody>
-          <a:bodyPr wrap="square" lIns="0" tIns="0" rIns="0" bIns="0" rtlCol="0" anchor="ctr"/>
-          <a:lstStyle/>
-          <a:p>
-            <a:pPr marL="0" indent="0">
-              <a:buNone/>
-            </a:pPr>
-            <a:r>
-              <a:rPr lang="en-US" sz="900" b="1" kern="0" spc="70" dirty="0">
-                <a:solidFill>
-                  <a:srgbClr val="2F75B5"/>
-                </a:solidFill>
-                <a:latin typeface="Arial" pitchFamily="34" charset="0"/>
-                <a:ea typeface="Arial" pitchFamily="34" charset="-122"/>
-                <a:cs typeface="Arial" pitchFamily="34" charset="-120"/>
-              </a:rPr>
-              <a:t>NO. OF ROOMS</a:t>
-            </a:r>
-            <a:endParaRPr lang="en-US" sz="900" dirty="0"/>
-          </a:p>
-        </p:txBody>
-      </p:sp>
-      <p:sp>
-        <p:nvSpPr>
-          <p:cNvPr id="32" name="Text 30"/>
-          <p:cNvSpPr/>
-          <p:nvPr/>
-        </p:nvSpPr>
-        <p:spPr>
-          <a:xfrm>
-            <a:off x="10265664" y="3968496"/>
-            <a:ext cx="3980688" cy="292608"/>
-          </a:xfrm>
-          <a:prstGeom prst="rect">
-            <a:avLst/>
-          </a:prstGeom>
-          <a:noFill/>
-          <a:ln/>
-        </p:spPr>
-        <p:txBody>
-          <a:bodyPr wrap="square" lIns="0" tIns="0" rIns="0" bIns="0" rtlCol="0" anchor="ctr"/>
-          <a:lstStyle/>
-          <a:p>
-            <a:pPr marL="0" indent="0">
-              <a:buNone/>
-            </a:pPr>
-            <a:r>
-              <a:rPr lang="en-US" sz="1300" dirty="0">
-                <a:solidFill>
-                  <a:srgbClr val="222222"/>
-                </a:solidFill>
-                <a:latin typeface="Arial" pitchFamily="34" charset="0"/>
-                <a:ea typeface="Arial" pitchFamily="34" charset="-122"/>
-                <a:cs typeface="Arial" pitchFamily="34" charset="-120"/>
-              </a:rPr>
-              <a:t>63</a:t>
-            </a:r>
-            <a:endParaRPr lang="en-US" sz="1300" dirty="0"/>
-          </a:p>
-        </p:txBody>
-      </p:sp>
-      <p:sp>
-        <p:nvSpPr>
-          <p:cNvPr id="33" name="Shape 31"/>
-          <p:cNvSpPr/>
-          <p:nvPr/>
-        </p:nvSpPr>
-        <p:spPr>
-          <a:xfrm>
-            <a:off x="658368" y="4709160"/>
-            <a:ext cx="3287268" cy="896112"/>
+            <a:off x="5828386" y="8485632"/>
+            <a:ext cx="8436254" cy="896112"/>
+          </a:xfrm>
+          <a:prstGeom prst="rect">
+            <a:avLst/>
+          </a:prstGeom>
+          <a:noFill/>
+          <a:ln/>
+        </p:spPr>
+        <p:txBody>
+          <a:bodyPr wrap="square" lIns="0" tIns="0" rIns="0" bIns="0" rtlCol="0" anchor="t"/>
+          <a:lstStyle/>
+          <a:p>
+            <a:pPr marL="0" indent="0">
+              <a:lnSpc>
+                <a:spcPts val="1600"/>
+              </a:lnSpc>
+              <a:buNone/>
+            </a:pPr>
+            <a:r>
+              <a:rPr lang="en-US" sz="1100" i="1" dirty="0">
+                <a:solidFill>
+                  <a:srgbClr val="9AA0A6"/>
+                </a:solidFill>
+                <a:latin typeface="Arial" pitchFamily="34" charset="0"/>
+                <a:ea typeface="Arial" pitchFamily="34" charset="-122"/>
+                <a:cs typeface="Arial" pitchFamily="34" charset="-120"/>
+              </a:rPr>
+              <a:t>To be recorded at the next site visit.</a:t>
+            </a:r>
+            <a:endParaRPr lang="en-US" sz="1100" dirty="0"/>
+          </a:p>
+        </p:txBody>
+      </p:sp>
+      <p:sp>
+        <p:nvSpPr>
+          <p:cNvPr id="27" name="Shape 25"/>
+          <p:cNvSpPr/>
+          <p:nvPr/>
+        </p:nvSpPr>
+        <p:spPr>
+          <a:xfrm>
+            <a:off x="658368" y="9482328"/>
+            <a:ext cx="13807440" cy="566928"/>
           </a:xfrm>
           <a:prstGeom prst="roundRect">
             <a:avLst>
-              <a:gd name="adj" fmla="val 5102"/>
+              <a:gd name="adj" fmla="val 8065"/>
             </a:avLst>
           </a:prstGeom>
           <a:solidFill>
-            <a:srgbClr val="FFFFFF"/>
+            <a:srgbClr val="EAF1F9"/>
           </a:solidFill>
           <a:ln w="12700">
             <a:solidFill>
@@ -13599,100 +13379,410 @@
       </p:sp>
       <p:sp>
         <p:nvSpPr>
-          <p:cNvPr id="34" name="Text 32"/>
-          <p:cNvSpPr/>
-          <p:nvPr/>
-        </p:nvSpPr>
-        <p:spPr>
-          <a:xfrm>
-            <a:off x="841248" y="4837176"/>
-            <a:ext cx="2921508" cy="219456"/>
-          </a:xfrm>
-          <a:prstGeom prst="rect">
-            <a:avLst/>
-          </a:prstGeom>
-          <a:noFill/>
-          <a:ln/>
-        </p:spPr>
-        <p:txBody>
-          <a:bodyPr wrap="square" lIns="0" tIns="0" rIns="0" bIns="0" rtlCol="0" anchor="ctr"/>
-          <a:lstStyle/>
-          <a:p>
-            <a:pPr marL="0" indent="0">
-              <a:buNone/>
-            </a:pPr>
-            <a:r>
-              <a:rPr lang="en-US" sz="900" b="1" kern="0" spc="70" dirty="0">
-                <a:solidFill>
-                  <a:srgbClr val="2F75B5"/>
-                </a:solidFill>
-                <a:latin typeface="Arial" pitchFamily="34" charset="0"/>
-                <a:ea typeface="Arial" pitchFamily="34" charset="-122"/>
-                <a:cs typeface="Arial" pitchFamily="34" charset="-120"/>
-              </a:rPr>
-              <a:t>CONTRACT TYPE</a:t>
-            </a:r>
-            <a:endParaRPr lang="en-US" sz="900" dirty="0"/>
-          </a:p>
-        </p:txBody>
-      </p:sp>
-      <p:sp>
-        <p:nvSpPr>
-          <p:cNvPr id="35" name="Text 33"/>
-          <p:cNvSpPr/>
-          <p:nvPr/>
-        </p:nvSpPr>
-        <p:spPr>
-          <a:xfrm>
-            <a:off x="841248" y="5093208"/>
-            <a:ext cx="2921508" cy="384048"/>
-          </a:xfrm>
-          <a:prstGeom prst="rect">
-            <a:avLst/>
-          </a:prstGeom>
-          <a:noFill/>
-          <a:ln/>
-        </p:spPr>
-        <p:txBody>
-          <a:bodyPr wrap="square" lIns="0" tIns="0" rIns="0" bIns="0" rtlCol="0" anchor="ctr"/>
-          <a:lstStyle/>
-          <a:p>
-            <a:pPr marL="0" indent="0">
-              <a:buNone/>
-            </a:pPr>
-            <a:r>
-              <a:rPr lang="en-US" sz="1400" b="1" dirty="0">
-                <a:solidFill>
-                  <a:srgbClr val="17365D"/>
-                </a:solidFill>
-                <a:latin typeface="Arial" pitchFamily="34" charset="0"/>
-                <a:ea typeface="Arial" pitchFamily="34" charset="-122"/>
-                <a:cs typeface="Arial" pitchFamily="34" charset="-120"/>
-              </a:rPr>
-              <a:t>Managed</a:t>
-            </a:r>
-            <a:endParaRPr lang="en-US" sz="1400" dirty="0"/>
-          </a:p>
-        </p:txBody>
-      </p:sp>
-      <p:sp>
-        <p:nvSpPr>
-          <p:cNvPr id="36" name="Shape 34"/>
-          <p:cNvSpPr/>
-          <p:nvPr/>
-        </p:nvSpPr>
-        <p:spPr>
-          <a:xfrm>
-            <a:off x="4165092" y="4709160"/>
-            <a:ext cx="3287268" cy="896112"/>
+          <p:cNvPr id="28" name="Text 26"/>
+          <p:cNvSpPr/>
+          <p:nvPr/>
+        </p:nvSpPr>
+        <p:spPr>
+          <a:xfrm>
+            <a:off x="932688" y="9509760"/>
+            <a:ext cx="13258800" cy="566928"/>
+          </a:xfrm>
+          <a:prstGeom prst="rect">
+            <a:avLst/>
+          </a:prstGeom>
+          <a:noFill/>
+          <a:ln/>
+        </p:spPr>
+        <p:txBody>
+          <a:bodyPr wrap="square" lIns="0" tIns="0" rIns="0" bIns="0" rtlCol="0" anchor="ctr"/>
+          <a:lstStyle/>
+          <a:p>
+            <a:r>
+              <a:t>Completion: —      ·      Last site visit: —      ·      Updated automatically from site form</a:t>
+            </a:r>
+          </a:p>
+        </p:txBody>
+      </p:sp>
+      <p:sp>
+        <p:nvSpPr>
+          <p:cNvPr id="29" name="Shape 27"/>
+          <p:cNvSpPr/>
+          <p:nvPr/>
+        </p:nvSpPr>
+        <p:spPr>
+          <a:xfrm>
+            <a:off x="0" y="10213848"/>
+            <a:ext cx="15124176" cy="32004"/>
+          </a:xfrm>
+          <a:prstGeom prst="rect">
+            <a:avLst/>
+          </a:prstGeom>
+          <a:solidFill>
+            <a:srgbClr val="17365D"/>
+          </a:solidFill>
+          <a:ln w="12700">
+            <a:solidFill>
+              <a:srgbClr val="17365D"/>
+            </a:solidFill>
+            <a:prstDash val="solid"/>
+          </a:ln>
+        </p:spPr>
+        <p:txBody>
+          <a:bodyPr/>
+          <a:lstStyle/>
+          <a:p>
+            <a:endParaRPr/>
+          </a:p>
+        </p:txBody>
+      </p:sp>
+      <p:sp>
+        <p:nvSpPr>
+          <p:cNvPr id="30" name="Text 28"/>
+          <p:cNvSpPr/>
+          <p:nvPr/>
+        </p:nvSpPr>
+        <p:spPr>
+          <a:xfrm>
+            <a:off x="658368" y="10287000"/>
+            <a:ext cx="8229600" cy="274320"/>
+          </a:xfrm>
+          <a:prstGeom prst="rect">
+            <a:avLst/>
+          </a:prstGeom>
+          <a:noFill/>
+          <a:ln/>
+        </p:spPr>
+        <p:txBody>
+          <a:bodyPr wrap="square" lIns="0" tIns="0" rIns="0" bIns="0" rtlCol="0" anchor="ctr"/>
+          <a:lstStyle/>
+          <a:p>
+            <a:pPr marL="0" indent="0">
+              <a:buNone/>
+            </a:pPr>
+            <a:r>
+              <a:rPr lang="en-US" sz="950" dirty="0">
+                <a:solidFill>
+                  <a:srgbClr val="6E7680"/>
+                </a:solidFill>
+                <a:latin typeface="Arial" pitchFamily="34" charset="0"/>
+                <a:ea typeface="Arial" pitchFamily="34" charset="-122"/>
+                <a:cs typeface="Arial" pitchFamily="34" charset="-120"/>
+              </a:rPr>
+              <a:t>ROHL-0002  ·  Regenta, Jamshedpur</a:t>
+            </a:r>
+            <a:endParaRPr lang="en-US" sz="950" dirty="0"/>
+          </a:p>
+        </p:txBody>
+      </p:sp>
+      <p:sp>
+        <p:nvSpPr>
+          <p:cNvPr id="31" name="Text 29"/>
+          <p:cNvSpPr/>
+          <p:nvPr/>
+        </p:nvSpPr>
+        <p:spPr>
+          <a:xfrm>
+            <a:off x="8979408" y="10287000"/>
+            <a:ext cx="5486400" cy="274320"/>
+          </a:xfrm>
+          <a:prstGeom prst="rect">
+            <a:avLst/>
+          </a:prstGeom>
+          <a:noFill/>
+          <a:ln/>
+        </p:spPr>
+        <p:txBody>
+          <a:bodyPr wrap="square" lIns="0" tIns="0" rIns="0" bIns="0" rtlCol="0" anchor="ctr"/>
+          <a:lstStyle/>
+          <a:p>
+            <a:pPr marL="0" indent="0" algn="r">
+              <a:buNone/>
+            </a:pPr>
+            <a:r>
+              <a:rPr sz="950" b="1" i="0">
+                <a:solidFill>
+                  <a:srgbClr val="C2185B"/>
+                </a:solidFill>
+                <a:latin typeface="Arial"/>
+              </a:rPr>
+              <a:t>RE:GEN:TA  HOTELS</a:t>
+            </a:r>
+            <a:endParaRPr lang="en-US" sz="950" dirty="0"/>
+          </a:p>
+        </p:txBody>
+      </p:sp>
+    </p:spTree>
+  </p:cSld>
+  <p:clrMapOvr>
+    <a:masterClrMapping/>
+  </p:clrMapOvr>
+</p:sld>
+</file>
+
+<file path=ppt/slides/slide2.xml><?xml version="1.0" encoding="utf-8"?>
+<p:sld xmlns:a="http://schemas.openxmlformats.org/drawingml/2006/main" xmlns:r="http://schemas.openxmlformats.org/officeDocument/2006/relationships" xmlns:p="http://schemas.openxmlformats.org/presentationml/2006/main">
+  <p:cSld name="Slide 32">
+    <p:bg>
+      <p:bgPr>
+        <a:solidFill>
+          <a:srgbClr val="F5F6F8"/>
+        </a:solidFill>
+        <a:effectLst/>
+      </p:bgPr>
+    </p:bg>
+    <p:spTree>
+      <p:nvGrpSpPr>
+        <p:cNvPr id="1" name=""/>
+        <p:cNvGrpSpPr/>
+        <p:nvPr/>
+      </p:nvGrpSpPr>
+      <p:grpSpPr>
+        <a:xfrm>
+          <a:off x="0" y="0"/>
+          <a:ext cx="0" cy="0"/>
+          <a:chOff x="0" y="0"/>
+          <a:chExt cx="0" cy="0"/>
+        </a:xfrm>
+      </p:grpSpPr>
+      <p:sp>
+        <p:nvSpPr>
+          <p:cNvPr id="2" name="Shape 0"/>
+          <p:cNvSpPr/>
+          <p:nvPr/>
+        </p:nvSpPr>
+        <p:spPr>
+          <a:xfrm>
+            <a:off x="0" y="0"/>
+            <a:ext cx="15124176" cy="1170432"/>
+          </a:xfrm>
+          <a:prstGeom prst="rect">
+            <a:avLst/>
+          </a:prstGeom>
+          <a:solidFill>
+            <a:srgbClr val="17365D"/>
+          </a:solidFill>
+          <a:ln w="12700">
+            <a:solidFill>
+              <a:srgbClr val="17365D"/>
+            </a:solidFill>
+            <a:prstDash val="solid"/>
+          </a:ln>
+        </p:spPr>
+        <p:txBody>
+          <a:bodyPr/>
+          <a:lstStyle/>
+          <a:p>
+            <a:endParaRPr/>
+          </a:p>
+        </p:txBody>
+      </p:sp>
+      <p:sp>
+        <p:nvSpPr>
+          <p:cNvPr id="3" name="Text 1"/>
+          <p:cNvSpPr/>
+          <p:nvPr/>
+        </p:nvSpPr>
+        <p:spPr>
+          <a:xfrm>
+            <a:off x="658368" y="237744"/>
+            <a:ext cx="10515600" cy="457200"/>
+          </a:xfrm>
+          <a:prstGeom prst="rect">
+            <a:avLst/>
+          </a:prstGeom>
+          <a:noFill/>
+          <a:ln/>
+        </p:spPr>
+        <p:txBody>
+          <a:bodyPr wrap="square" lIns="0" tIns="0" rIns="0" bIns="0" rtlCol="0" anchor="ctr"/>
+          <a:lstStyle/>
+          <a:p>
+            <a:pPr marL="0" indent="0">
+              <a:buNone/>
+            </a:pPr>
+            <a:r>
+              <a:rPr lang="en-US" sz="2600" b="1" dirty="0">
+                <a:solidFill>
+                  <a:srgbClr val="FFFFFF"/>
+                </a:solidFill>
+                <a:latin typeface="Arial" pitchFamily="34" charset="0"/>
+                <a:ea typeface="Arial" pitchFamily="34" charset="-122"/>
+                <a:cs typeface="Arial" pitchFamily="34" charset="-120"/>
+              </a:rPr>
+              <a:t>04 · Main kitchen</a:t>
+            </a:r>
+            <a:endParaRPr lang="en-US" sz="2600" dirty="0"/>
+          </a:p>
+        </p:txBody>
+      </p:sp>
+      <p:sp>
+        <p:nvSpPr>
+          <p:cNvPr id="4" name="Text 2"/>
+          <p:cNvSpPr/>
+          <p:nvPr/>
+        </p:nvSpPr>
+        <p:spPr>
+          <a:xfrm>
+            <a:off x="658368" y="694944"/>
+            <a:ext cx="10515600" cy="292608"/>
+          </a:xfrm>
+          <a:prstGeom prst="rect">
+            <a:avLst/>
+          </a:prstGeom>
+          <a:noFill/>
+          <a:ln/>
+        </p:spPr>
+        <p:txBody>
+          <a:bodyPr wrap="square" lIns="0" tIns="0" rIns="0" bIns="0" rtlCol="0" anchor="ctr"/>
+          <a:lstStyle/>
+          <a:p>
+            <a:pPr marL="0" indent="0">
+              <a:buNone/>
+            </a:pPr>
+            <a:r>
+              <a:rPr lang="en-US" sz="1200" dirty="0">
+                <a:solidFill>
+                  <a:srgbClr val="AFC3DC"/>
+                </a:solidFill>
+                <a:latin typeface="Arial" pitchFamily="34" charset="0"/>
+                <a:ea typeface="Arial" pitchFamily="34" charset="-122"/>
+                <a:cs typeface="Arial" pitchFamily="34" charset="-120"/>
+              </a:rPr>
+              <a:t>Main kitchen, cold and dry stores   ·   Regenta, Jamshedpur</a:t>
+            </a:r>
+            <a:endParaRPr lang="en-US" sz="1200" dirty="0"/>
+          </a:p>
+        </p:txBody>
+      </p:sp>
+      <p:sp>
+        <p:nvSpPr>
+          <p:cNvPr id="5" name="Text 3"/>
+          <p:cNvSpPr/>
+          <p:nvPr/>
+        </p:nvSpPr>
+        <p:spPr>
+          <a:xfrm>
+            <a:off x="11265408" y="329184"/>
+            <a:ext cx="3200400" cy="502920"/>
+          </a:xfrm>
+          <a:prstGeom prst="rect">
+            <a:avLst/>
+          </a:prstGeom>
+          <a:noFill/>
+          <a:ln/>
+        </p:spPr>
+        <p:txBody>
+          <a:bodyPr wrap="square" lIns="0" tIns="0" rIns="0" bIns="0" rtlCol="0" anchor="ctr"/>
+          <a:lstStyle/>
+          <a:p>
+            <a:pPr marL="0" indent="0" algn="r">
+              <a:buNone/>
+            </a:pPr>
+            <a:r>
+              <a:rPr lang="en-US" sz="1200" b="1" dirty="0">
+                <a:solidFill>
+                  <a:srgbClr val="FFFFFF"/>
+                </a:solidFill>
+                <a:latin typeface="Arial" pitchFamily="34" charset="0"/>
+                <a:ea typeface="Arial" pitchFamily="34" charset="-122"/>
+                <a:cs typeface="Arial" pitchFamily="34" charset="-120"/>
+              </a:rPr>
+              <a:t>ROHL-0002</a:t>
+            </a:r>
+            <a:endParaRPr lang="en-US" sz="1200" dirty="0"/>
+          </a:p>
+        </p:txBody>
+      </p:sp>
+      <p:sp>
+        <p:nvSpPr>
+          <p:cNvPr id="6" name="Shape 4"/>
+          <p:cNvSpPr/>
+          <p:nvPr/>
+        </p:nvSpPr>
+        <p:spPr>
+          <a:xfrm>
+            <a:off x="658368" y="1645920"/>
+            <a:ext cx="6766560" cy="475488"/>
+          </a:xfrm>
+          <a:prstGeom prst="rect">
+            <a:avLst/>
+          </a:prstGeom>
+          <a:solidFill>
+            <a:srgbClr val="C3C7CD"/>
+          </a:solidFill>
+          <a:ln w="12700">
+            <a:solidFill>
+              <a:srgbClr val="333333"/>
+            </a:solidFill>
+            <a:prstDash val="solid"/>
+          </a:ln>
+        </p:spPr>
+        <p:txBody>
+          <a:bodyPr/>
+          <a:lstStyle/>
+          <a:p>
+            <a:endParaRPr/>
+          </a:p>
+        </p:txBody>
+      </p:sp>
+      <p:sp>
+        <p:nvSpPr>
+          <p:cNvPr id="7" name="Text 5"/>
+          <p:cNvSpPr/>
+          <p:nvPr/>
+        </p:nvSpPr>
+        <p:spPr>
+          <a:xfrm>
+            <a:off x="822960" y="1645920"/>
+            <a:ext cx="6437376" cy="475488"/>
+          </a:xfrm>
+          <a:prstGeom prst="rect">
+            <a:avLst/>
+          </a:prstGeom>
+          <a:noFill/>
+          <a:ln/>
+        </p:spPr>
+        <p:txBody>
+          <a:bodyPr wrap="square" lIns="0" tIns="0" rIns="0" bIns="0" rtlCol="0" anchor="ctr"/>
+          <a:lstStyle/>
+          <a:p>
+            <a:pPr marL="0" indent="0">
+              <a:buNone/>
+            </a:pPr>
+            <a:r>
+              <a:rPr lang="en-US" sz="1100" b="1" kern="0" spc="60" dirty="0">
+                <a:solidFill>
+                  <a:srgbClr val="FFFFFF"/>
+                </a:solidFill>
+                <a:latin typeface="Arial" pitchFamily="34" charset="0"/>
+                <a:ea typeface="Arial" pitchFamily="34" charset="-122"/>
+                <a:cs typeface="Arial" pitchFamily="34" charset="-120"/>
+              </a:rPr>
+              <a:t>PREVIOUS MONTH</a:t>
+            </a:r>
+            <a:endParaRPr lang="en-US" sz="1100" dirty="0"/>
+          </a:p>
+        </p:txBody>
+      </p:sp>
+      <p:sp>
+        <p:nvSpPr>
+          <p:cNvPr id="8" name="Shape 6"/>
+          <p:cNvSpPr/>
+          <p:nvPr/>
+        </p:nvSpPr>
+        <p:spPr>
+          <a:xfrm>
+            <a:off x="658368" y="2212848"/>
+            <a:ext cx="6766560" cy="5605272"/>
           </a:xfrm>
           <a:prstGeom prst="roundRect">
             <a:avLst>
-              <a:gd name="adj" fmla="val 5102"/>
+              <a:gd name="adj" fmla="val 971"/>
             </a:avLst>
           </a:prstGeom>
           <a:solidFill>
-            <a:srgbClr val="FFFFFF"/>
+            <a:srgbClr val="F0F1F3"/>
           </a:solidFill>
           <a:ln w="12700">
             <a:solidFill>
@@ -13711,98 +13801,132 @@
       </p:sp>
       <p:sp>
         <p:nvSpPr>
-          <p:cNvPr id="37" name="Text 35"/>
-          <p:cNvSpPr/>
-          <p:nvPr/>
-        </p:nvSpPr>
-        <p:spPr>
-          <a:xfrm>
-            <a:off x="4347972" y="4837176"/>
-            <a:ext cx="2921508" cy="219456"/>
-          </a:xfrm>
-          <a:prstGeom prst="rect">
-            <a:avLst/>
-          </a:prstGeom>
-          <a:noFill/>
-          <a:ln/>
-        </p:spPr>
-        <p:txBody>
-          <a:bodyPr wrap="square" lIns="0" tIns="0" rIns="0" bIns="0" rtlCol="0" anchor="ctr"/>
-          <a:lstStyle/>
-          <a:p>
-            <a:pPr marL="0" indent="0" algn="l">
-              <a:buNone/>
-            </a:pPr>
-            <a:r>
-              <a:rPr sz="850" b="1" i="0">
-                <a:solidFill>
-                  <a:srgbClr val="2F75B5"/>
-                </a:solidFill>
-                <a:latin typeface="Arial"/>
-              </a:rPr>
-              <a:t>HANDOVER DATE AS PER AGREEMENT SIGNED</a:t>
-            </a:r>
-            <a:endParaRPr lang="en-US" sz="900" dirty="0"/>
-          </a:p>
-        </p:txBody>
-      </p:sp>
-      <p:sp>
-        <p:nvSpPr>
-          <p:cNvPr id="38" name="Text 36"/>
-          <p:cNvSpPr/>
-          <p:nvPr/>
-        </p:nvSpPr>
-        <p:spPr>
-          <a:xfrm>
-            <a:off x="4347972" y="5093208"/>
-            <a:ext cx="2921508" cy="384048"/>
-          </a:xfrm>
-          <a:prstGeom prst="rect">
-            <a:avLst/>
-          </a:prstGeom>
-          <a:noFill/>
-          <a:ln/>
-        </p:spPr>
-        <p:txBody>
-          <a:bodyPr wrap="square" lIns="0" tIns="0" rIns="0" bIns="0" rtlCol="0" anchor="ctr"/>
-          <a:lstStyle/>
-          <a:p>
-            <a:pPr marL="0" indent="0">
-              <a:buNone/>
-            </a:pPr>
-            <a:r>
-              <a:rPr lang="en-US" sz="1400" b="1" dirty="0">
-                <a:solidFill>
-                  <a:srgbClr val="17365D"/>
-                </a:solidFill>
-                <a:latin typeface="Arial" pitchFamily="34" charset="0"/>
-                <a:ea typeface="Arial" pitchFamily="34" charset="-122"/>
-                <a:cs typeface="Arial" pitchFamily="34" charset="-120"/>
-              </a:rPr>
-              <a:t>20-Jan-2028</a:t>
-            </a:r>
-            <a:endParaRPr lang="en-US" sz="1400" dirty="0"/>
-          </a:p>
-        </p:txBody>
-      </p:sp>
-      <p:sp>
-        <p:nvSpPr>
-          <p:cNvPr id="39" name="Shape 37"/>
-          <p:cNvSpPr/>
-          <p:nvPr/>
-        </p:nvSpPr>
-        <p:spPr>
-          <a:xfrm>
-            <a:off x="7671816" y="4709160"/>
-            <a:ext cx="3287268" cy="896112"/>
+          <p:cNvPr id="9" name="Text 7"/>
+          <p:cNvSpPr/>
+          <p:nvPr/>
+        </p:nvSpPr>
+        <p:spPr>
+          <a:xfrm>
+            <a:off x="932688" y="4709160"/>
+            <a:ext cx="6217920" cy="457200"/>
+          </a:xfrm>
+          <a:prstGeom prst="rect">
+            <a:avLst/>
+          </a:prstGeom>
+          <a:noFill/>
+          <a:ln/>
+        </p:spPr>
+        <p:txBody>
+          <a:bodyPr wrap="square" lIns="0" tIns="0" rIns="0" bIns="0" rtlCol="0" anchor="ctr"/>
+          <a:lstStyle/>
+          <a:p>
+            <a:pPr marL="0" indent="0" algn="ctr">
+              <a:buNone/>
+            </a:pPr>
+            <a:r>
+              <a:rPr lang="en-US" sz="1200" i="1" dirty="0">
+                <a:solidFill>
+                  <a:srgbClr val="9AA0A6"/>
+                </a:solidFill>
+                <a:latin typeface="Arial" pitchFamily="34" charset="0"/>
+                <a:ea typeface="Arial" pitchFamily="34" charset="-122"/>
+                <a:cs typeface="Arial" pitchFamily="34" charset="-120"/>
+              </a:rPr>
+              <a:t>Photograph awaited</a:t>
+            </a:r>
+            <a:endParaRPr lang="en-US" sz="1200" dirty="0"/>
+          </a:p>
+        </p:txBody>
+      </p:sp>
+      <p:sp>
+        <p:nvSpPr>
+          <p:cNvPr id="10" name="Shape 8"/>
+          <p:cNvSpPr/>
+          <p:nvPr/>
+        </p:nvSpPr>
+        <p:spPr>
+          <a:xfrm>
+            <a:off x="7699248" y="1645920"/>
+            <a:ext cx="6766560" cy="475488"/>
+          </a:xfrm>
+          <a:prstGeom prst="rect">
+            <a:avLst/>
+          </a:prstGeom>
+          <a:solidFill>
+            <a:srgbClr val="C3C7CD"/>
+          </a:solidFill>
+          <a:ln w="12700">
+            <a:solidFill>
+              <a:srgbClr val="333333"/>
+            </a:solidFill>
+            <a:prstDash val="solid"/>
+          </a:ln>
+        </p:spPr>
+        <p:txBody>
+          <a:bodyPr/>
+          <a:lstStyle/>
+          <a:p>
+            <a:endParaRPr/>
+          </a:p>
+        </p:txBody>
+      </p:sp>
+      <p:sp>
+        <p:nvSpPr>
+          <p:cNvPr id="11" name="Text 9"/>
+          <p:cNvSpPr/>
+          <p:nvPr/>
+        </p:nvSpPr>
+        <p:spPr>
+          <a:xfrm>
+            <a:off x="7863840" y="1645920"/>
+            <a:ext cx="6437376" cy="475488"/>
+          </a:xfrm>
+          <a:prstGeom prst="rect">
+            <a:avLst/>
+          </a:prstGeom>
+          <a:noFill/>
+          <a:ln/>
+        </p:spPr>
+        <p:txBody>
+          <a:bodyPr wrap="square" lIns="0" tIns="0" rIns="0" bIns="0" rtlCol="0" anchor="ctr"/>
+          <a:lstStyle/>
+          <a:p>
+            <a:pPr marL="0" indent="0">
+              <a:buNone/>
+            </a:pPr>
+            <a:r>
+              <a:rPr lang="en-US" sz="1100" b="1" kern="0" spc="60" dirty="0">
+                <a:solidFill>
+                  <a:srgbClr val="FFFFFF"/>
+                </a:solidFill>
+                <a:latin typeface="Arial" pitchFamily="34" charset="0"/>
+                <a:ea typeface="Arial" pitchFamily="34" charset="-122"/>
+                <a:cs typeface="Arial" pitchFamily="34" charset="-120"/>
+              </a:rPr>
+              <a:t>CURRENT MONTH</a:t>
+            </a:r>
+            <a:endParaRPr lang="en-US" sz="1100" dirty="0"/>
+          </a:p>
+        </p:txBody>
+      </p:sp>
+      <p:sp>
+        <p:nvSpPr>
+          <p:cNvPr id="12" name="Shape 10"/>
+          <p:cNvSpPr/>
+          <p:nvPr/>
+        </p:nvSpPr>
+        <p:spPr>
+          <a:xfrm>
+            <a:off x="7699248" y="2212848"/>
+            <a:ext cx="6766560" cy="5605272"/>
           </a:xfrm>
           <a:prstGeom prst="roundRect">
             <a:avLst>
-              <a:gd name="adj" fmla="val 5102"/>
+              <a:gd name="adj" fmla="val 971"/>
             </a:avLst>
           </a:prstGeom>
           <a:solidFill>
-            <a:srgbClr val="FFFFFF"/>
+            <a:srgbClr val="F0F1F3"/>
           </a:solidFill>
           <a:ln w="12700">
             <a:solidFill>
@@ -13821,96 +13945,57 @@
       </p:sp>
       <p:sp>
         <p:nvSpPr>
-          <p:cNvPr id="40" name="Text 38"/>
-          <p:cNvSpPr/>
-          <p:nvPr/>
-        </p:nvSpPr>
-        <p:spPr>
-          <a:xfrm>
-            <a:off x="7854696" y="4837176"/>
-            <a:ext cx="2921508" cy="219456"/>
-          </a:xfrm>
-          <a:prstGeom prst="rect">
-            <a:avLst/>
-          </a:prstGeom>
-          <a:noFill/>
-          <a:ln/>
-        </p:spPr>
-        <p:txBody>
-          <a:bodyPr wrap="square" lIns="0" tIns="0" rIns="0" bIns="0" rtlCol="0" anchor="ctr"/>
-          <a:lstStyle/>
-          <a:p>
-            <a:pPr marL="0" indent="0">
-              <a:buNone/>
-            </a:pPr>
-            <a:r>
-              <a:rPr lang="en-US" sz="900" b="1" kern="0" spc="70" dirty="0">
-                <a:solidFill>
-                  <a:srgbClr val="2F75B5"/>
-                </a:solidFill>
-                <a:latin typeface="Arial" pitchFamily="34" charset="0"/>
-                <a:ea typeface="Arial" pitchFamily="34" charset="-122"/>
-                <a:cs typeface="Arial" pitchFamily="34" charset="-120"/>
-              </a:rPr>
-              <a:t>OPENING DATE</a:t>
-            </a:r>
-            <a:endParaRPr lang="en-US" sz="900" dirty="0"/>
-          </a:p>
-        </p:txBody>
-      </p:sp>
-      <p:sp>
-        <p:nvSpPr>
-          <p:cNvPr id="41" name="Text 39"/>
-          <p:cNvSpPr/>
-          <p:nvPr/>
-        </p:nvSpPr>
-        <p:spPr>
-          <a:xfrm>
-            <a:off x="7854696" y="5093208"/>
-            <a:ext cx="2921508" cy="384048"/>
-          </a:xfrm>
-          <a:prstGeom prst="rect">
-            <a:avLst/>
-          </a:prstGeom>
-          <a:noFill/>
-          <a:ln/>
-        </p:spPr>
-        <p:txBody>
-          <a:bodyPr wrap="square" lIns="0" tIns="0" rIns="0" bIns="0" rtlCol="0" anchor="ctr"/>
-          <a:lstStyle/>
-          <a:p>
-            <a:pPr marL="0" indent="0">
-              <a:buNone/>
-            </a:pPr>
-            <a:r>
-              <a:rPr lang="en-US" sz="1400" b="1" dirty="0">
-                <a:solidFill>
-                  <a:srgbClr val="17365D"/>
-                </a:solidFill>
-                <a:latin typeface="Arial" pitchFamily="34" charset="0"/>
-                <a:ea typeface="Arial" pitchFamily="34" charset="-122"/>
-                <a:cs typeface="Arial" pitchFamily="34" charset="-120"/>
-              </a:rPr>
-              <a:t>27-Mar-2028</a:t>
-            </a:r>
-            <a:endParaRPr lang="en-US" sz="1400" dirty="0"/>
-          </a:p>
-        </p:txBody>
-      </p:sp>
-      <p:sp>
-        <p:nvSpPr>
-          <p:cNvPr id="42" name="Shape 40"/>
-          <p:cNvSpPr/>
-          <p:nvPr/>
-        </p:nvSpPr>
-        <p:spPr>
-          <a:xfrm>
-            <a:off x="11178540" y="4709160"/>
-            <a:ext cx="3287268" cy="896112"/>
+          <p:cNvPr id="13" name="Text 11"/>
+          <p:cNvSpPr/>
+          <p:nvPr/>
+        </p:nvSpPr>
+        <p:spPr>
+          <a:xfrm>
+            <a:off x="7973568" y="4709160"/>
+            <a:ext cx="6217920" cy="457200"/>
+          </a:xfrm>
+          <a:prstGeom prst="rect">
+            <a:avLst/>
+          </a:prstGeom>
+          <a:noFill/>
+          <a:ln/>
+        </p:spPr>
+        <p:txBody>
+          <a:bodyPr wrap="square" lIns="0" tIns="0" rIns="0" bIns="0" rtlCol="0" anchor="ctr"/>
+          <a:lstStyle/>
+          <a:p>
+            <a:pPr marL="0" indent="0" algn="ctr">
+              <a:buNone/>
+            </a:pPr>
+            <a:r>
+              <a:rPr lang="en-US" sz="1200" i="1" dirty="0">
+                <a:solidFill>
+                  <a:srgbClr val="9AA0A6"/>
+                </a:solidFill>
+                <a:latin typeface="Arial" pitchFamily="34" charset="0"/>
+                <a:ea typeface="Arial" pitchFamily="34" charset="-122"/>
+                <a:cs typeface="Arial" pitchFamily="34" charset="-120"/>
+              </a:rPr>
+              <a:t>Photograph awaited</a:t>
+            </a:r>
+            <a:endParaRPr lang="en-US" sz="1200" dirty="0"/>
+          </a:p>
+        </p:txBody>
+      </p:sp>
+      <p:sp>
+        <p:nvSpPr>
+          <p:cNvPr id="14" name="Shape 12"/>
+          <p:cNvSpPr/>
+          <p:nvPr/>
+        </p:nvSpPr>
+        <p:spPr>
+          <a:xfrm>
+            <a:off x="658368" y="7973568"/>
+            <a:ext cx="4694530" cy="1463040"/>
           </a:xfrm>
           <a:prstGeom prst="roundRect">
             <a:avLst>
-              <a:gd name="adj" fmla="val 5102"/>
+              <a:gd name="adj" fmla="val 2439"/>
             </a:avLst>
           </a:prstGeom>
           <a:solidFill>
@@ -13933,96 +14018,143 @@
       </p:sp>
       <p:sp>
         <p:nvSpPr>
-          <p:cNvPr id="43" name="Text 41"/>
-          <p:cNvSpPr/>
-          <p:nvPr/>
-        </p:nvSpPr>
-        <p:spPr>
-          <a:xfrm>
-            <a:off x="11361420" y="4837176"/>
-            <a:ext cx="2921508" cy="219456"/>
-          </a:xfrm>
-          <a:prstGeom prst="rect">
-            <a:avLst/>
-          </a:prstGeom>
-          <a:noFill/>
-          <a:ln/>
-        </p:spPr>
-        <p:txBody>
-          <a:bodyPr wrap="square" lIns="0" tIns="0" rIns="0" bIns="0" rtlCol="0" anchor="ctr"/>
-          <a:lstStyle/>
-          <a:p>
-            <a:pPr marL="0" indent="0">
-              <a:buNone/>
-            </a:pPr>
-            <a:r>
-              <a:rPr lang="en-US" sz="900" b="1" kern="0" spc="70" dirty="0">
-                <a:solidFill>
-                  <a:srgbClr val="2F75B5"/>
-                </a:solidFill>
-                <a:latin typeface="Arial" pitchFamily="34" charset="0"/>
-                <a:ea typeface="Arial" pitchFamily="34" charset="-122"/>
-                <a:cs typeface="Arial" pitchFamily="34" charset="-120"/>
-              </a:rPr>
-              <a:t>FINANCIAL YEAR</a:t>
-            </a:r>
-            <a:endParaRPr lang="en-US" sz="900" dirty="0"/>
-          </a:p>
-        </p:txBody>
-      </p:sp>
-      <p:sp>
-        <p:nvSpPr>
-          <p:cNvPr id="44" name="Text 42"/>
-          <p:cNvSpPr/>
-          <p:nvPr/>
-        </p:nvSpPr>
-        <p:spPr>
-          <a:xfrm>
-            <a:off x="11361420" y="5093208"/>
-            <a:ext cx="2921508" cy="384048"/>
-          </a:xfrm>
-          <a:prstGeom prst="rect">
-            <a:avLst/>
-          </a:prstGeom>
-          <a:noFill/>
-          <a:ln/>
-        </p:spPr>
-        <p:txBody>
-          <a:bodyPr wrap="square" lIns="0" tIns="0" rIns="0" bIns="0" rtlCol="0" anchor="ctr"/>
-          <a:lstStyle/>
-          <a:p>
-            <a:pPr marL="0" indent="0">
-              <a:buNone/>
-            </a:pPr>
-            <a:r>
-              <a:rPr lang="en-US" sz="1400" b="1" dirty="0">
-                <a:solidFill>
-                  <a:srgbClr val="17365D"/>
-                </a:solidFill>
-                <a:latin typeface="Arial" pitchFamily="34" charset="0"/>
-                <a:ea typeface="Arial" pitchFamily="34" charset="-122"/>
-                <a:cs typeface="Arial" pitchFamily="34" charset="-120"/>
-              </a:rPr>
-              <a:t>FY 2027-28 · Q4</a:t>
-            </a:r>
-            <a:endParaRPr lang="en-US" sz="1400" dirty="0"/>
-          </a:p>
-        </p:txBody>
-      </p:sp>
-      <p:sp>
-        <p:nvSpPr>
-          <p:cNvPr id="45" name="Shape 43"/>
-          <p:cNvSpPr/>
-          <p:nvPr/>
-        </p:nvSpPr>
-        <p:spPr>
-          <a:xfrm>
-            <a:off x="658368" y="5760720"/>
-            <a:ext cx="3287268" cy="896112"/>
+          <p:cNvPr id="15" name="Shape 13"/>
+          <p:cNvSpPr/>
+          <p:nvPr/>
+        </p:nvSpPr>
+        <p:spPr>
+          <a:xfrm>
+            <a:off x="658368" y="7973568"/>
+            <a:ext cx="4694530" cy="402336"/>
+          </a:xfrm>
+          <a:prstGeom prst="rect">
+            <a:avLst/>
+          </a:prstGeom>
+          <a:solidFill>
+            <a:srgbClr val="2F75B5"/>
+          </a:solidFill>
+          <a:ln w="12700">
+            <a:solidFill>
+              <a:srgbClr val="333333"/>
+            </a:solidFill>
+            <a:prstDash val="solid"/>
+          </a:ln>
+        </p:spPr>
+        <p:txBody>
+          <a:bodyPr/>
+          <a:lstStyle/>
+          <a:p>
+            <a:endParaRPr/>
+          </a:p>
+        </p:txBody>
+      </p:sp>
+      <p:sp>
+        <p:nvSpPr>
+          <p:cNvPr id="16" name="Text 14"/>
+          <p:cNvSpPr/>
+          <p:nvPr/>
+        </p:nvSpPr>
+        <p:spPr>
+          <a:xfrm>
+            <a:off x="822960" y="7973568"/>
+            <a:ext cx="4365346" cy="402336"/>
+          </a:xfrm>
+          <a:prstGeom prst="rect">
+            <a:avLst/>
+          </a:prstGeom>
+          <a:noFill/>
+          <a:ln/>
+        </p:spPr>
+        <p:txBody>
+          <a:bodyPr wrap="square" lIns="0" tIns="0" rIns="0" bIns="0" rtlCol="0" anchor="ctr"/>
+          <a:lstStyle/>
+          <a:p>
+            <a:r>
+              <a:t>SITE VIDEO</a:t>
+            </a:r>
+          </a:p>
+        </p:txBody>
+      </p:sp>
+      <p:sp>
+        <p:nvSpPr>
+          <p:cNvPr id="17" name="Text 15"/>
+          <p:cNvSpPr/>
+          <p:nvPr/>
+        </p:nvSpPr>
+        <p:spPr>
+          <a:xfrm>
+            <a:off x="859536" y="8540496"/>
+            <a:ext cx="1691640" cy="329184"/>
+          </a:xfrm>
+          <a:prstGeom prst="rect">
+            <a:avLst/>
+          </a:prstGeom>
+          <a:noFill/>
+          <a:ln/>
+        </p:spPr>
+        <p:txBody>
+          <a:bodyPr wrap="square" lIns="0" tIns="0" rIns="0" bIns="0" rtlCol="0" anchor="ctr"/>
+          <a:lstStyle/>
+          <a:p>
+            <a:r>
+              <a:t>Site walkthrough</a:t>
+            </a:r>
+          </a:p>
+        </p:txBody>
+      </p:sp>
+      <p:sp>
+        <p:nvSpPr>
+          <p:cNvPr id="18" name="Text 16"/>
+          <p:cNvSpPr/>
+          <p:nvPr/>
+        </p:nvSpPr>
+        <p:spPr>
+          <a:xfrm>
+            <a:off x="2624328" y="8540496"/>
+            <a:ext cx="2499970" cy="329184"/>
+          </a:xfrm>
+          <a:prstGeom prst="rect">
+            <a:avLst/>
+          </a:prstGeom>
+          <a:noFill/>
+          <a:ln/>
+        </p:spPr>
+        <p:txBody>
+          <a:bodyPr wrap="square" lIns="0" tIns="0" rIns="0" bIns="0" rtlCol="0" anchor="ctr"/>
+          <a:lstStyle/>
+          <a:p>
+            <a:pPr marL="0" indent="0">
+              <a:buNone/>
+            </a:pPr>
+            <a:r>
+              <a:rPr lang="en-US" sz="1000" dirty="0">
+                <a:solidFill>
+                  <a:srgbClr val="9AA0A6"/>
+                </a:solidFill>
+                <a:latin typeface="Arial" pitchFamily="34" charset="0"/>
+                <a:ea typeface="Arial" pitchFamily="34" charset="-122"/>
+                <a:cs typeface="Arial" pitchFamily="34" charset="-120"/>
+              </a:rPr>
+              <a:t>—</a:t>
+            </a:r>
+            <a:endParaRPr lang="en-US" sz="1000" dirty="0"/>
+          </a:p>
+        </p:txBody>
+      </p:sp>
+      <p:sp>
+        <p:nvSpPr>
+          <p:cNvPr id="23" name="Shape 21"/>
+          <p:cNvSpPr/>
+          <p:nvPr/>
+        </p:nvSpPr>
+        <p:spPr>
+          <a:xfrm>
+            <a:off x="5627218" y="7973568"/>
+            <a:ext cx="8838590" cy="1463040"/>
           </a:xfrm>
           <a:prstGeom prst="roundRect">
             <a:avLst>
-              <a:gd name="adj" fmla="val 5102"/>
+              <a:gd name="adj" fmla="val 2439"/>
             </a:avLst>
           </a:prstGeom>
           <a:solidFill>
@@ -14045,100 +14177,135 @@
       </p:sp>
       <p:sp>
         <p:nvSpPr>
-          <p:cNvPr id="46" name="Text 44"/>
-          <p:cNvSpPr/>
-          <p:nvPr/>
-        </p:nvSpPr>
-        <p:spPr>
-          <a:xfrm>
-            <a:off x="841248" y="5888736"/>
-            <a:ext cx="2921508" cy="219456"/>
-          </a:xfrm>
-          <a:prstGeom prst="rect">
-            <a:avLst/>
-          </a:prstGeom>
-          <a:noFill/>
-          <a:ln/>
-        </p:spPr>
-        <p:txBody>
-          <a:bodyPr wrap="square" lIns="0" tIns="0" rIns="0" bIns="0" rtlCol="0" anchor="ctr"/>
-          <a:lstStyle/>
-          <a:p>
-            <a:pPr marL="0" indent="0">
-              <a:buNone/>
-            </a:pPr>
-            <a:r>
-              <a:rPr lang="en-US" sz="900" b="1" kern="0" spc="70" dirty="0">
-                <a:solidFill>
-                  <a:srgbClr val="2F75B5"/>
-                </a:solidFill>
-                <a:latin typeface="Arial" pitchFamily="34" charset="0"/>
-                <a:ea typeface="Arial" pitchFamily="34" charset="-122"/>
-                <a:cs typeface="Arial" pitchFamily="34" charset="-120"/>
-              </a:rPr>
-              <a:t>PROJECT STAGE</a:t>
-            </a:r>
-            <a:endParaRPr lang="en-US" sz="900" dirty="0"/>
-          </a:p>
-        </p:txBody>
-      </p:sp>
-      <p:sp>
-        <p:nvSpPr>
-          <p:cNvPr id="47" name="Text 45"/>
-          <p:cNvSpPr/>
-          <p:nvPr/>
-        </p:nvSpPr>
-        <p:spPr>
-          <a:xfrm>
-            <a:off x="841248" y="6144768"/>
-            <a:ext cx="2921508" cy="384048"/>
-          </a:xfrm>
-          <a:prstGeom prst="rect">
-            <a:avLst/>
-          </a:prstGeom>
-          <a:noFill/>
-          <a:ln/>
-        </p:spPr>
-        <p:txBody>
-          <a:bodyPr wrap="square" lIns="0" tIns="0" rIns="0" bIns="0" rtlCol="0" anchor="ctr"/>
-          <a:lstStyle/>
-          <a:p>
-            <a:pPr marL="0" indent="0">
-              <a:buNone/>
-            </a:pPr>
-            <a:r>
-              <a:rPr lang="en-US" sz="1400" b="1" dirty="0">
-                <a:solidFill>
-                  <a:srgbClr val="17365D"/>
-                </a:solidFill>
-                <a:latin typeface="Arial" pitchFamily="34" charset="0"/>
-                <a:ea typeface="Arial" pitchFamily="34" charset="-122"/>
-                <a:cs typeface="Arial" pitchFamily="34" charset="-120"/>
-              </a:rPr>
-              <a:t>Construction</a:t>
-            </a:r>
-            <a:endParaRPr lang="en-US" sz="1400" dirty="0"/>
-          </a:p>
-        </p:txBody>
-      </p:sp>
-      <p:sp>
-        <p:nvSpPr>
-          <p:cNvPr id="48" name="Shape 46"/>
-          <p:cNvSpPr/>
-          <p:nvPr/>
-        </p:nvSpPr>
-        <p:spPr>
-          <a:xfrm>
-            <a:off x="4165092" y="5760720"/>
-            <a:ext cx="3287268" cy="896112"/>
+          <p:cNvPr id="24" name="Shape 22"/>
+          <p:cNvSpPr/>
+          <p:nvPr/>
+        </p:nvSpPr>
+        <p:spPr>
+          <a:xfrm>
+            <a:off x="5627218" y="7973568"/>
+            <a:ext cx="8838590" cy="402336"/>
+          </a:xfrm>
+          <a:prstGeom prst="rect">
+            <a:avLst/>
+          </a:prstGeom>
+          <a:solidFill>
+            <a:srgbClr val="17365D"/>
+          </a:solidFill>
+          <a:ln w="12700">
+            <a:solidFill>
+              <a:srgbClr val="333333"/>
+            </a:solidFill>
+            <a:prstDash val="solid"/>
+          </a:ln>
+        </p:spPr>
+        <p:txBody>
+          <a:bodyPr/>
+          <a:lstStyle/>
+          <a:p>
+            <a:endParaRPr/>
+          </a:p>
+        </p:txBody>
+      </p:sp>
+      <p:sp>
+        <p:nvSpPr>
+          <p:cNvPr id="25" name="Text 23"/>
+          <p:cNvSpPr/>
+          <p:nvPr/>
+        </p:nvSpPr>
+        <p:spPr>
+          <a:xfrm>
+            <a:off x="5791810" y="7973568"/>
+            <a:ext cx="8509406" cy="402336"/>
+          </a:xfrm>
+          <a:prstGeom prst="rect">
+            <a:avLst/>
+          </a:prstGeom>
+          <a:noFill/>
+          <a:ln/>
+        </p:spPr>
+        <p:txBody>
+          <a:bodyPr wrap="square" lIns="0" tIns="0" rIns="0" bIns="0" rtlCol="0" anchor="ctr"/>
+          <a:lstStyle/>
+          <a:p>
+            <a:pPr marL="0" indent="0">
+              <a:buNone/>
+            </a:pPr>
+            <a:r>
+              <a:rPr lang="en-US" sz="1050" b="1" kern="0" spc="70" dirty="0">
+                <a:solidFill>
+                  <a:srgbClr val="FFFFFF"/>
+                </a:solidFill>
+                <a:latin typeface="Arial" pitchFamily="34" charset="0"/>
+                <a:ea typeface="Arial" pitchFamily="34" charset="-122"/>
+                <a:cs typeface="Arial" pitchFamily="34" charset="-120"/>
+              </a:rPr>
+              <a:t>FEEDBACK FOR THIS SPACE</a:t>
+            </a:r>
+            <a:endParaRPr lang="en-US" sz="1050" dirty="0"/>
+          </a:p>
+        </p:txBody>
+      </p:sp>
+      <p:sp>
+        <p:nvSpPr>
+          <p:cNvPr id="26" name="Text 24"/>
+          <p:cNvSpPr/>
+          <p:nvPr/>
+        </p:nvSpPr>
+        <p:spPr>
+          <a:xfrm>
+            <a:off x="5828386" y="8485632"/>
+            <a:ext cx="8436254" cy="896112"/>
+          </a:xfrm>
+          <a:prstGeom prst="rect">
+            <a:avLst/>
+          </a:prstGeom>
+          <a:noFill/>
+          <a:ln/>
+        </p:spPr>
+        <p:txBody>
+          <a:bodyPr wrap="square" lIns="0" tIns="0" rIns="0" bIns="0" rtlCol="0" anchor="t"/>
+          <a:lstStyle/>
+          <a:p>
+            <a:pPr marL="0" indent="0">
+              <a:lnSpc>
+                <a:spcPts val="1600"/>
+              </a:lnSpc>
+              <a:buNone/>
+            </a:pPr>
+            <a:r>
+              <a:rPr lang="en-US" sz="1100" i="1" dirty="0">
+                <a:solidFill>
+                  <a:srgbClr val="9AA0A6"/>
+                </a:solidFill>
+                <a:latin typeface="Arial" pitchFamily="34" charset="0"/>
+                <a:ea typeface="Arial" pitchFamily="34" charset="-122"/>
+                <a:cs typeface="Arial" pitchFamily="34" charset="-120"/>
+              </a:rPr>
+              <a:t>To be recorded at the next site visit.</a:t>
+            </a:r>
+            <a:endParaRPr lang="en-US" sz="1100" dirty="0"/>
+          </a:p>
+        </p:txBody>
+      </p:sp>
+      <p:sp>
+        <p:nvSpPr>
+          <p:cNvPr id="27" name="Shape 25"/>
+          <p:cNvSpPr/>
+          <p:nvPr/>
+        </p:nvSpPr>
+        <p:spPr>
+          <a:xfrm>
+            <a:off x="658368" y="9482328"/>
+            <a:ext cx="13807440" cy="566928"/>
           </a:xfrm>
           <a:prstGeom prst="roundRect">
             <a:avLst>
-              <a:gd name="adj" fmla="val 5102"/>
+              <a:gd name="adj" fmla="val 8065"/>
             </a:avLst>
           </a:prstGeom>
           <a:solidFill>
-            <a:srgbClr val="FFFFFF"/>
+            <a:srgbClr val="EAF1F9"/>
           </a:solidFill>
           <a:ln w="12700">
             <a:solidFill>
@@ -14157,458 +14324,34 @@
       </p:sp>
       <p:sp>
         <p:nvSpPr>
-          <p:cNvPr id="49" name="Text 47"/>
-          <p:cNvSpPr/>
-          <p:nvPr/>
-        </p:nvSpPr>
-        <p:spPr>
-          <a:xfrm>
-            <a:off x="4347972" y="5888736"/>
-            <a:ext cx="2921508" cy="219456"/>
-          </a:xfrm>
-          <a:prstGeom prst="rect">
-            <a:avLst/>
-          </a:prstGeom>
-          <a:noFill/>
-          <a:ln/>
-        </p:spPr>
-        <p:txBody>
-          <a:bodyPr wrap="square" lIns="0" tIns="0" rIns="0" bIns="0" rtlCol="0" anchor="ctr"/>
-          <a:lstStyle/>
-          <a:p>
-            <a:pPr marL="0" indent="0">
-              <a:buNone/>
-            </a:pPr>
-            <a:r>
-              <a:rPr lang="en-US" sz="900" b="1" kern="0" spc="70" dirty="0">
-                <a:solidFill>
-                  <a:srgbClr val="2F75B5"/>
-                </a:solidFill>
-                <a:latin typeface="Arial" pitchFamily="34" charset="0"/>
-                <a:ea typeface="Arial" pitchFamily="34" charset="-122"/>
-                <a:cs typeface="Arial" pitchFamily="34" charset="-120"/>
-              </a:rPr>
-              <a:t>RISK LEVEL</a:t>
-            </a:r>
-            <a:endParaRPr lang="en-US" sz="900" dirty="0"/>
-          </a:p>
-        </p:txBody>
-      </p:sp>
-      <p:sp>
-        <p:nvSpPr>
-          <p:cNvPr id="50" name="Text 48"/>
-          <p:cNvSpPr/>
-          <p:nvPr/>
-        </p:nvSpPr>
-        <p:spPr>
-          <a:xfrm>
-            <a:off x="4347972" y="6144768"/>
-            <a:ext cx="2921508" cy="384048"/>
-          </a:xfrm>
-          <a:prstGeom prst="rect">
-            <a:avLst/>
-          </a:prstGeom>
-          <a:noFill/>
-          <a:ln/>
-        </p:spPr>
-        <p:txBody>
-          <a:bodyPr wrap="square" lIns="0" tIns="0" rIns="0" bIns="0" rtlCol="0" anchor="ctr"/>
-          <a:lstStyle/>
-          <a:p>
-            <a:pPr marL="0" indent="0">
-              <a:buNone/>
-            </a:pPr>
-            <a:r>
-              <a:rPr lang="en-US" sz="1400" b="1" dirty="0">
-                <a:solidFill>
-                  <a:srgbClr val="B7791F"/>
-                </a:solidFill>
-                <a:latin typeface="Arial" pitchFamily="34" charset="0"/>
-                <a:ea typeface="Arial" pitchFamily="34" charset="-122"/>
-                <a:cs typeface="Arial" pitchFamily="34" charset="-120"/>
-              </a:rPr>
-              <a:t>Medium</a:t>
-            </a:r>
-            <a:endParaRPr lang="en-US" sz="1400" dirty="0"/>
-          </a:p>
-        </p:txBody>
-      </p:sp>
-      <p:sp>
-        <p:nvSpPr>
-          <p:cNvPr id="51" name="Shape 49"/>
-          <p:cNvSpPr/>
-          <p:nvPr/>
-        </p:nvSpPr>
-        <p:spPr>
-          <a:xfrm>
-            <a:off x="7671816" y="5760720"/>
-            <a:ext cx="3287268" cy="896112"/>
-          </a:xfrm>
-          <a:prstGeom prst="roundRect">
-            <a:avLst>
-              <a:gd name="adj" fmla="val 5102"/>
-            </a:avLst>
-          </a:prstGeom>
-          <a:solidFill>
-            <a:srgbClr val="FFFFFF"/>
-          </a:solidFill>
-          <a:ln w="12700">
-            <a:solidFill>
-              <a:srgbClr val="D6DBE2"/>
-            </a:solidFill>
-            <a:prstDash val="solid"/>
-          </a:ln>
-        </p:spPr>
-        <p:txBody>
-          <a:bodyPr/>
-          <a:lstStyle/>
-          <a:p>
-            <a:endParaRPr/>
-          </a:p>
-        </p:txBody>
-      </p:sp>
-      <p:sp>
-        <p:nvSpPr>
-          <p:cNvPr id="52" name="Text 50"/>
-          <p:cNvSpPr/>
-          <p:nvPr/>
-        </p:nvSpPr>
-        <p:spPr>
-          <a:xfrm>
-            <a:off x="7854696" y="5888736"/>
-            <a:ext cx="2921508" cy="219456"/>
-          </a:xfrm>
-          <a:prstGeom prst="rect">
-            <a:avLst/>
-          </a:prstGeom>
-          <a:noFill/>
-          <a:ln/>
-        </p:spPr>
-        <p:txBody>
-          <a:bodyPr wrap="square" lIns="0" tIns="0" rIns="0" bIns="0" rtlCol="0" anchor="ctr"/>
-          <a:lstStyle/>
-          <a:p>
-            <a:pPr marL="0" indent="0">
-              <a:buNone/>
-            </a:pPr>
-            <a:r>
-              <a:rPr lang="en-US" sz="900" b="1" kern="0" spc="70" dirty="0">
-                <a:solidFill>
-                  <a:srgbClr val="2F75B5"/>
-                </a:solidFill>
-                <a:latin typeface="Arial" pitchFamily="34" charset="0"/>
-                <a:ea typeface="Arial" pitchFamily="34" charset="-122"/>
-                <a:cs typeface="Arial" pitchFamily="34" charset="-120"/>
-              </a:rPr>
-              <a:t>% COMPLETION</a:t>
-            </a:r>
-            <a:endParaRPr lang="en-US" sz="900" dirty="0"/>
-          </a:p>
-        </p:txBody>
-      </p:sp>
-      <p:sp>
-        <p:nvSpPr>
-          <p:cNvPr id="53" name="Text 51"/>
-          <p:cNvSpPr/>
-          <p:nvPr/>
-        </p:nvSpPr>
-        <p:spPr>
-          <a:xfrm>
-            <a:off x="7854696" y="6144768"/>
-            <a:ext cx="2921508" cy="384048"/>
-          </a:xfrm>
-          <a:prstGeom prst="rect">
-            <a:avLst/>
-          </a:prstGeom>
-          <a:noFill/>
-          <a:ln/>
-        </p:spPr>
-        <p:txBody>
-          <a:bodyPr wrap="square" lIns="0" tIns="0" rIns="0" bIns="0" rtlCol="0" anchor="ctr"/>
-          <a:lstStyle/>
-          <a:p>
-            <a:pPr marL="0" indent="0">
-              <a:buNone/>
-            </a:pPr>
-            <a:r>
-              <a:rPr lang="en-US" sz="1400" b="1" dirty="0">
-                <a:solidFill>
-                  <a:srgbClr val="17365D"/>
-                </a:solidFill>
-                <a:latin typeface="Arial" pitchFamily="34" charset="0"/>
-                <a:ea typeface="Arial" pitchFamily="34" charset="-122"/>
-                <a:cs typeface="Arial" pitchFamily="34" charset="-120"/>
-              </a:rPr>
-              <a:t>50%</a:t>
-            </a:r>
-            <a:endParaRPr lang="en-US" sz="1400" dirty="0"/>
-          </a:p>
-        </p:txBody>
-      </p:sp>
-      <p:sp>
-        <p:nvSpPr>
-          <p:cNvPr id="54" name="Shape 52"/>
-          <p:cNvSpPr/>
-          <p:nvPr/>
-        </p:nvSpPr>
-        <p:spPr>
-          <a:xfrm>
-            <a:off x="11178540" y="5760720"/>
-            <a:ext cx="3287268" cy="896112"/>
-          </a:xfrm>
-          <a:prstGeom prst="roundRect">
-            <a:avLst>
-              <a:gd name="adj" fmla="val 5102"/>
-            </a:avLst>
-          </a:prstGeom>
-          <a:solidFill>
-            <a:srgbClr val="FFFFFF"/>
-          </a:solidFill>
-          <a:ln w="12700">
-            <a:solidFill>
-              <a:srgbClr val="D6DBE2"/>
-            </a:solidFill>
-            <a:prstDash val="solid"/>
-          </a:ln>
-        </p:spPr>
-        <p:txBody>
-          <a:bodyPr/>
-          <a:lstStyle/>
-          <a:p>
-            <a:endParaRPr/>
-          </a:p>
-        </p:txBody>
-      </p:sp>
-      <p:sp>
-        <p:nvSpPr>
-          <p:cNvPr id="55" name="Text 53"/>
-          <p:cNvSpPr/>
-          <p:nvPr/>
-        </p:nvSpPr>
-        <p:spPr>
-          <a:xfrm>
-            <a:off x="11361420" y="5888736"/>
-            <a:ext cx="2921508" cy="219456"/>
-          </a:xfrm>
-          <a:prstGeom prst="rect">
-            <a:avLst/>
-          </a:prstGeom>
-          <a:noFill/>
-          <a:ln/>
-        </p:spPr>
-        <p:txBody>
-          <a:bodyPr wrap="square" lIns="0" tIns="0" rIns="0" bIns="0" rtlCol="0" anchor="ctr"/>
-          <a:lstStyle/>
-          <a:p>
-            <a:pPr marL="0" indent="0">
-              <a:buNone/>
-            </a:pPr>
-            <a:r>
-              <a:rPr lang="en-US" sz="900" b="1" kern="0" spc="70" dirty="0">
-                <a:solidFill>
-                  <a:srgbClr val="2F75B5"/>
-                </a:solidFill>
-                <a:latin typeface="Arial" pitchFamily="34" charset="0"/>
-                <a:ea typeface="Arial" pitchFamily="34" charset="-122"/>
-                <a:cs typeface="Arial" pitchFamily="34" charset="-120"/>
-              </a:rPr>
-              <a:t>LAST VISIT</a:t>
-            </a:r>
-            <a:endParaRPr lang="en-US" sz="900" dirty="0"/>
-          </a:p>
-        </p:txBody>
-      </p:sp>
-      <p:sp>
-        <p:nvSpPr>
-          <p:cNvPr id="56" name="Text 54"/>
-          <p:cNvSpPr/>
-          <p:nvPr/>
-        </p:nvSpPr>
-        <p:spPr>
-          <a:xfrm>
-            <a:off x="11361420" y="6144768"/>
-            <a:ext cx="2921508" cy="384048"/>
-          </a:xfrm>
-          <a:prstGeom prst="rect">
-            <a:avLst/>
-          </a:prstGeom>
-          <a:noFill/>
-          <a:ln/>
-        </p:spPr>
-        <p:txBody>
-          <a:bodyPr wrap="square" lIns="0" tIns="0" rIns="0" bIns="0" rtlCol="0" anchor="ctr"/>
-          <a:lstStyle/>
-          <a:p>
-            <a:pPr marL="0" indent="0">
-              <a:buNone/>
-            </a:pPr>
-            <a:r>
-              <a:rPr lang="en-US" sz="1400" b="1" dirty="0">
-                <a:solidFill>
-                  <a:srgbClr val="17365D"/>
-                </a:solidFill>
-                <a:latin typeface="Arial" pitchFamily="34" charset="0"/>
-                <a:ea typeface="Arial" pitchFamily="34" charset="-122"/>
-                <a:cs typeface="Arial" pitchFamily="34" charset="-120"/>
-              </a:rPr>
-              <a:t>Technical visit pending</a:t>
-            </a:r>
-            <a:endParaRPr lang="en-US" sz="1400" dirty="0"/>
-          </a:p>
-        </p:txBody>
-      </p:sp>
-      <p:sp>
-        <p:nvSpPr>
-          <p:cNvPr id="57" name="Shape 55"/>
-          <p:cNvSpPr/>
-          <p:nvPr/>
-        </p:nvSpPr>
-        <p:spPr>
-          <a:xfrm>
-            <a:off x="658368" y="6903720"/>
-            <a:ext cx="13807440" cy="1371600"/>
-          </a:xfrm>
-          <a:prstGeom prst="roundRect">
-            <a:avLst>
-              <a:gd name="adj" fmla="val 3333"/>
-            </a:avLst>
-          </a:prstGeom>
-          <a:solidFill>
-            <a:srgbClr val="FFF8E6"/>
-          </a:solidFill>
-          <a:ln w="12700">
-            <a:solidFill>
-              <a:srgbClr val="D6DBE2"/>
-            </a:solidFill>
-            <a:prstDash val="solid"/>
-          </a:ln>
-        </p:spPr>
-        <p:txBody>
-          <a:bodyPr/>
-          <a:lstStyle/>
-          <a:p>
-            <a:endParaRPr/>
-          </a:p>
-        </p:txBody>
-      </p:sp>
-      <p:sp>
-        <p:nvSpPr>
-          <p:cNvPr id="58" name="Shape 56"/>
-          <p:cNvSpPr/>
-          <p:nvPr/>
-        </p:nvSpPr>
-        <p:spPr>
-          <a:xfrm>
-            <a:off x="658368" y="6903720"/>
-            <a:ext cx="64008" cy="1371600"/>
-          </a:xfrm>
-          <a:prstGeom prst="rect">
-            <a:avLst/>
-          </a:prstGeom>
-          <a:solidFill>
-            <a:srgbClr val="B7791F"/>
-          </a:solidFill>
-          <a:ln w="12700">
-            <a:solidFill>
-              <a:srgbClr val="333333"/>
-            </a:solidFill>
-            <a:prstDash val="solid"/>
-          </a:ln>
-        </p:spPr>
-        <p:txBody>
-          <a:bodyPr/>
-          <a:lstStyle/>
-          <a:p>
-            <a:endParaRPr/>
-          </a:p>
-        </p:txBody>
-      </p:sp>
-      <p:sp>
-        <p:nvSpPr>
-          <p:cNvPr id="59" name="Text 57"/>
-          <p:cNvSpPr/>
-          <p:nvPr/>
-        </p:nvSpPr>
-        <p:spPr>
-          <a:xfrm>
-            <a:off x="932688" y="7040880"/>
-            <a:ext cx="5486400" cy="274320"/>
-          </a:xfrm>
-          <a:prstGeom prst="rect">
-            <a:avLst/>
-          </a:prstGeom>
-          <a:noFill/>
-          <a:ln/>
-        </p:spPr>
-        <p:txBody>
-          <a:bodyPr wrap="square" lIns="0" tIns="0" rIns="0" bIns="0" rtlCol="0" anchor="ctr"/>
-          <a:lstStyle/>
-          <a:p>
-            <a:pPr marL="0" indent="0">
-              <a:buNone/>
-            </a:pPr>
-            <a:r>
-              <a:rPr lang="en-US" sz="1050" b="1" kern="0" spc="70" dirty="0">
-                <a:solidFill>
-                  <a:srgbClr val="B7791F"/>
-                </a:solidFill>
-                <a:latin typeface="Arial" pitchFamily="34" charset="0"/>
-                <a:ea typeface="Arial" pitchFamily="34" charset="-122"/>
-                <a:cs typeface="Arial" pitchFamily="34" charset="-120"/>
-              </a:rPr>
-              <a:t>POINTS TO VERIFY</a:t>
-            </a:r>
-            <a:endParaRPr lang="en-US" sz="1050" dirty="0"/>
-          </a:p>
-        </p:txBody>
-      </p:sp>
-      <p:sp>
-        <p:nvSpPr>
-          <p:cNvPr id="60" name="Text 58"/>
-          <p:cNvSpPr/>
-          <p:nvPr/>
-        </p:nvSpPr>
-        <p:spPr>
-          <a:xfrm>
-            <a:off x="932688" y="7333488"/>
-            <a:ext cx="13258800" cy="868680"/>
-          </a:xfrm>
-          <a:prstGeom prst="rect">
-            <a:avLst/>
-          </a:prstGeom>
-          <a:noFill/>
-          <a:ln/>
-        </p:spPr>
-        <p:txBody>
-          <a:bodyPr wrap="square" lIns="0" tIns="0" rIns="0" bIns="0" rtlCol="0" anchor="ctr"/>
-          <a:lstStyle/>
-          <a:p>
-            <a:pPr marL="0" indent="0">
-              <a:lnSpc>
-                <a:spcPts val="1600"/>
-              </a:lnSpc>
-              <a:buNone/>
-            </a:pPr>
-            <a:r>
-              <a:rPr lang="en-US" sz="1100" dirty="0">
-                <a:solidFill>
-                  <a:srgbClr val="222222"/>
-                </a:solidFill>
-                <a:latin typeface="Arial" pitchFamily="34" charset="0"/>
-                <a:ea typeface="Arial" pitchFamily="34" charset="-122"/>
-                <a:cs typeface="Arial" pitchFamily="34" charset="-120"/>
-              </a:rPr>
-              <a:t>·  Technical visit still pending — no site photographs on record.
-·  Earlier deck showed 70 keys and architect Prashant Sutaria; both are superseded.
-</a:t>
-            </a:r>
-            <a:endParaRPr lang="en-US" sz="1100" dirty="0"/>
-          </a:p>
-        </p:txBody>
-      </p:sp>
-      <p:sp>
-        <p:nvSpPr>
-          <p:cNvPr id="61" name="Shape 59"/>
+          <p:cNvPr id="28" name="Text 26"/>
+          <p:cNvSpPr/>
+          <p:nvPr/>
+        </p:nvSpPr>
+        <p:spPr>
+          <a:xfrm>
+            <a:off x="932688" y="9509760"/>
+            <a:ext cx="13258800" cy="566928"/>
+          </a:xfrm>
+          <a:prstGeom prst="rect">
+            <a:avLst/>
+          </a:prstGeom>
+          <a:noFill/>
+          <a:ln/>
+        </p:spPr>
+        <p:txBody>
+          <a:bodyPr wrap="square" lIns="0" tIns="0" rIns="0" bIns="0" rtlCol="0" anchor="ctr"/>
+          <a:lstStyle/>
+          <a:p>
+            <a:r>
+              <a:t>Completion: —      ·      Last site visit: —      ·      Updated automatically from site form</a:t>
+            </a:r>
+          </a:p>
+        </p:txBody>
+      </p:sp>
+      <p:sp>
+        <p:nvSpPr>
+          <p:cNvPr id="29" name="Shape 27"/>
           <p:cNvSpPr/>
           <p:nvPr/>
         </p:nvSpPr>
@@ -14640,7 +14383,7 @@
       </p:sp>
       <p:sp>
         <p:nvSpPr>
-          <p:cNvPr id="62" name="Text 60"/>
+          <p:cNvPr id="30" name="Text 28"/>
           <p:cNvSpPr/>
           <p:nvPr/>
         </p:nvSpPr>
@@ -14679,7 +14422,7 @@
       </p:sp>
       <p:sp>
         <p:nvSpPr>
-          <p:cNvPr id="63" name="Text 61"/>
+          <p:cNvPr id="31" name="Text 29"/>
           <p:cNvSpPr/>
           <p:nvPr/>
         </p:nvSpPr>
@@ -16961,1287 +16704,6 @@
       <p:sp>
         <p:nvSpPr>
           <p:cNvPr id="30" name="Text 28"/>
-          <p:cNvSpPr/>
-          <p:nvPr/>
-        </p:nvSpPr>
-        <p:spPr>
-          <a:xfrm>
-            <a:off x="8979408" y="10287000"/>
-            <a:ext cx="5486400" cy="274320"/>
-          </a:xfrm>
-          <a:prstGeom prst="rect">
-            <a:avLst/>
-          </a:prstGeom>
-          <a:noFill/>
-          <a:ln/>
-        </p:spPr>
-        <p:txBody>
-          <a:bodyPr wrap="square" lIns="0" tIns="0" rIns="0" bIns="0" rtlCol="0" anchor="ctr"/>
-          <a:lstStyle/>
-          <a:p>
-            <a:pPr marL="0" indent="0" algn="r">
-              <a:buNone/>
-            </a:pPr>
-            <a:r>
-              <a:rPr sz="950" b="1" i="0">
-                <a:solidFill>
-                  <a:srgbClr val="C2185B"/>
-                </a:solidFill>
-                <a:latin typeface="Arial"/>
-              </a:rPr>
-              <a:t>RE:GEN:TA  HOTELS</a:t>
-            </a:r>
-            <a:endParaRPr lang="en-US" sz="950" dirty="0"/>
-          </a:p>
-        </p:txBody>
-      </p:sp>
-    </p:spTree>
-  </p:cSld>
-  <p:clrMapOvr>
-    <a:masterClrMapping/>
-  </p:clrMapOvr>
-</p:sld>
-</file>
-
-<file path=ppt/slides/slide5.xml><?xml version="1.0" encoding="utf-8"?>
-<p:sld xmlns:a="http://schemas.openxmlformats.org/drawingml/2006/main" xmlns:r="http://schemas.openxmlformats.org/officeDocument/2006/relationships" xmlns:p="http://schemas.openxmlformats.org/presentationml/2006/main">
-  <p:cSld name="Slide 25">
-    <p:bg>
-      <p:bgPr>
-        <a:solidFill>
-          <a:srgbClr val="F5F6F8"/>
-        </a:solidFill>
-        <a:effectLst/>
-      </p:bgPr>
-    </p:bg>
-    <p:spTree>
-      <p:nvGrpSpPr>
-        <p:cNvPr id="1" name=""/>
-        <p:cNvGrpSpPr/>
-        <p:nvPr/>
-      </p:nvGrpSpPr>
-      <p:grpSpPr>
-        <a:xfrm>
-          <a:off x="0" y="0"/>
-          <a:ext cx="0" cy="0"/>
-          <a:chOff x="0" y="0"/>
-          <a:chExt cx="0" cy="0"/>
-        </a:xfrm>
-      </p:grpSpPr>
-      <p:sp>
-        <p:nvSpPr>
-          <p:cNvPr id="2" name="Shape 0"/>
-          <p:cNvSpPr/>
-          <p:nvPr/>
-        </p:nvSpPr>
-        <p:spPr>
-          <a:xfrm>
-            <a:off x="0" y="0"/>
-            <a:ext cx="15124176" cy="1170432"/>
-          </a:xfrm>
-          <a:prstGeom prst="rect">
-            <a:avLst/>
-          </a:prstGeom>
-          <a:solidFill>
-            <a:srgbClr val="17365D"/>
-          </a:solidFill>
-          <a:ln w="12700">
-            <a:solidFill>
-              <a:srgbClr val="17365D"/>
-            </a:solidFill>
-            <a:prstDash val="solid"/>
-          </a:ln>
-        </p:spPr>
-        <p:txBody>
-          <a:bodyPr/>
-          <a:lstStyle/>
-          <a:p>
-            <a:endParaRPr/>
-          </a:p>
-        </p:txBody>
-      </p:sp>
-      <p:sp>
-        <p:nvSpPr>
-          <p:cNvPr id="3" name="Text 1"/>
-          <p:cNvSpPr/>
-          <p:nvPr/>
-        </p:nvSpPr>
-        <p:spPr>
-          <a:xfrm>
-            <a:off x="658368" y="237744"/>
-            <a:ext cx="10515600" cy="457200"/>
-          </a:xfrm>
-          <a:prstGeom prst="rect">
-            <a:avLst/>
-          </a:prstGeom>
-          <a:noFill/>
-          <a:ln/>
-        </p:spPr>
-        <p:txBody>
-          <a:bodyPr wrap="square" lIns="0" tIns="0" rIns="0" bIns="0" rtlCol="0" anchor="ctr"/>
-          <a:lstStyle/>
-          <a:p>
-            <a:pPr marL="0" indent="0">
-              <a:buNone/>
-            </a:pPr>
-            <a:r>
-              <a:rPr lang="en-US" sz="2600" b="1" dirty="0">
-                <a:solidFill>
-                  <a:srgbClr val="FFFFFF"/>
-                </a:solidFill>
-                <a:latin typeface="Arial" pitchFamily="34" charset="0"/>
-                <a:ea typeface="Arial" pitchFamily="34" charset="-122"/>
-                <a:cs typeface="Arial" pitchFamily="34" charset="-120"/>
-              </a:rPr>
-              <a:t>04 · Building façade &amp; main porch</a:t>
-            </a:r>
-            <a:endParaRPr lang="en-US" sz="2600" dirty="0"/>
-          </a:p>
-        </p:txBody>
-      </p:sp>
-      <p:sp>
-        <p:nvSpPr>
-          <p:cNvPr id="4" name="Text 2"/>
-          <p:cNvSpPr/>
-          <p:nvPr/>
-        </p:nvSpPr>
-        <p:spPr>
-          <a:xfrm>
-            <a:off x="658368" y="694944"/>
-            <a:ext cx="10515600" cy="292608"/>
-          </a:xfrm>
-          <a:prstGeom prst="rect">
-            <a:avLst/>
-          </a:prstGeom>
-          <a:noFill/>
-          <a:ln/>
-        </p:spPr>
-        <p:txBody>
-          <a:bodyPr wrap="square" lIns="0" tIns="0" rIns="0" bIns="0" rtlCol="0" anchor="ctr"/>
-          <a:lstStyle/>
-          <a:p>
-            <a:pPr marL="0" indent="0">
-              <a:buNone/>
-            </a:pPr>
-            <a:r>
-              <a:rPr lang="en-US" sz="1200" dirty="0">
-                <a:solidFill>
-                  <a:srgbClr val="AFC3DC"/>
-                </a:solidFill>
-                <a:latin typeface="Arial" pitchFamily="34" charset="0"/>
-                <a:ea typeface="Arial" pitchFamily="34" charset="-122"/>
-                <a:cs typeface="Arial" pitchFamily="34" charset="-120"/>
-              </a:rPr>
-              <a:t>Arrival experience — façade, porch, driveway, signage   ·   Regenta, Jamshedpur</a:t>
-            </a:r>
-            <a:endParaRPr lang="en-US" sz="1200" dirty="0"/>
-          </a:p>
-        </p:txBody>
-      </p:sp>
-      <p:sp>
-        <p:nvSpPr>
-          <p:cNvPr id="5" name="Text 3"/>
-          <p:cNvSpPr/>
-          <p:nvPr/>
-        </p:nvSpPr>
-        <p:spPr>
-          <a:xfrm>
-            <a:off x="11265408" y="329184"/>
-            <a:ext cx="3200400" cy="502920"/>
-          </a:xfrm>
-          <a:prstGeom prst="rect">
-            <a:avLst/>
-          </a:prstGeom>
-          <a:noFill/>
-          <a:ln/>
-        </p:spPr>
-        <p:txBody>
-          <a:bodyPr wrap="square" lIns="0" tIns="0" rIns="0" bIns="0" rtlCol="0" anchor="ctr"/>
-          <a:lstStyle/>
-          <a:p>
-            <a:pPr marL="0" indent="0" algn="r">
-              <a:buNone/>
-            </a:pPr>
-            <a:r>
-              <a:rPr lang="en-US" sz="1200" b="1" dirty="0">
-                <a:solidFill>
-                  <a:srgbClr val="FFFFFF"/>
-                </a:solidFill>
-                <a:latin typeface="Arial" pitchFamily="34" charset="0"/>
-                <a:ea typeface="Arial" pitchFamily="34" charset="-122"/>
-                <a:cs typeface="Arial" pitchFamily="34" charset="-120"/>
-              </a:rPr>
-              <a:t>ROHL-0002</a:t>
-            </a:r>
-            <a:endParaRPr lang="en-US" sz="1200" dirty="0"/>
-          </a:p>
-        </p:txBody>
-      </p:sp>
-      <p:sp>
-        <p:nvSpPr>
-          <p:cNvPr id="6" name="Shape 4"/>
-          <p:cNvSpPr/>
-          <p:nvPr/>
-        </p:nvSpPr>
-        <p:spPr>
-          <a:xfrm>
-            <a:off x="658368" y="1645920"/>
-            <a:ext cx="4419600" cy="475488"/>
-          </a:xfrm>
-          <a:prstGeom prst="rect">
-            <a:avLst/>
-          </a:prstGeom>
-          <a:solidFill>
-            <a:srgbClr val="C3C7CD"/>
-          </a:solidFill>
-          <a:ln w="12700">
-            <a:solidFill>
-              <a:srgbClr val="333333"/>
-            </a:solidFill>
-            <a:prstDash val="solid"/>
-          </a:ln>
-        </p:spPr>
-        <p:txBody>
-          <a:bodyPr/>
-          <a:lstStyle/>
-          <a:p>
-            <a:endParaRPr/>
-          </a:p>
-        </p:txBody>
-      </p:sp>
-      <p:sp>
-        <p:nvSpPr>
-          <p:cNvPr id="7" name="Text 5"/>
-          <p:cNvSpPr/>
-          <p:nvPr/>
-        </p:nvSpPr>
-        <p:spPr>
-          <a:xfrm>
-            <a:off x="822960" y="1645920"/>
-            <a:ext cx="4090416" cy="475488"/>
-          </a:xfrm>
-          <a:prstGeom prst="rect">
-            <a:avLst/>
-          </a:prstGeom>
-          <a:noFill/>
-          <a:ln/>
-        </p:spPr>
-        <p:txBody>
-          <a:bodyPr wrap="square" lIns="0" tIns="0" rIns="0" bIns="0" rtlCol="0" anchor="ctr"/>
-          <a:lstStyle/>
-          <a:p>
-            <a:pPr marL="0" indent="0">
-              <a:buNone/>
-            </a:pPr>
-            <a:r>
-              <a:rPr lang="en-US" sz="1100" b="1" kern="0" spc="60" dirty="0">
-                <a:solidFill>
-                  <a:srgbClr val="FFFFFF"/>
-                </a:solidFill>
-                <a:latin typeface="Arial" pitchFamily="34" charset="0"/>
-                <a:ea typeface="Arial" pitchFamily="34" charset="-122"/>
-                <a:cs typeface="Arial" pitchFamily="34" charset="-120"/>
-              </a:rPr>
-              <a:t>RENDERED — DESIGN INTENT</a:t>
-            </a:r>
-            <a:endParaRPr lang="en-US" sz="1100" dirty="0"/>
-          </a:p>
-        </p:txBody>
-      </p:sp>
-      <p:sp>
-        <p:nvSpPr>
-          <p:cNvPr id="8" name="Shape 6"/>
-          <p:cNvSpPr/>
-          <p:nvPr/>
-        </p:nvSpPr>
-        <p:spPr>
-          <a:xfrm>
-            <a:off x="658368" y="2212848"/>
-            <a:ext cx="4419600" cy="4709160"/>
-          </a:xfrm>
-          <a:prstGeom prst="roundRect">
-            <a:avLst>
-              <a:gd name="adj" fmla="val 1034"/>
-            </a:avLst>
-          </a:prstGeom>
-          <a:solidFill>
-            <a:srgbClr val="F0F1F3"/>
-          </a:solidFill>
-          <a:ln w="12700">
-            <a:solidFill>
-              <a:srgbClr val="D6DBE2"/>
-            </a:solidFill>
-            <a:prstDash val="solid"/>
-          </a:ln>
-        </p:spPr>
-        <p:txBody>
-          <a:bodyPr/>
-          <a:lstStyle/>
-          <a:p>
-            <a:endParaRPr/>
-          </a:p>
-        </p:txBody>
-      </p:sp>
-      <p:sp>
-        <p:nvSpPr>
-          <p:cNvPr id="9" name="Text 7"/>
-          <p:cNvSpPr/>
-          <p:nvPr/>
-        </p:nvSpPr>
-        <p:spPr>
-          <a:xfrm>
-            <a:off x="932688" y="4338828"/>
-            <a:ext cx="3870960" cy="457200"/>
-          </a:xfrm>
-          <a:prstGeom prst="rect">
-            <a:avLst/>
-          </a:prstGeom>
-          <a:noFill/>
-          <a:ln/>
-        </p:spPr>
-        <p:txBody>
-          <a:bodyPr wrap="square" lIns="0" tIns="0" rIns="0" bIns="0" rtlCol="0" anchor="ctr"/>
-          <a:lstStyle/>
-          <a:p>
-            <a:pPr marL="0" indent="0" algn="ctr">
-              <a:buNone/>
-            </a:pPr>
-            <a:r>
-              <a:rPr lang="en-US" sz="1200" i="1" dirty="0">
-                <a:solidFill>
-                  <a:srgbClr val="9AA0A6"/>
-                </a:solidFill>
-                <a:latin typeface="Arial" pitchFamily="34" charset="0"/>
-                <a:ea typeface="Arial" pitchFamily="34" charset="-122"/>
-                <a:cs typeface="Arial" pitchFamily="34" charset="-120"/>
-              </a:rPr>
-              <a:t>Photograph awaited</a:t>
-            </a:r>
-            <a:endParaRPr lang="en-US" sz="1200" dirty="0"/>
-          </a:p>
-        </p:txBody>
-      </p:sp>
-      <p:sp>
-        <p:nvSpPr>
-          <p:cNvPr id="10" name="Shape 8"/>
-          <p:cNvSpPr/>
-          <p:nvPr/>
-        </p:nvSpPr>
-        <p:spPr>
-          <a:xfrm>
-            <a:off x="5352288" y="1645920"/>
-            <a:ext cx="4419600" cy="475488"/>
-          </a:xfrm>
-          <a:prstGeom prst="rect">
-            <a:avLst/>
-          </a:prstGeom>
-          <a:solidFill>
-            <a:srgbClr val="C3C7CD"/>
-          </a:solidFill>
-          <a:ln w="12700">
-            <a:solidFill>
-              <a:srgbClr val="333333"/>
-            </a:solidFill>
-            <a:prstDash val="solid"/>
-          </a:ln>
-        </p:spPr>
-        <p:txBody>
-          <a:bodyPr/>
-          <a:lstStyle/>
-          <a:p>
-            <a:endParaRPr/>
-          </a:p>
-        </p:txBody>
-      </p:sp>
-      <p:sp>
-        <p:nvSpPr>
-          <p:cNvPr id="11" name="Text 9"/>
-          <p:cNvSpPr/>
-          <p:nvPr/>
-        </p:nvSpPr>
-        <p:spPr>
-          <a:xfrm>
-            <a:off x="5516880" y="1645920"/>
-            <a:ext cx="4090416" cy="475488"/>
-          </a:xfrm>
-          <a:prstGeom prst="rect">
-            <a:avLst/>
-          </a:prstGeom>
-          <a:noFill/>
-          <a:ln/>
-        </p:spPr>
-        <p:txBody>
-          <a:bodyPr wrap="square" lIns="0" tIns="0" rIns="0" bIns="0" rtlCol="0" anchor="ctr"/>
-          <a:lstStyle/>
-          <a:p>
-            <a:pPr marL="0" indent="0">
-              <a:buNone/>
-            </a:pPr>
-            <a:r>
-              <a:rPr lang="en-US" sz="1100" b="1" kern="0" spc="60" dirty="0">
-                <a:solidFill>
-                  <a:srgbClr val="FFFFFF"/>
-                </a:solidFill>
-                <a:latin typeface="Arial" pitchFamily="34" charset="0"/>
-                <a:ea typeface="Arial" pitchFamily="34" charset="-122"/>
-                <a:cs typeface="Arial" pitchFamily="34" charset="-120"/>
-              </a:rPr>
-              <a:t>PREVIOUS MONTH</a:t>
-            </a:r>
-            <a:endParaRPr lang="en-US" sz="1100" dirty="0"/>
-          </a:p>
-        </p:txBody>
-      </p:sp>
-      <p:sp>
-        <p:nvSpPr>
-          <p:cNvPr id="12" name="Shape 10"/>
-          <p:cNvSpPr/>
-          <p:nvPr/>
-        </p:nvSpPr>
-        <p:spPr>
-          <a:xfrm>
-            <a:off x="5352288" y="2212848"/>
-            <a:ext cx="4419600" cy="4709160"/>
-          </a:xfrm>
-          <a:prstGeom prst="roundRect">
-            <a:avLst>
-              <a:gd name="adj" fmla="val 1034"/>
-            </a:avLst>
-          </a:prstGeom>
-          <a:solidFill>
-            <a:srgbClr val="F0F1F3"/>
-          </a:solidFill>
-          <a:ln w="12700">
-            <a:solidFill>
-              <a:srgbClr val="D6DBE2"/>
-            </a:solidFill>
-            <a:prstDash val="solid"/>
-          </a:ln>
-        </p:spPr>
-        <p:txBody>
-          <a:bodyPr/>
-          <a:lstStyle/>
-          <a:p>
-            <a:endParaRPr/>
-          </a:p>
-        </p:txBody>
-      </p:sp>
-      <p:sp>
-        <p:nvSpPr>
-          <p:cNvPr id="13" name="Text 11"/>
-          <p:cNvSpPr/>
-          <p:nvPr/>
-        </p:nvSpPr>
-        <p:spPr>
-          <a:xfrm>
-            <a:off x="5626608" y="4338828"/>
-            <a:ext cx="3870960" cy="457200"/>
-          </a:xfrm>
-          <a:prstGeom prst="rect">
-            <a:avLst/>
-          </a:prstGeom>
-          <a:noFill/>
-          <a:ln/>
-        </p:spPr>
-        <p:txBody>
-          <a:bodyPr wrap="square" lIns="0" tIns="0" rIns="0" bIns="0" rtlCol="0" anchor="ctr"/>
-          <a:lstStyle/>
-          <a:p>
-            <a:pPr marL="0" indent="0" algn="ctr">
-              <a:buNone/>
-            </a:pPr>
-            <a:r>
-              <a:rPr lang="en-US" sz="1200" i="1" dirty="0">
-                <a:solidFill>
-                  <a:srgbClr val="9AA0A6"/>
-                </a:solidFill>
-                <a:latin typeface="Arial" pitchFamily="34" charset="0"/>
-                <a:ea typeface="Arial" pitchFamily="34" charset="-122"/>
-                <a:cs typeface="Arial" pitchFamily="34" charset="-120"/>
-              </a:rPr>
-              <a:t>Photograph awaited</a:t>
-            </a:r>
-            <a:endParaRPr lang="en-US" sz="1200" dirty="0"/>
-          </a:p>
-        </p:txBody>
-      </p:sp>
-      <p:sp>
-        <p:nvSpPr>
-          <p:cNvPr id="14" name="Shape 12"/>
-          <p:cNvSpPr/>
-          <p:nvPr/>
-        </p:nvSpPr>
-        <p:spPr>
-          <a:xfrm>
-            <a:off x="10046208" y="1645920"/>
-            <a:ext cx="4419600" cy="475488"/>
-          </a:xfrm>
-          <a:prstGeom prst="rect">
-            <a:avLst/>
-          </a:prstGeom>
-          <a:solidFill>
-            <a:srgbClr val="C3C7CD"/>
-          </a:solidFill>
-          <a:ln w="12700">
-            <a:solidFill>
-              <a:srgbClr val="333333"/>
-            </a:solidFill>
-            <a:prstDash val="solid"/>
-          </a:ln>
-        </p:spPr>
-        <p:txBody>
-          <a:bodyPr/>
-          <a:lstStyle/>
-          <a:p>
-            <a:endParaRPr/>
-          </a:p>
-        </p:txBody>
-      </p:sp>
-      <p:sp>
-        <p:nvSpPr>
-          <p:cNvPr id="15" name="Text 13"/>
-          <p:cNvSpPr/>
-          <p:nvPr/>
-        </p:nvSpPr>
-        <p:spPr>
-          <a:xfrm>
-            <a:off x="10210800" y="1645920"/>
-            <a:ext cx="4090416" cy="475488"/>
-          </a:xfrm>
-          <a:prstGeom prst="rect">
-            <a:avLst/>
-          </a:prstGeom>
-          <a:noFill/>
-          <a:ln/>
-        </p:spPr>
-        <p:txBody>
-          <a:bodyPr wrap="square" lIns="0" tIns="0" rIns="0" bIns="0" rtlCol="0" anchor="ctr"/>
-          <a:lstStyle/>
-          <a:p>
-            <a:pPr marL="0" indent="0">
-              <a:buNone/>
-            </a:pPr>
-            <a:r>
-              <a:rPr lang="en-US" sz="1100" b="1" kern="0" spc="60" dirty="0">
-                <a:solidFill>
-                  <a:srgbClr val="FFFFFF"/>
-                </a:solidFill>
-                <a:latin typeface="Arial" pitchFamily="34" charset="0"/>
-                <a:ea typeface="Arial" pitchFamily="34" charset="-122"/>
-                <a:cs typeface="Arial" pitchFamily="34" charset="-120"/>
-              </a:rPr>
-              <a:t>CURRENT MONTH</a:t>
-            </a:r>
-            <a:endParaRPr lang="en-US" sz="1100" dirty="0"/>
-          </a:p>
-        </p:txBody>
-      </p:sp>
-      <p:sp>
-        <p:nvSpPr>
-          <p:cNvPr id="16" name="Shape 14"/>
-          <p:cNvSpPr/>
-          <p:nvPr/>
-        </p:nvSpPr>
-        <p:spPr>
-          <a:xfrm>
-            <a:off x="10046208" y="2212848"/>
-            <a:ext cx="4419600" cy="4709160"/>
-          </a:xfrm>
-          <a:prstGeom prst="roundRect">
-            <a:avLst>
-              <a:gd name="adj" fmla="val 1034"/>
-            </a:avLst>
-          </a:prstGeom>
-          <a:solidFill>
-            <a:srgbClr val="F0F1F3"/>
-          </a:solidFill>
-          <a:ln w="12700">
-            <a:solidFill>
-              <a:srgbClr val="D6DBE2"/>
-            </a:solidFill>
-            <a:prstDash val="solid"/>
-          </a:ln>
-        </p:spPr>
-        <p:txBody>
-          <a:bodyPr/>
-          <a:lstStyle/>
-          <a:p>
-            <a:endParaRPr/>
-          </a:p>
-        </p:txBody>
-      </p:sp>
-      <p:sp>
-        <p:nvSpPr>
-          <p:cNvPr id="17" name="Text 15"/>
-          <p:cNvSpPr/>
-          <p:nvPr/>
-        </p:nvSpPr>
-        <p:spPr>
-          <a:xfrm>
-            <a:off x="10320528" y="4338828"/>
-            <a:ext cx="3870960" cy="457200"/>
-          </a:xfrm>
-          <a:prstGeom prst="rect">
-            <a:avLst/>
-          </a:prstGeom>
-          <a:noFill/>
-          <a:ln/>
-        </p:spPr>
-        <p:txBody>
-          <a:bodyPr wrap="square" lIns="0" tIns="0" rIns="0" bIns="0" rtlCol="0" anchor="ctr"/>
-          <a:lstStyle/>
-          <a:p>
-            <a:pPr marL="0" indent="0" algn="ctr">
-              <a:buNone/>
-            </a:pPr>
-            <a:r>
-              <a:rPr lang="en-US" sz="1200" i="1" dirty="0">
-                <a:solidFill>
-                  <a:srgbClr val="9AA0A6"/>
-                </a:solidFill>
-                <a:latin typeface="Arial" pitchFamily="34" charset="0"/>
-                <a:ea typeface="Arial" pitchFamily="34" charset="-122"/>
-                <a:cs typeface="Arial" pitchFamily="34" charset="-120"/>
-              </a:rPr>
-              <a:t>Photograph awaited</a:t>
-            </a:r>
-            <a:endParaRPr lang="en-US" sz="1200" dirty="0"/>
-          </a:p>
-        </p:txBody>
-      </p:sp>
-      <p:sp>
-        <p:nvSpPr>
-          <p:cNvPr id="18" name="Shape 16"/>
-          <p:cNvSpPr/>
-          <p:nvPr/>
-        </p:nvSpPr>
-        <p:spPr>
-          <a:xfrm>
-            <a:off x="658368" y="7232904"/>
-            <a:ext cx="4694530" cy="1874520"/>
-          </a:xfrm>
-          <a:prstGeom prst="roundRect">
-            <a:avLst>
-              <a:gd name="adj" fmla="val 2439"/>
-            </a:avLst>
-          </a:prstGeom>
-          <a:solidFill>
-            <a:srgbClr val="FFFFFF"/>
-          </a:solidFill>
-          <a:ln w="12700">
-            <a:solidFill>
-              <a:srgbClr val="D6DBE2"/>
-            </a:solidFill>
-            <a:prstDash val="solid"/>
-          </a:ln>
-        </p:spPr>
-        <p:txBody>
-          <a:bodyPr/>
-          <a:lstStyle/>
-          <a:p>
-            <a:endParaRPr/>
-          </a:p>
-        </p:txBody>
-      </p:sp>
-      <p:sp>
-        <p:nvSpPr>
-          <p:cNvPr id="19" name="Shape 17"/>
-          <p:cNvSpPr/>
-          <p:nvPr/>
-        </p:nvSpPr>
-        <p:spPr>
-          <a:xfrm>
-            <a:off x="658368" y="7232904"/>
-            <a:ext cx="4694530" cy="402336"/>
-          </a:xfrm>
-          <a:prstGeom prst="rect">
-            <a:avLst/>
-          </a:prstGeom>
-          <a:solidFill>
-            <a:srgbClr val="2F75B5"/>
-          </a:solidFill>
-          <a:ln w="12700">
-            <a:solidFill>
-              <a:srgbClr val="333333"/>
-            </a:solidFill>
-            <a:prstDash val="solid"/>
-          </a:ln>
-        </p:spPr>
-        <p:txBody>
-          <a:bodyPr/>
-          <a:lstStyle/>
-          <a:p>
-            <a:endParaRPr/>
-          </a:p>
-        </p:txBody>
-      </p:sp>
-      <p:sp>
-        <p:nvSpPr>
-          <p:cNvPr id="20" name="Text 18"/>
-          <p:cNvSpPr/>
-          <p:nvPr/>
-        </p:nvSpPr>
-        <p:spPr>
-          <a:xfrm>
-            <a:off x="822960" y="7232904"/>
-            <a:ext cx="4365346" cy="402336"/>
-          </a:xfrm>
-          <a:prstGeom prst="rect">
-            <a:avLst/>
-          </a:prstGeom>
-          <a:noFill/>
-          <a:ln/>
-        </p:spPr>
-        <p:txBody>
-          <a:bodyPr wrap="square" lIns="0" tIns="0" rIns="0" bIns="0" rtlCol="0" anchor="ctr"/>
-          <a:lstStyle/>
-          <a:p>
-            <a:pPr marL="0" indent="0">
-              <a:buNone/>
-            </a:pPr>
-            <a:r>
-              <a:rPr lang="en-US" sz="1050" b="1" kern="0" spc="70" dirty="0">
-                <a:solidFill>
-                  <a:srgbClr val="FFFFFF"/>
-                </a:solidFill>
-                <a:latin typeface="Arial" pitchFamily="34" charset="0"/>
-                <a:ea typeface="Arial" pitchFamily="34" charset="-122"/>
-                <a:cs typeface="Arial" pitchFamily="34" charset="-120"/>
-              </a:rPr>
-              <a:t>VIDEO LINKS</a:t>
-            </a:r>
-            <a:endParaRPr lang="en-US" sz="1050" dirty="0"/>
-          </a:p>
-        </p:txBody>
-      </p:sp>
-      <p:sp>
-        <p:nvSpPr>
-          <p:cNvPr id="21" name="Text 19"/>
-          <p:cNvSpPr/>
-          <p:nvPr/>
-        </p:nvSpPr>
-        <p:spPr>
-          <a:xfrm>
-            <a:off x="859536" y="7763256"/>
-            <a:ext cx="1691640" cy="329184"/>
-          </a:xfrm>
-          <a:prstGeom prst="rect">
-            <a:avLst/>
-          </a:prstGeom>
-          <a:noFill/>
-          <a:ln/>
-        </p:spPr>
-        <p:txBody>
-          <a:bodyPr wrap="square" lIns="0" tIns="0" rIns="0" bIns="0" rtlCol="0" anchor="ctr"/>
-          <a:lstStyle/>
-          <a:p>
-            <a:pPr marL="0" indent="0">
-              <a:buNone/>
-            </a:pPr>
-            <a:r>
-              <a:rPr lang="en-US" sz="1000" dirty="0">
-                <a:solidFill>
-                  <a:srgbClr val="6E7680"/>
-                </a:solidFill>
-                <a:latin typeface="Arial" pitchFamily="34" charset="0"/>
-                <a:ea typeface="Arial" pitchFamily="34" charset="-122"/>
-                <a:cs typeface="Arial" pitchFamily="34" charset="-120"/>
-              </a:rPr>
-              <a:t>Walkthrough</a:t>
-            </a:r>
-            <a:endParaRPr lang="en-US" sz="1000" dirty="0"/>
-          </a:p>
-        </p:txBody>
-      </p:sp>
-      <p:sp>
-        <p:nvSpPr>
-          <p:cNvPr id="22" name="Text 20"/>
-          <p:cNvSpPr/>
-          <p:nvPr/>
-        </p:nvSpPr>
-        <p:spPr>
-          <a:xfrm>
-            <a:off x="2624328" y="7763256"/>
-            <a:ext cx="2499970" cy="329184"/>
-          </a:xfrm>
-          <a:prstGeom prst="rect">
-            <a:avLst/>
-          </a:prstGeom>
-          <a:noFill/>
-          <a:ln/>
-        </p:spPr>
-        <p:txBody>
-          <a:bodyPr wrap="square" lIns="0" tIns="0" rIns="0" bIns="0" rtlCol="0" anchor="ctr"/>
-          <a:lstStyle/>
-          <a:p>
-            <a:pPr marL="0" indent="0">
-              <a:buNone/>
-            </a:pPr>
-            <a:r>
-              <a:rPr lang="en-US" sz="1000" dirty="0">
-                <a:solidFill>
-                  <a:srgbClr val="9AA0A6"/>
-                </a:solidFill>
-                <a:latin typeface="Arial" pitchFamily="34" charset="0"/>
-                <a:ea typeface="Arial" pitchFamily="34" charset="-122"/>
-                <a:cs typeface="Arial" pitchFamily="34" charset="-120"/>
-              </a:rPr>
-              <a:t>—</a:t>
-            </a:r>
-            <a:endParaRPr lang="en-US" sz="1000" dirty="0"/>
-          </a:p>
-        </p:txBody>
-      </p:sp>
-      <p:sp>
-        <p:nvSpPr>
-          <p:cNvPr id="23" name="Text 21"/>
-          <p:cNvSpPr/>
-          <p:nvPr/>
-        </p:nvSpPr>
-        <p:spPr>
-          <a:xfrm>
-            <a:off x="859536" y="8183880"/>
-            <a:ext cx="1691640" cy="329184"/>
-          </a:xfrm>
-          <a:prstGeom prst="rect">
-            <a:avLst/>
-          </a:prstGeom>
-          <a:noFill/>
-          <a:ln/>
-        </p:spPr>
-        <p:txBody>
-          <a:bodyPr wrap="square" lIns="0" tIns="0" rIns="0" bIns="0" rtlCol="0" anchor="ctr"/>
-          <a:lstStyle/>
-          <a:p>
-            <a:pPr marL="0" indent="0">
-              <a:buNone/>
-            </a:pPr>
-            <a:r>
-              <a:rPr lang="en-US" sz="1000" dirty="0">
-                <a:solidFill>
-                  <a:srgbClr val="6E7680"/>
-                </a:solidFill>
-                <a:latin typeface="Arial" pitchFamily="34" charset="0"/>
-                <a:ea typeface="Arial" pitchFamily="34" charset="-122"/>
-                <a:cs typeface="Arial" pitchFamily="34" charset="-120"/>
-              </a:rPr>
-              <a:t>Detail / close-up</a:t>
-            </a:r>
-            <a:endParaRPr lang="en-US" sz="1000" dirty="0"/>
-          </a:p>
-        </p:txBody>
-      </p:sp>
-      <p:sp>
-        <p:nvSpPr>
-          <p:cNvPr id="24" name="Text 22"/>
-          <p:cNvSpPr/>
-          <p:nvPr/>
-        </p:nvSpPr>
-        <p:spPr>
-          <a:xfrm>
-            <a:off x="2624328" y="8183880"/>
-            <a:ext cx="2499970" cy="329184"/>
-          </a:xfrm>
-          <a:prstGeom prst="rect">
-            <a:avLst/>
-          </a:prstGeom>
-          <a:noFill/>
-          <a:ln/>
-        </p:spPr>
-        <p:txBody>
-          <a:bodyPr wrap="square" lIns="0" tIns="0" rIns="0" bIns="0" rtlCol="0" anchor="ctr"/>
-          <a:lstStyle/>
-          <a:p>
-            <a:pPr marL="0" indent="0">
-              <a:buNone/>
-            </a:pPr>
-            <a:r>
-              <a:rPr lang="en-US" sz="1000" dirty="0">
-                <a:solidFill>
-                  <a:srgbClr val="9AA0A6"/>
-                </a:solidFill>
-                <a:latin typeface="Arial" pitchFamily="34" charset="0"/>
-                <a:ea typeface="Arial" pitchFamily="34" charset="-122"/>
-                <a:cs typeface="Arial" pitchFamily="34" charset="-120"/>
-              </a:rPr>
-              <a:t>—</a:t>
-            </a:r>
-            <a:endParaRPr lang="en-US" sz="1000" dirty="0"/>
-          </a:p>
-        </p:txBody>
-      </p:sp>
-      <p:sp>
-        <p:nvSpPr>
-          <p:cNvPr id="25" name="Text 23"/>
-          <p:cNvSpPr/>
-          <p:nvPr/>
-        </p:nvSpPr>
-        <p:spPr>
-          <a:xfrm>
-            <a:off x="859536" y="8604504"/>
-            <a:ext cx="1691640" cy="329184"/>
-          </a:xfrm>
-          <a:prstGeom prst="rect">
-            <a:avLst/>
-          </a:prstGeom>
-          <a:noFill/>
-          <a:ln/>
-        </p:spPr>
-        <p:txBody>
-          <a:bodyPr wrap="square" lIns="0" tIns="0" rIns="0" bIns="0" rtlCol="0" anchor="ctr"/>
-          <a:lstStyle/>
-          <a:p>
-            <a:pPr marL="0" indent="0">
-              <a:buNone/>
-            </a:pPr>
-            <a:r>
-              <a:rPr lang="en-US" sz="1000" dirty="0">
-                <a:solidFill>
-                  <a:srgbClr val="6E7680"/>
-                </a:solidFill>
-                <a:latin typeface="Arial" pitchFamily="34" charset="0"/>
-                <a:ea typeface="Arial" pitchFamily="34" charset="-122"/>
-                <a:cs typeface="Arial" pitchFamily="34" charset="-120"/>
-              </a:rPr>
-              <a:t>Snag review</a:t>
-            </a:r>
-            <a:endParaRPr lang="en-US" sz="1000" dirty="0"/>
-          </a:p>
-        </p:txBody>
-      </p:sp>
-      <p:sp>
-        <p:nvSpPr>
-          <p:cNvPr id="26" name="Text 24"/>
-          <p:cNvSpPr/>
-          <p:nvPr/>
-        </p:nvSpPr>
-        <p:spPr>
-          <a:xfrm>
-            <a:off x="2624328" y="8604504"/>
-            <a:ext cx="2499970" cy="329184"/>
-          </a:xfrm>
-          <a:prstGeom prst="rect">
-            <a:avLst/>
-          </a:prstGeom>
-          <a:noFill/>
-          <a:ln/>
-        </p:spPr>
-        <p:txBody>
-          <a:bodyPr wrap="square" lIns="0" tIns="0" rIns="0" bIns="0" rtlCol="0" anchor="ctr"/>
-          <a:lstStyle/>
-          <a:p>
-            <a:pPr marL="0" indent="0">
-              <a:buNone/>
-            </a:pPr>
-            <a:r>
-              <a:rPr lang="en-US" sz="1000" dirty="0">
-                <a:solidFill>
-                  <a:srgbClr val="9AA0A6"/>
-                </a:solidFill>
-                <a:latin typeface="Arial" pitchFamily="34" charset="0"/>
-                <a:ea typeface="Arial" pitchFamily="34" charset="-122"/>
-                <a:cs typeface="Arial" pitchFamily="34" charset="-120"/>
-              </a:rPr>
-              <a:t>—</a:t>
-            </a:r>
-            <a:endParaRPr lang="en-US" sz="1000" dirty="0"/>
-          </a:p>
-        </p:txBody>
-      </p:sp>
-      <p:sp>
-        <p:nvSpPr>
-          <p:cNvPr id="27" name="Shape 25"/>
-          <p:cNvSpPr/>
-          <p:nvPr/>
-        </p:nvSpPr>
-        <p:spPr>
-          <a:xfrm>
-            <a:off x="5627218" y="7232904"/>
-            <a:ext cx="8838590" cy="1874520"/>
-          </a:xfrm>
-          <a:prstGeom prst="roundRect">
-            <a:avLst>
-              <a:gd name="adj" fmla="val 2439"/>
-            </a:avLst>
-          </a:prstGeom>
-          <a:solidFill>
-            <a:srgbClr val="FFFFFF"/>
-          </a:solidFill>
-          <a:ln w="12700">
-            <a:solidFill>
-              <a:srgbClr val="D6DBE2"/>
-            </a:solidFill>
-            <a:prstDash val="solid"/>
-          </a:ln>
-        </p:spPr>
-        <p:txBody>
-          <a:bodyPr/>
-          <a:lstStyle/>
-          <a:p>
-            <a:endParaRPr/>
-          </a:p>
-        </p:txBody>
-      </p:sp>
-      <p:sp>
-        <p:nvSpPr>
-          <p:cNvPr id="28" name="Shape 26"/>
-          <p:cNvSpPr/>
-          <p:nvPr/>
-        </p:nvSpPr>
-        <p:spPr>
-          <a:xfrm>
-            <a:off x="5627218" y="7232904"/>
-            <a:ext cx="8838590" cy="402336"/>
-          </a:xfrm>
-          <a:prstGeom prst="rect">
-            <a:avLst/>
-          </a:prstGeom>
-          <a:solidFill>
-            <a:srgbClr val="17365D"/>
-          </a:solidFill>
-          <a:ln w="12700">
-            <a:solidFill>
-              <a:srgbClr val="333333"/>
-            </a:solidFill>
-            <a:prstDash val="solid"/>
-          </a:ln>
-        </p:spPr>
-        <p:txBody>
-          <a:bodyPr/>
-          <a:lstStyle/>
-          <a:p>
-            <a:endParaRPr/>
-          </a:p>
-        </p:txBody>
-      </p:sp>
-      <p:sp>
-        <p:nvSpPr>
-          <p:cNvPr id="29" name="Text 27"/>
-          <p:cNvSpPr/>
-          <p:nvPr/>
-        </p:nvSpPr>
-        <p:spPr>
-          <a:xfrm>
-            <a:off x="5791810" y="7232904"/>
-            <a:ext cx="8509406" cy="402336"/>
-          </a:xfrm>
-          <a:prstGeom prst="rect">
-            <a:avLst/>
-          </a:prstGeom>
-          <a:noFill/>
-          <a:ln/>
-        </p:spPr>
-        <p:txBody>
-          <a:bodyPr wrap="square" lIns="0" tIns="0" rIns="0" bIns="0" rtlCol="0" anchor="ctr"/>
-          <a:lstStyle/>
-          <a:p>
-            <a:pPr marL="0" indent="0">
-              <a:buNone/>
-            </a:pPr>
-            <a:r>
-              <a:rPr lang="en-US" sz="1050" b="1" kern="0" spc="70" dirty="0">
-                <a:solidFill>
-                  <a:srgbClr val="FFFFFF"/>
-                </a:solidFill>
-                <a:latin typeface="Arial" pitchFamily="34" charset="0"/>
-                <a:ea typeface="Arial" pitchFamily="34" charset="-122"/>
-                <a:cs typeface="Arial" pitchFamily="34" charset="-120"/>
-              </a:rPr>
-              <a:t>FEEDBACK FOR THIS SPACE</a:t>
-            </a:r>
-            <a:endParaRPr lang="en-US" sz="1050" dirty="0"/>
-          </a:p>
-        </p:txBody>
-      </p:sp>
-      <p:sp>
-        <p:nvSpPr>
-          <p:cNvPr id="30" name="Text 28"/>
-          <p:cNvSpPr/>
-          <p:nvPr/>
-        </p:nvSpPr>
-        <p:spPr>
-          <a:xfrm>
-            <a:off x="5828386" y="7744968"/>
-            <a:ext cx="8436254" cy="1234440"/>
-          </a:xfrm>
-          <a:prstGeom prst="rect">
-            <a:avLst/>
-          </a:prstGeom>
-          <a:noFill/>
-          <a:ln/>
-        </p:spPr>
-        <p:txBody>
-          <a:bodyPr wrap="square" lIns="0" tIns="0" rIns="0" bIns="0" rtlCol="0" anchor="t"/>
-          <a:lstStyle/>
-          <a:p>
-            <a:pPr marL="0" indent="0">
-              <a:lnSpc>
-                <a:spcPts val="1600"/>
-              </a:lnSpc>
-              <a:buNone/>
-            </a:pPr>
-            <a:r>
-              <a:rPr lang="en-US" sz="1100" i="1" dirty="0">
-                <a:solidFill>
-                  <a:srgbClr val="9AA0A6"/>
-                </a:solidFill>
-                <a:latin typeface="Arial" pitchFamily="34" charset="0"/>
-                <a:ea typeface="Arial" pitchFamily="34" charset="-122"/>
-                <a:cs typeface="Arial" pitchFamily="34" charset="-120"/>
-              </a:rPr>
-              <a:t>To be recorded at the next site visit.</a:t>
-            </a:r>
-            <a:endParaRPr lang="en-US" sz="1100" dirty="0"/>
-          </a:p>
-        </p:txBody>
-      </p:sp>
-      <p:sp>
-        <p:nvSpPr>
-          <p:cNvPr id="31" name="Shape 29"/>
-          <p:cNvSpPr/>
-          <p:nvPr/>
-        </p:nvSpPr>
-        <p:spPr>
-          <a:xfrm>
-            <a:off x="658368" y="9052560"/>
-            <a:ext cx="13807440" cy="566928"/>
-          </a:xfrm>
-          <a:prstGeom prst="roundRect">
-            <a:avLst>
-              <a:gd name="adj" fmla="val 8065"/>
-            </a:avLst>
-          </a:prstGeom>
-          <a:solidFill>
-            <a:srgbClr val="EAF1F9"/>
-          </a:solidFill>
-          <a:ln w="12700">
-            <a:solidFill>
-              <a:srgbClr val="D6DBE2"/>
-            </a:solidFill>
-            <a:prstDash val="solid"/>
-          </a:ln>
-        </p:spPr>
-        <p:txBody>
-          <a:bodyPr/>
-          <a:lstStyle/>
-          <a:p>
-            <a:endParaRPr/>
-          </a:p>
-        </p:txBody>
-      </p:sp>
-      <p:sp>
-        <p:nvSpPr>
-          <p:cNvPr id="32" name="Text 30"/>
-          <p:cNvSpPr/>
-          <p:nvPr/>
-        </p:nvSpPr>
-        <p:spPr>
-          <a:xfrm>
-            <a:off x="932688" y="9052560"/>
-            <a:ext cx="13258800" cy="566928"/>
-          </a:xfrm>
-          <a:prstGeom prst="rect">
-            <a:avLst/>
-          </a:prstGeom>
-          <a:noFill/>
-          <a:ln/>
-        </p:spPr>
-        <p:txBody>
-          <a:bodyPr wrap="square" lIns="0" tIns="0" rIns="0" bIns="0" rtlCol="0" anchor="ctr"/>
-          <a:lstStyle/>
-          <a:p>
-            <a:pPr marL="0" indent="0">
-              <a:buNone/>
-            </a:pPr>
-            <a:r>
-              <a:rPr lang="en-US" sz="1100" b="1" dirty="0">
-                <a:solidFill>
-                  <a:srgbClr val="17365D"/>
-                </a:solidFill>
-                <a:latin typeface="Arial" pitchFamily="34" charset="0"/>
-                <a:ea typeface="Arial" pitchFamily="34" charset="-122"/>
-                <a:cs typeface="Arial" pitchFamily="34" charset="-120"/>
-              </a:rPr>
-              <a:t>Last site visit: Technical visit pending   ·   Completion 50%   ·   Stage: Construction   ·   Risk: Medium</a:t>
-            </a:r>
-            <a:endParaRPr lang="en-US" sz="1100" dirty="0"/>
-          </a:p>
-        </p:txBody>
-      </p:sp>
-      <p:sp>
-        <p:nvSpPr>
-          <p:cNvPr id="33" name="Shape 31"/>
-          <p:cNvSpPr/>
-          <p:nvPr/>
-        </p:nvSpPr>
-        <p:spPr>
-          <a:xfrm>
-            <a:off x="0" y="10213848"/>
-            <a:ext cx="15124176" cy="32004"/>
-          </a:xfrm>
-          <a:prstGeom prst="rect">
-            <a:avLst/>
-          </a:prstGeom>
-          <a:solidFill>
-            <a:srgbClr val="17365D"/>
-          </a:solidFill>
-          <a:ln w="12700">
-            <a:solidFill>
-              <a:srgbClr val="17365D"/>
-            </a:solidFill>
-            <a:prstDash val="solid"/>
-          </a:ln>
-        </p:spPr>
-        <p:txBody>
-          <a:bodyPr/>
-          <a:lstStyle/>
-          <a:p>
-            <a:endParaRPr/>
-          </a:p>
-        </p:txBody>
-      </p:sp>
-      <p:sp>
-        <p:nvSpPr>
-          <p:cNvPr id="34" name="Text 32"/>
-          <p:cNvSpPr/>
-          <p:nvPr/>
-        </p:nvSpPr>
-        <p:spPr>
-          <a:xfrm>
-            <a:off x="658368" y="10287000"/>
-            <a:ext cx="8229600" cy="274320"/>
-          </a:xfrm>
-          <a:prstGeom prst="rect">
-            <a:avLst/>
-          </a:prstGeom>
-          <a:noFill/>
-          <a:ln/>
-        </p:spPr>
-        <p:txBody>
-          <a:bodyPr wrap="square" lIns="0" tIns="0" rIns="0" bIns="0" rtlCol="0" anchor="ctr"/>
-          <a:lstStyle/>
-          <a:p>
-            <a:pPr marL="0" indent="0">
-              <a:buNone/>
-            </a:pPr>
-            <a:r>
-              <a:rPr lang="en-US" sz="950" dirty="0">
-                <a:solidFill>
-                  <a:srgbClr val="6E7680"/>
-                </a:solidFill>
-                <a:latin typeface="Arial" pitchFamily="34" charset="0"/>
-                <a:ea typeface="Arial" pitchFamily="34" charset="-122"/>
-                <a:cs typeface="Arial" pitchFamily="34" charset="-120"/>
-              </a:rPr>
-              <a:t>ROHL-0002  ·  Regenta, Jamshedpur</a:t>
-            </a:r>
-            <a:endParaRPr lang="en-US" sz="950" dirty="0"/>
-          </a:p>
-        </p:txBody>
-      </p:sp>
-      <p:sp>
-        <p:nvSpPr>
-          <p:cNvPr id="35" name="Text 33"/>
           <p:cNvSpPr/>
           <p:nvPr/>
         </p:nvSpPr>
